--- a/curso/semana-02-scrum-y-acta/nuestras-entregas/Cuadro_Principios_Scrum_NewBit/Cuadro_Principios_Scrum_NewBit.pptx
+++ b/curso/semana-02-scrum-y-acta/nuestras-entregas/Cuadro_Principios_Scrum_NewBit/Cuadro_Principios_Scrum_NewBit.pptx
@@ -4,14 +4,14 @@
   <p:sldMasterIdLst>
     <p:sldMasterId id="2147483648" r:id="rId1"/>
   </p:sldMasterIdLst>
+  <p:notesMasterIdLst>
+    <p:notesMasterId r:id="rId5"/>
+  </p:notesMasterIdLst>
   <p:sldIdLst>
     <p:sldId id="256" r:id="rId2"/>
     <p:sldId id="257" r:id="rId3"/>
     <p:sldId id="258" r:id="rId4"/>
   </p:sldIdLst>
-  <p:notesMasterIdLst>
-    <p:notesMasterId r:id="rId5"/>
-  </p:notesMasterIdLst>
   <p:sldSz cx="12192000" cy="6858000"/>
   <p:notesSz cx="6858000" cy="12192000"/>
   <p:defaultTextStyle>
@@ -106,6 +106,11 @@
       </a:defRPr>
     </a:lvl9pPr>
   </p:defaultTextStyle>
+  <p:extLst>
+    <p:ext uri="{EFAFB233-063F-42B5-8137-9DF3F51BA10A}">
+      <p15:sldGuideLst xmlns:p15="http://schemas.microsoft.com/office/powerpoint/2012/main"/>
+    </p:ext>
+  </p:extLst>
 </p:presentation>
 </file>
 
@@ -131,234 +136,10 @@
           <a:chExt cx="0" cy="0"/>
         </a:xfrm>
       </p:grpSpPr>
-      <p:sp>
-        <p:nvSpPr>
-          <p:cNvPr id="2" name="Header Placeholder 1"/>
-          <p:cNvSpPr>
-            <a:spLocks noGrp="1"/>
-          </p:cNvSpPr>
-          <p:nvPr>
-            <p:ph type="hdr" sz="quarter"/>
-          </p:nvPr>
-        </p:nvSpPr>
-        <p:spPr>
-          <a:xfrm>
-            <a:off x="0" y="0"/>
-            <a:ext cx="2971800" cy="458788"/>
-          </a:xfrm>
-          <a:prstGeom prst="rect">
-            <a:avLst/>
-          </a:prstGeom>
-        </p:spPr>
-        <p:txBody>
-          <a:bodyPr vert="horz" lIns="91440" tIns="45720" rIns="91440" bIns="45720" rtlCol="0"/>
-          <a:lstStyle>
-            <a:lvl1pPr algn="l">
-              <a:defRPr sz="1200"/>
-            </a:lvl1pPr>
-          </a:lstStyle>
-          <a:p>
-            <a:endParaRPr lang="en-US"/>
-          </a:p>
-        </p:txBody>
-      </p:sp>
-      <p:sp>
-        <p:nvSpPr>
-          <p:cNvPr id="3" name="Date Placeholder 2"/>
-          <p:cNvSpPr>
-            <a:spLocks noGrp="1"/>
-          </p:cNvSpPr>
-          <p:nvPr>
-            <p:ph type="dt" idx="1"/>
-          </p:nvPr>
-        </p:nvSpPr>
-        <p:spPr>
-          <a:xfrm>
-            <a:off x="3884613" y="0"/>
-            <a:ext cx="2971800" cy="458788"/>
-          </a:xfrm>
-          <a:prstGeom prst="rect">
-            <a:avLst/>
-          </a:prstGeom>
-        </p:spPr>
-        <p:txBody>
-          <a:bodyPr vert="horz" lIns="91440" tIns="45720" rIns="91440" bIns="45720" rtlCol="0"/>
-          <a:lstStyle>
-            <a:lvl1pPr algn="r">
-              <a:defRPr sz="1200"/>
-            </a:lvl1pPr>
-          </a:lstStyle>
-          <a:p>
-            <a:fld id="{5282F153-3F37-0F45-9E97-73ACFA13230C}" type="datetimeFigureOut">
-              <a:rPr lang="en-US"/>
-              <a:t>7/23/19</a:t>
-            </a:fld>
-            <a:endParaRPr lang="en-US"/>
-          </a:p>
-        </p:txBody>
-      </p:sp>
-      <p:sp>
-        <p:nvSpPr>
-          <p:cNvPr id="4" name="Slide Image Placeholder 3"/>
-          <p:cNvSpPr>
-            <a:spLocks noGrp="1" noRot="1" noChangeAspect="1"/>
-          </p:cNvSpPr>
-          <p:nvPr>
-            <p:ph type="sldImg" idx="2"/>
-          </p:nvPr>
-        </p:nvSpPr>
-        <p:spPr>
-          <a:xfrm>
-            <a:off x="685800" y="1143000"/>
-            <a:ext cx="5486400" cy="3086100"/>
-          </a:xfrm>
-          <a:prstGeom prst="rect">
-            <a:avLst/>
-          </a:prstGeom>
-          <a:noFill/>
-          <a:ln w="12700">
-            <a:solidFill>
-              <a:prstClr val="black"/>
-            </a:solidFill>
-          </a:ln>
-        </p:spPr>
-        <p:txBody>
-          <a:bodyPr vert="horz" lIns="91440" tIns="45720" rIns="91440" bIns="45720" rtlCol="0" anchor="ctr"/>
-          <a:lstStyle/>
-          <a:p>
-            <a:endParaRPr lang="en-US"/>
-          </a:p>
-        </p:txBody>
-      </p:sp>
-      <p:sp>
-        <p:nvSpPr>
-          <p:cNvPr id="5" name="Notes Placeholder 4"/>
-          <p:cNvSpPr>
-            <a:spLocks noGrp="1"/>
-          </p:cNvSpPr>
-          <p:nvPr>
-            <p:ph type="body" sz="quarter" idx="3"/>
-          </p:nvPr>
-        </p:nvSpPr>
-        <p:spPr>
-          <a:xfrm>
-            <a:off x="685800" y="4400550"/>
-            <a:ext cx="5486400" cy="3600450"/>
-          </a:xfrm>
-          <a:prstGeom prst="rect">
-            <a:avLst/>
-          </a:prstGeom>
-        </p:spPr>
-        <p:txBody>
-          <a:bodyPr vert="horz" lIns="91440" tIns="45720" rIns="91440" bIns="45720" rtlCol="0"/>
-          <a:lstStyle/>
-          <a:p>
-            <a:pPr lvl="0"/>
-            <a:r>
-              <a:rPr lang="en-US"/>
-              <a:t>Click to edit Master text styles</a:t>
-            </a:r>
-          </a:p>
-          <a:p>
-            <a:pPr lvl="1"/>
-            <a:r>
-              <a:rPr lang="en-US"/>
-              <a:t>Second level</a:t>
-            </a:r>
-          </a:p>
-          <a:p>
-            <a:pPr lvl="2"/>
-            <a:r>
-              <a:rPr lang="en-US"/>
-              <a:t>Third level</a:t>
-            </a:r>
-          </a:p>
-          <a:p>
-            <a:pPr lvl="3"/>
-            <a:r>
-              <a:rPr lang="en-US"/>
-              <a:t>Fourth level</a:t>
-            </a:r>
-          </a:p>
-          <a:p>
-            <a:pPr lvl="4"/>
-            <a:r>
-              <a:rPr lang="en-US"/>
-              <a:t>Fifth level</a:t>
-            </a:r>
-          </a:p>
-        </p:txBody>
-      </p:sp>
-      <p:sp>
-        <p:nvSpPr>
-          <p:cNvPr id="6" name="Footer Placeholder 5"/>
-          <p:cNvSpPr>
-            <a:spLocks noGrp="1"/>
-          </p:cNvSpPr>
-          <p:nvPr>
-            <p:ph type="ftr" sz="quarter" idx="4"/>
-          </p:nvPr>
-        </p:nvSpPr>
-        <p:spPr>
-          <a:xfrm>
-            <a:off x="0" y="8685213"/>
-            <a:ext cx="2971800" cy="458787"/>
-          </a:xfrm>
-          <a:prstGeom prst="rect">
-            <a:avLst/>
-          </a:prstGeom>
-        </p:spPr>
-        <p:txBody>
-          <a:bodyPr vert="horz" lIns="91440" tIns="45720" rIns="91440" bIns="45720" rtlCol="0" anchor="b"/>
-          <a:lstStyle>
-            <a:lvl1pPr algn="l">
-              <a:defRPr sz="1200"/>
-            </a:lvl1pPr>
-          </a:lstStyle>
-          <a:p>
-            <a:endParaRPr lang="en-US"/>
-          </a:p>
-        </p:txBody>
-      </p:sp>
-      <p:sp>
-        <p:nvSpPr>
-          <p:cNvPr id="7" name="Slide Number Placeholder 6"/>
-          <p:cNvSpPr>
-            <a:spLocks noGrp="1"/>
-          </p:cNvSpPr>
-          <p:nvPr>
-            <p:ph type="sldNum" sz="quarter" idx="5"/>
-          </p:nvPr>
-        </p:nvSpPr>
-        <p:spPr>
-          <a:xfrm>
-            <a:off x="3884613" y="8685213"/>
-            <a:ext cx="2971800" cy="458787"/>
-          </a:xfrm>
-          <a:prstGeom prst="rect">
-            <a:avLst/>
-          </a:prstGeom>
-        </p:spPr>
-        <p:txBody>
-          <a:bodyPr vert="horz" lIns="91440" tIns="45720" rIns="91440" bIns="45720" rtlCol="0" anchor="b"/>
-          <a:lstStyle>
-            <a:lvl1pPr algn="r">
-              <a:defRPr sz="1200"/>
-            </a:lvl1pPr>
-          </a:lstStyle>
-          <a:p>
-            <a:fld id="{CE5E9CC1-C706-0F49-92D6-E571CC5EEA8F}" type="slidenum">
-              <a:rPr lang="en-US"/>
-              <a:t>‹#›</a:t>
-            </a:fld>
-            <a:endParaRPr lang="en-US"/>
-          </a:p>
-        </p:txBody>
-      </p:sp>
     </p:spTree>
     <p:extLst>
       <p:ext uri="{BB962C8B-B14F-4D97-AF65-F5344CB8AC3E}">
-        <p14:creationId xmlns:p14="http://schemas.microsoft.com/office/powerpoint/2010/main" val="1024086991"/>
+        <p14:creationId xmlns:p14="http://schemas.microsoft.com/office/powerpoint/2010/main" val="854283212"/>
       </p:ext>
     </p:extLst>
   </p:cSld>
@@ -506,7 +287,6 @@
               <a:rPr lang="en-US" dirty="0"/>
               <a:t>Presentamos el cuadro comparativo de los seis principios de Scrum. Para cada uno explicamos qué significa con nuestras palabras y damos un ejemplo práctico de cómo lo aplicamos en NewBit.</a:t>
             </a:r>
-            <a:endParaRPr lang="en-US" dirty="0"/>
           </a:p>
         </p:txBody>
       </p:sp>
@@ -594,7 +374,6 @@
               <a:rPr lang="en-US" dirty="0"/>
               <a:t>Control empírico: decidimos con lo que observamos en cada sprint. Autoorganización: el equipo se reparte las historias. Colaboración: PO, desarrolladores e interesados validan juntos.</a:t>
             </a:r>
-            <a:endParaRPr lang="en-US" dirty="0"/>
           </a:p>
         </p:txBody>
       </p:sp>
@@ -682,7 +461,6 @@
               <a:rPr lang="en-US" dirty="0"/>
               <a:t>Priorización por valor: primero lo que más valor aporta y de lo que dependen las demás historias. Time-boxing: cuatro sprints de dos semanas y eventos con tiempo fijo. Desarrollo iterativo: cada sprint entrega una parte de NewBit que el PO revisa.</a:t>
             </a:r>
-            <a:endParaRPr lang="en-US" dirty="0"/>
           </a:p>
         </p:txBody>
       </p:sp>
@@ -760,6 +538,7 @@
         <a:solidFill>
           <a:srgbClr val="12233F"/>
         </a:solidFill>
+        <a:effectLst/>
       </p:bgPr>
     </p:bg>
     <p:spTree>
@@ -792,6 +571,7 @@
         <a:solidFill>
           <a:srgbClr val="FFFFFF"/>
         </a:solidFill>
+        <a:effectLst/>
       </p:bgPr>
     </p:bg>
     <p:spTree>
@@ -811,9 +591,11 @@
       <p:sp>
         <p:nvSpPr>
           <p:cNvPr id="2" name="Text 0"/>
-          <p:cNvSpPr/>
+          <p:cNvSpPr>
+            <a:spLocks noGrp="1"/>
+          </p:cNvSpPr>
           <p:nvPr>
-            <p:ph idx="100" type="title" hasCustomPrompt="1"/>
+            <p:ph type="title" idx="100" hasCustomPrompt="1"/>
           </p:nvPr>
         </p:nvSpPr>
         <p:spPr>
@@ -830,7 +612,7 @@
         <p:txBody>
           <a:bodyPr wrap="square" rtlCol="0"/>
           <a:lstStyle>
-            <a:lvl1pPr algn="l" indent="0" marL="0">
+            <a:lvl1pPr marL="0" indent="0" algn="l">
               <a:buNone/>
               <a:defRPr lang="en-US" sz="3000" b="1" dirty="0">
                 <a:solidFill>
@@ -843,7 +625,7 @@
             </a:lvl1pPr>
           </a:lstStyle>
           <a:p>
-            <a:pPr algn="l" indent="0" marL="0">
+            <a:pPr marL="0" indent="0" algn="l">
               <a:buNone/>
             </a:pPr>
             <a:endParaRPr lang="en-US" sz="3000" dirty="0"/>
@@ -871,7 +653,7 @@
           <a:bodyPr wrap="square" lIns="0" tIns="0" rIns="0" bIns="0" rtlCol="0" anchor="ctr"/>
           <a:lstStyle/>
           <a:p>
-            <a:pPr indent="0" marL="0">
+            <a:pPr marL="0" indent="0">
               <a:buNone/>
             </a:pPr>
             <a:r>
@@ -909,7 +691,7 @@
           </a:prstGeom>
           <a:extLst>
             <a:ext uri="{C572A759-6A51-4108-AA02-DFA0A04FC94B}">
-              <ma14:wrappingTextBoxFlag xmlns:ma14="http://schemas.microsoft.com/office/mac/drawingml/2011/main" val="0"/>
+              <ma14:wrappingTextBoxFlag xmlns:ma14="http://schemas.microsoft.com/office/mac/drawingml/2011/main" xmlns="" val="0"/>
             </a:ext>
           </a:extLst>
         </p:spPr>
@@ -930,8 +712,8 @@
           <a:p>
             <a:pPr algn="r"/>
             <a:fld id="{F7021451-1387-4CA6-816F-3879F97B5CBC}" type="slidenum">
-              <a:rPr b="0" lang="en-US"/>
-              <a:t>1003</a:t>
+              <a:rPr lang="en-US" b="0"/>
+              <a:t>‹Nº›</a:t>
             </a:fld>
             <a:endParaRPr lang="en-US"/>
           </a:p>
@@ -948,6 +730,11 @@
 <file path=ppt/slideMasters/slideMaster1.xml><?xml version="1.0" encoding="utf-8"?>
 <p:sldMaster xmlns:a="http://schemas.openxmlformats.org/drawingml/2006/main" xmlns:r="http://schemas.openxmlformats.org/officeDocument/2006/relationships" xmlns:p="http://schemas.openxmlformats.org/presentationml/2006/main">
   <p:cSld>
+    <p:bg>
+      <p:bgRef idx="1001">
+        <a:schemeClr val="bg1"/>
+      </p:bgRef>
+    </p:bg>
     <p:spTree>
       <p:nvGrpSpPr>
         <p:cNvPr id="1" name=""/>
@@ -982,7 +769,7 @@
           </a:prstGeom>
           <a:extLst>
             <a:ext uri="{C572A759-6A51-4108-AA02-DFA0A04FC94B}">
-              <ma14:wrappingTextBoxFlag xmlns:ma14="http://schemas.microsoft.com/office/mac/drawingml/2011/main" val="0"/>
+              <ma14:wrappingTextBoxFlag xmlns:ma14="http://schemas.microsoft.com/office/mac/drawingml/2011/main" xmlns="" val="0"/>
             </a:ext>
           </a:extLst>
         </p:spPr>
@@ -1003,8 +790,8 @@
           <a:p>
             <a:pPr algn="r"/>
             <a:fld id="{F7021451-1387-4CA6-816F-3879F97B5CBC}" type="slidenum">
-              <a:rPr b="0" lang="en-US"/>
-              <a:t>null</a:t>
+              <a:rPr lang="en-US" b="0"/>
+              <a:t>‹Nº›</a:t>
             </a:fld>
             <a:endParaRPr lang="en-US"/>
           </a:p>
@@ -1310,11 +1097,11 @@
           <a:bodyPr wrap="square" lIns="0" tIns="0" rIns="0" bIns="0" rtlCol="0" anchor="ctr"/>
           <a:lstStyle/>
           <a:p>
-            <a:pPr indent="0" marL="0">
-              <a:buNone/>
-            </a:pPr>
-            <a:r>
-              <a:rPr lang="en-US" sz="1400" b="1" spc="200" kern="0" dirty="0">
+            <a:pPr marL="0" indent="0">
+              <a:buNone/>
+            </a:pPr>
+            <a:r>
+              <a:rPr lang="en-US" sz="1400" b="1" kern="0" spc="200" dirty="0">
                 <a:solidFill>
                   <a:srgbClr val="F5A623"/>
                 </a:solidFill>
@@ -1349,7 +1136,7 @@
           <a:bodyPr wrap="square" lIns="0" tIns="0" rIns="0" bIns="0" rtlCol="0" anchor="ctr"/>
           <a:lstStyle/>
           <a:p>
-            <a:pPr indent="0" marL="0">
+            <a:pPr marL="0" indent="0">
               <a:buNone/>
             </a:pPr>
             <a:r>
@@ -1388,7 +1175,7 @@
           <a:bodyPr wrap="square" lIns="0" tIns="0" rIns="0" bIns="0" rtlCol="0" anchor="ctr"/>
           <a:lstStyle/>
           <a:p>
-            <a:pPr indent="0" marL="0">
+            <a:pPr marL="0" indent="0">
               <a:buNone/>
             </a:pPr>
             <a:r>
@@ -1430,186 +1217,17 @@
             <a:prstDash val="solid"/>
           </a:ln>
         </p:spPr>
+        <p:txBody>
+          <a:bodyPr/>
+          <a:lstStyle/>
+          <a:p>
+            <a:endParaRPr lang="es-ES"/>
+          </a:p>
+        </p:txBody>
       </p:sp>
       <p:pic>
         <p:nvPicPr>
-          <p:cNvPr id="6" name="Image 0" descr="preencoded.png">    </p:cNvPr>
-          <p:cNvPicPr>
-            <a:picLocks noChangeAspect="1"/>
-          </p:cNvPicPr>
-          <p:nvPr/>
-        </p:nvPicPr>
-        <p:blipFill>
-          <a:blip r:embed="rId1"/>
-          <a:stretch>
-            <a:fillRect/>
-          </a:stretch>
-        </p:blipFill>
-        <p:spPr>
-          <a:xfrm>
-            <a:off x="950976" y="3739896"/>
-            <a:ext cx="475488" cy="475488"/>
-          </a:xfrm>
-          <a:prstGeom prst="rect">
-            <a:avLst/>
-          </a:prstGeom>
-        </p:spPr>
-      </p:pic>
-      <p:sp>
-        <p:nvSpPr>
-          <p:cNvPr id="7" name="Text 4"/>
-          <p:cNvSpPr txBox="1"/>
-          <p:nvPr/>
-        </p:nvSpPr>
-        <p:spPr>
-          <a:xfrm>
-            <a:off x="502920" y="4526280"/>
-            <a:ext cx="1417320" cy="640080"/>
-          </a:xfrm>
-          <a:prstGeom prst="rect">
-            <a:avLst/>
-          </a:prstGeom>
-          <a:noFill/>
-          <a:ln/>
-        </p:spPr>
-        <p:txBody>
-          <a:bodyPr wrap="square" lIns="0" tIns="0" rIns="0" bIns="0" rtlCol="0" anchor="t"/>
-          <a:lstStyle/>
-          <a:p>
-            <a:pPr algn="ctr" indent="0" marL="0">
-              <a:buNone/>
-            </a:pPr>
-            <a:r>
-              <a:rPr lang="en-US" sz="1200" b="1" dirty="0">
-                <a:solidFill>
-                  <a:srgbClr val="FFFFFF"/>
-                </a:solidFill>
-                <a:latin typeface="Calibri" pitchFamily="34" charset="0"/>
-                <a:ea typeface="Calibri" pitchFamily="34" charset="-122"/>
-                <a:cs typeface="Calibri" pitchFamily="34" charset="-120"/>
-              </a:rPr>
-              <a:t>Control del proceso empírico</a:t>
-            </a:r>
-            <a:endParaRPr lang="en-US" sz="1200" dirty="0"/>
-          </a:p>
-        </p:txBody>
-      </p:sp>
-      <p:sp>
-        <p:nvSpPr>
-          <p:cNvPr id="8" name="Shape 5"/>
-          <p:cNvSpPr/>
-          <p:nvPr/>
-        </p:nvSpPr>
-        <p:spPr>
-          <a:xfrm>
-            <a:off x="2560320" y="3520440"/>
-            <a:ext cx="914400" cy="914400"/>
-          </a:xfrm>
-          <a:prstGeom prst="ellipse">
-            <a:avLst/>
-          </a:prstGeom>
-          <a:solidFill>
-            <a:srgbClr val="0F9D8A"/>
-          </a:solidFill>
-          <a:ln w="12700">
-            <a:solidFill>
-              <a:srgbClr val="12233F"/>
-            </a:solidFill>
-            <a:prstDash val="solid"/>
-          </a:ln>
-        </p:spPr>
-      </p:sp>
-      <p:pic>
-        <p:nvPicPr>
-          <p:cNvPr id="9" name="Image 1" descr="preencoded.png">    </p:cNvPr>
-          <p:cNvPicPr>
-            <a:picLocks noChangeAspect="1"/>
-          </p:cNvPicPr>
-          <p:nvPr/>
-        </p:nvPicPr>
-        <p:blipFill>
-          <a:blip r:embed="rId2"/>
-          <a:stretch>
-            <a:fillRect/>
-          </a:stretch>
-        </p:blipFill>
-        <p:spPr>
-          <a:xfrm>
-            <a:off x="2779776" y="3739896"/>
-            <a:ext cx="475488" cy="475488"/>
-          </a:xfrm>
-          <a:prstGeom prst="rect">
-            <a:avLst/>
-          </a:prstGeom>
-        </p:spPr>
-      </p:pic>
-      <p:sp>
-        <p:nvSpPr>
-          <p:cNvPr id="10" name="Text 6"/>
-          <p:cNvSpPr txBox="1"/>
-          <p:nvPr/>
-        </p:nvSpPr>
-        <p:spPr>
-          <a:xfrm>
-            <a:off x="2331720" y="4526280"/>
-            <a:ext cx="1417320" cy="640080"/>
-          </a:xfrm>
-          <a:prstGeom prst="rect">
-            <a:avLst/>
-          </a:prstGeom>
-          <a:noFill/>
-          <a:ln/>
-        </p:spPr>
-        <p:txBody>
-          <a:bodyPr wrap="square" lIns="0" tIns="0" rIns="0" bIns="0" rtlCol="0" anchor="t"/>
-          <a:lstStyle/>
-          <a:p>
-            <a:pPr algn="ctr" indent="0" marL="0">
-              <a:buNone/>
-            </a:pPr>
-            <a:r>
-              <a:rPr lang="en-US" sz="1200" b="1" dirty="0">
-                <a:solidFill>
-                  <a:srgbClr val="FFFFFF"/>
-                </a:solidFill>
-                <a:latin typeface="Calibri" pitchFamily="34" charset="0"/>
-                <a:ea typeface="Calibri" pitchFamily="34" charset="-122"/>
-                <a:cs typeface="Calibri" pitchFamily="34" charset="-120"/>
-              </a:rPr>
-              <a:t>Autoorganización</a:t>
-            </a:r>
-            <a:endParaRPr lang="en-US" sz="1200" dirty="0"/>
-          </a:p>
-        </p:txBody>
-      </p:sp>
-      <p:sp>
-        <p:nvSpPr>
-          <p:cNvPr id="11" name="Shape 7"/>
-          <p:cNvSpPr/>
-          <p:nvPr/>
-        </p:nvSpPr>
-        <p:spPr>
-          <a:xfrm>
-            <a:off x="4389120" y="3520440"/>
-            <a:ext cx="914400" cy="914400"/>
-          </a:xfrm>
-          <a:prstGeom prst="ellipse">
-            <a:avLst/>
-          </a:prstGeom>
-          <a:solidFill>
-            <a:srgbClr val="5B4BDB"/>
-          </a:solidFill>
-          <a:ln w="12700">
-            <a:solidFill>
-              <a:srgbClr val="12233F"/>
-            </a:solidFill>
-            <a:prstDash val="solid"/>
-          </a:ln>
-        </p:spPr>
-      </p:sp>
-      <p:pic>
-        <p:nvPicPr>
-          <p:cNvPr id="12" name="Image 2" descr="preencoded.png">    </p:cNvPr>
+          <p:cNvPr id="6" name="Image 0" descr="preencoded.png"/>
           <p:cNvPicPr>
             <a:picLocks noChangeAspect="1"/>
           </p:cNvPicPr>
@@ -1623,7 +1241,7 @@
         </p:blipFill>
         <p:spPr>
           <a:xfrm>
-            <a:off x="4608576" y="3739896"/>
+            <a:off x="950976" y="3739896"/>
             <a:ext cx="475488" cy="475488"/>
           </a:xfrm>
           <a:prstGeom prst="rect">
@@ -1633,13 +1251,13 @@
       </p:pic>
       <p:sp>
         <p:nvSpPr>
-          <p:cNvPr id="13" name="Text 8"/>
+          <p:cNvPr id="7" name="Text 4"/>
           <p:cNvSpPr txBox="1"/>
           <p:nvPr/>
         </p:nvSpPr>
         <p:spPr>
           <a:xfrm>
-            <a:off x="4160520" y="4526280"/>
+            <a:off x="502920" y="4526280"/>
             <a:ext cx="1417320" cy="640080"/>
           </a:xfrm>
           <a:prstGeom prst="rect">
@@ -1652,7 +1270,7 @@
           <a:bodyPr wrap="square" lIns="0" tIns="0" rIns="0" bIns="0" rtlCol="0" anchor="t"/>
           <a:lstStyle/>
           <a:p>
-            <a:pPr algn="ctr" indent="0" marL="0">
+            <a:pPr marL="0" indent="0" algn="ctr">
               <a:buNone/>
             </a:pPr>
             <a:r>
@@ -1664,7 +1282,7 @@
                 <a:ea typeface="Calibri" pitchFamily="34" charset="-122"/>
                 <a:cs typeface="Calibri" pitchFamily="34" charset="-120"/>
               </a:rPr>
-              <a:t>Colaboración</a:t>
+              <a:t>Control del proceso empírico</a:t>
             </a:r>
             <a:endParaRPr lang="en-US" sz="1200" dirty="0"/>
           </a:p>
@@ -1672,20 +1290,20 @@
       </p:sp>
       <p:sp>
         <p:nvSpPr>
-          <p:cNvPr id="14" name="Shape 9"/>
+          <p:cNvPr id="8" name="Shape 5"/>
           <p:cNvSpPr/>
           <p:nvPr/>
         </p:nvSpPr>
         <p:spPr>
           <a:xfrm>
-            <a:off x="6217920" y="3520440"/>
+            <a:off x="2560320" y="3520440"/>
             <a:ext cx="914400" cy="914400"/>
           </a:xfrm>
           <a:prstGeom prst="ellipse">
             <a:avLst/>
           </a:prstGeom>
           <a:solidFill>
-            <a:srgbClr val="F5A623"/>
+            <a:srgbClr val="0F9D8A"/>
           </a:solidFill>
           <a:ln w="12700">
             <a:solidFill>
@@ -1694,10 +1312,17 @@
             <a:prstDash val="solid"/>
           </a:ln>
         </p:spPr>
+        <p:txBody>
+          <a:bodyPr/>
+          <a:lstStyle/>
+          <a:p>
+            <a:endParaRPr lang="es-ES"/>
+          </a:p>
+        </p:txBody>
       </p:sp>
       <p:pic>
         <p:nvPicPr>
-          <p:cNvPr id="15" name="Image 3" descr="preencoded.png">    </p:cNvPr>
+          <p:cNvPr id="9" name="Image 1" descr="preencoded.png"/>
           <p:cNvPicPr>
             <a:picLocks noChangeAspect="1"/>
           </p:cNvPicPr>
@@ -1711,7 +1336,7 @@
         </p:blipFill>
         <p:spPr>
           <a:xfrm>
-            <a:off x="6437376" y="3739896"/>
+            <a:off x="2779776" y="3739896"/>
             <a:ext cx="475488" cy="475488"/>
           </a:xfrm>
           <a:prstGeom prst="rect">
@@ -1721,13 +1346,13 @@
       </p:pic>
       <p:sp>
         <p:nvSpPr>
-          <p:cNvPr id="16" name="Text 10"/>
+          <p:cNvPr id="10" name="Text 6"/>
           <p:cNvSpPr txBox="1"/>
           <p:nvPr/>
         </p:nvSpPr>
         <p:spPr>
           <a:xfrm>
-            <a:off x="5989320" y="4526280"/>
+            <a:off x="2331720" y="4526280"/>
             <a:ext cx="1417320" cy="640080"/>
           </a:xfrm>
           <a:prstGeom prst="rect">
@@ -1740,7 +1365,7 @@
           <a:bodyPr wrap="square" lIns="0" tIns="0" rIns="0" bIns="0" rtlCol="0" anchor="t"/>
           <a:lstStyle/>
           <a:p>
-            <a:pPr algn="ctr" indent="0" marL="0">
+            <a:pPr marL="0" indent="0" algn="ctr">
               <a:buNone/>
             </a:pPr>
             <a:r>
@@ -1752,7 +1377,7 @@
                 <a:ea typeface="Calibri" pitchFamily="34" charset="-122"/>
                 <a:cs typeface="Calibri" pitchFamily="34" charset="-120"/>
               </a:rPr>
-              <a:t>Priorización basada en el valor</a:t>
+              <a:t>Autoorganización</a:t>
             </a:r>
             <a:endParaRPr lang="en-US" sz="1200" dirty="0"/>
           </a:p>
@@ -1760,20 +1385,20 @@
       </p:sp>
       <p:sp>
         <p:nvSpPr>
-          <p:cNvPr id="17" name="Shape 11"/>
+          <p:cNvPr id="11" name="Shape 7"/>
           <p:cNvSpPr/>
           <p:nvPr/>
         </p:nvSpPr>
         <p:spPr>
           <a:xfrm>
-            <a:off x="8046720" y="3520440"/>
+            <a:off x="4389120" y="3520440"/>
             <a:ext cx="914400" cy="914400"/>
           </a:xfrm>
           <a:prstGeom prst="ellipse">
             <a:avLst/>
           </a:prstGeom>
           <a:solidFill>
-            <a:srgbClr val="E0483E"/>
+            <a:srgbClr val="5B4BDB"/>
           </a:solidFill>
           <a:ln w="12700">
             <a:solidFill>
@@ -1782,10 +1407,17 @@
             <a:prstDash val="solid"/>
           </a:ln>
         </p:spPr>
+        <p:txBody>
+          <a:bodyPr/>
+          <a:lstStyle/>
+          <a:p>
+            <a:endParaRPr lang="es-ES"/>
+          </a:p>
+        </p:txBody>
       </p:sp>
       <p:pic>
         <p:nvPicPr>
-          <p:cNvPr id="18" name="Image 4" descr="preencoded.png">    </p:cNvPr>
+          <p:cNvPr id="12" name="Image 2" descr="preencoded.png"/>
           <p:cNvPicPr>
             <a:picLocks noChangeAspect="1"/>
           </p:cNvPicPr>
@@ -1799,7 +1431,7 @@
         </p:blipFill>
         <p:spPr>
           <a:xfrm>
-            <a:off x="8266176" y="3739896"/>
+            <a:off x="4608576" y="3739896"/>
             <a:ext cx="475488" cy="475488"/>
           </a:xfrm>
           <a:prstGeom prst="rect">
@@ -1809,13 +1441,13 @@
       </p:pic>
       <p:sp>
         <p:nvSpPr>
-          <p:cNvPr id="19" name="Text 12"/>
+          <p:cNvPr id="13" name="Text 8"/>
           <p:cNvSpPr txBox="1"/>
           <p:nvPr/>
         </p:nvSpPr>
         <p:spPr>
           <a:xfrm>
-            <a:off x="7818120" y="4526280"/>
+            <a:off x="4160520" y="4526280"/>
             <a:ext cx="1417320" cy="640080"/>
           </a:xfrm>
           <a:prstGeom prst="rect">
@@ -1828,7 +1460,7 @@
           <a:bodyPr wrap="square" lIns="0" tIns="0" rIns="0" bIns="0" rtlCol="0" anchor="t"/>
           <a:lstStyle/>
           <a:p>
-            <a:pPr algn="ctr" indent="0" marL="0">
+            <a:pPr marL="0" indent="0" algn="ctr">
               <a:buNone/>
             </a:pPr>
             <a:r>
@@ -1840,7 +1472,7 @@
                 <a:ea typeface="Calibri" pitchFamily="34" charset="-122"/>
                 <a:cs typeface="Calibri" pitchFamily="34" charset="-120"/>
               </a:rPr>
-              <a:t>Time-boxing</a:t>
+              <a:t>Colaboración</a:t>
             </a:r>
             <a:endParaRPr lang="en-US" sz="1200" dirty="0"/>
           </a:p>
@@ -1848,20 +1480,20 @@
       </p:sp>
       <p:sp>
         <p:nvSpPr>
-          <p:cNvPr id="20" name="Shape 13"/>
+          <p:cNvPr id="14" name="Shape 9"/>
           <p:cNvSpPr/>
           <p:nvPr/>
         </p:nvSpPr>
         <p:spPr>
           <a:xfrm>
-            <a:off x="9875520" y="3520440"/>
+            <a:off x="6217920" y="3520440"/>
             <a:ext cx="914400" cy="914400"/>
           </a:xfrm>
           <a:prstGeom prst="ellipse">
             <a:avLst/>
           </a:prstGeom>
           <a:solidFill>
-            <a:srgbClr val="3A5A8C"/>
+            <a:srgbClr val="F5A623"/>
           </a:solidFill>
           <a:ln w="12700">
             <a:solidFill>
@@ -1870,10 +1502,17 @@
             <a:prstDash val="solid"/>
           </a:ln>
         </p:spPr>
+        <p:txBody>
+          <a:bodyPr/>
+          <a:lstStyle/>
+          <a:p>
+            <a:endParaRPr lang="es-ES"/>
+          </a:p>
+        </p:txBody>
       </p:sp>
       <p:pic>
         <p:nvPicPr>
-          <p:cNvPr id="21" name="Image 5" descr="preencoded.png">    </p:cNvPr>
+          <p:cNvPr id="15" name="Image 3" descr="preencoded.png"/>
           <p:cNvPicPr>
             <a:picLocks noChangeAspect="1"/>
           </p:cNvPicPr>
@@ -1887,6 +1526,196 @@
         </p:blipFill>
         <p:spPr>
           <a:xfrm>
+            <a:off x="6437376" y="3739896"/>
+            <a:ext cx="475488" cy="475488"/>
+          </a:xfrm>
+          <a:prstGeom prst="rect">
+            <a:avLst/>
+          </a:prstGeom>
+        </p:spPr>
+      </p:pic>
+      <p:sp>
+        <p:nvSpPr>
+          <p:cNvPr id="16" name="Text 10"/>
+          <p:cNvSpPr txBox="1"/>
+          <p:nvPr/>
+        </p:nvSpPr>
+        <p:spPr>
+          <a:xfrm>
+            <a:off x="5989320" y="4526280"/>
+            <a:ext cx="1417320" cy="640080"/>
+          </a:xfrm>
+          <a:prstGeom prst="rect">
+            <a:avLst/>
+          </a:prstGeom>
+          <a:noFill/>
+          <a:ln/>
+        </p:spPr>
+        <p:txBody>
+          <a:bodyPr wrap="square" lIns="0" tIns="0" rIns="0" bIns="0" rtlCol="0" anchor="t"/>
+          <a:lstStyle/>
+          <a:p>
+            <a:pPr marL="0" indent="0" algn="ctr">
+              <a:buNone/>
+            </a:pPr>
+            <a:r>
+              <a:rPr lang="en-US" sz="1200" b="1" dirty="0">
+                <a:solidFill>
+                  <a:srgbClr val="FFFFFF"/>
+                </a:solidFill>
+                <a:latin typeface="Calibri" pitchFamily="34" charset="0"/>
+                <a:ea typeface="Calibri" pitchFamily="34" charset="-122"/>
+                <a:cs typeface="Calibri" pitchFamily="34" charset="-120"/>
+              </a:rPr>
+              <a:t>Priorización basada en el valor</a:t>
+            </a:r>
+            <a:endParaRPr lang="en-US" sz="1200" dirty="0"/>
+          </a:p>
+        </p:txBody>
+      </p:sp>
+      <p:sp>
+        <p:nvSpPr>
+          <p:cNvPr id="17" name="Shape 11"/>
+          <p:cNvSpPr/>
+          <p:nvPr/>
+        </p:nvSpPr>
+        <p:spPr>
+          <a:xfrm>
+            <a:off x="8046720" y="3520440"/>
+            <a:ext cx="914400" cy="914400"/>
+          </a:xfrm>
+          <a:prstGeom prst="ellipse">
+            <a:avLst/>
+          </a:prstGeom>
+          <a:solidFill>
+            <a:srgbClr val="E0483E"/>
+          </a:solidFill>
+          <a:ln w="12700">
+            <a:solidFill>
+              <a:srgbClr val="12233F"/>
+            </a:solidFill>
+            <a:prstDash val="solid"/>
+          </a:ln>
+        </p:spPr>
+        <p:txBody>
+          <a:bodyPr/>
+          <a:lstStyle/>
+          <a:p>
+            <a:endParaRPr lang="es-ES"/>
+          </a:p>
+        </p:txBody>
+      </p:sp>
+      <p:pic>
+        <p:nvPicPr>
+          <p:cNvPr id="18" name="Image 4" descr="preencoded.png"/>
+          <p:cNvPicPr>
+            <a:picLocks noChangeAspect="1"/>
+          </p:cNvPicPr>
+          <p:nvPr/>
+        </p:nvPicPr>
+        <p:blipFill>
+          <a:blip r:embed="rId7"/>
+          <a:stretch>
+            <a:fillRect/>
+          </a:stretch>
+        </p:blipFill>
+        <p:spPr>
+          <a:xfrm>
+            <a:off x="8266176" y="3739896"/>
+            <a:ext cx="475488" cy="475488"/>
+          </a:xfrm>
+          <a:prstGeom prst="rect">
+            <a:avLst/>
+          </a:prstGeom>
+        </p:spPr>
+      </p:pic>
+      <p:sp>
+        <p:nvSpPr>
+          <p:cNvPr id="19" name="Text 12"/>
+          <p:cNvSpPr txBox="1"/>
+          <p:nvPr/>
+        </p:nvSpPr>
+        <p:spPr>
+          <a:xfrm>
+            <a:off x="7818120" y="4526280"/>
+            <a:ext cx="1417320" cy="640080"/>
+          </a:xfrm>
+          <a:prstGeom prst="rect">
+            <a:avLst/>
+          </a:prstGeom>
+          <a:noFill/>
+          <a:ln/>
+        </p:spPr>
+        <p:txBody>
+          <a:bodyPr wrap="square" lIns="0" tIns="0" rIns="0" bIns="0" rtlCol="0" anchor="t"/>
+          <a:lstStyle/>
+          <a:p>
+            <a:pPr marL="0" indent="0" algn="ctr">
+              <a:buNone/>
+            </a:pPr>
+            <a:r>
+              <a:rPr lang="en-US" sz="1200" b="1" dirty="0">
+                <a:solidFill>
+                  <a:srgbClr val="FFFFFF"/>
+                </a:solidFill>
+                <a:latin typeface="Calibri" pitchFamily="34" charset="0"/>
+                <a:ea typeface="Calibri" pitchFamily="34" charset="-122"/>
+                <a:cs typeface="Calibri" pitchFamily="34" charset="-120"/>
+              </a:rPr>
+              <a:t>Time-boxing</a:t>
+            </a:r>
+            <a:endParaRPr lang="en-US" sz="1200" dirty="0"/>
+          </a:p>
+        </p:txBody>
+      </p:sp>
+      <p:sp>
+        <p:nvSpPr>
+          <p:cNvPr id="20" name="Shape 13"/>
+          <p:cNvSpPr/>
+          <p:nvPr/>
+        </p:nvSpPr>
+        <p:spPr>
+          <a:xfrm>
+            <a:off x="9875520" y="3520440"/>
+            <a:ext cx="914400" cy="914400"/>
+          </a:xfrm>
+          <a:prstGeom prst="ellipse">
+            <a:avLst/>
+          </a:prstGeom>
+          <a:solidFill>
+            <a:srgbClr val="3A5A8C"/>
+          </a:solidFill>
+          <a:ln w="12700">
+            <a:solidFill>
+              <a:srgbClr val="12233F"/>
+            </a:solidFill>
+            <a:prstDash val="solid"/>
+          </a:ln>
+        </p:spPr>
+        <p:txBody>
+          <a:bodyPr/>
+          <a:lstStyle/>
+          <a:p>
+            <a:endParaRPr lang="es-ES"/>
+          </a:p>
+        </p:txBody>
+      </p:sp>
+      <p:pic>
+        <p:nvPicPr>
+          <p:cNvPr id="21" name="Image 5" descr="preencoded.png"/>
+          <p:cNvPicPr>
+            <a:picLocks noChangeAspect="1"/>
+          </p:cNvPicPr>
+          <p:nvPr/>
+        </p:nvPicPr>
+        <p:blipFill>
+          <a:blip r:embed="rId8"/>
+          <a:stretch>
+            <a:fillRect/>
+          </a:stretch>
+        </p:blipFill>
+        <p:spPr>
+          <a:xfrm>
             <a:off x="10094976" y="3739896"/>
             <a:ext cx="475488" cy="475488"/>
           </a:xfrm>
@@ -1916,7 +1745,7 @@
           <a:bodyPr wrap="square" lIns="0" tIns="0" rIns="0" bIns="0" rtlCol="0" anchor="t"/>
           <a:lstStyle/>
           <a:p>
-            <a:pPr algn="ctr" indent="0" marL="0">
+            <a:pPr marL="0" indent="0" algn="ctr">
               <a:buNone/>
             </a:pPr>
             <a:r>
@@ -1955,7 +1784,7 @@
           <a:bodyPr wrap="square" lIns="0" tIns="0" rIns="0" bIns="0" rtlCol="0" anchor="ctr"/>
           <a:lstStyle/>
           <a:p>
-            <a:pPr indent="0" marL="0">
+            <a:pPr marL="0" indent="0">
               <a:buNone/>
             </a:pPr>
             <a:r>
@@ -1969,9 +1798,6 @@
               </a:rPr>
               <a:t>Equipo: </a:t>
             </a:r>
-            <a:pPr indent="0" marL="0">
-              <a:buNone/>
-            </a:pPr>
             <a:r>
               <a:rPr lang="en-US" sz="1300" dirty="0">
                 <a:solidFill>
@@ -2015,9 +1841,11 @@
       <p:sp>
         <p:nvSpPr>
           <p:cNvPr id="2" name="Text 0"/>
-          <p:cNvSpPr/>
+          <p:cNvSpPr>
+            <a:spLocks noGrp="1"/>
+          </p:cNvSpPr>
           <p:nvPr>
-            <p:ph idx="100" type="title" hasCustomPrompt="1"/>
+            <p:ph type="title" idx="100" hasCustomPrompt="1"/>
           </p:nvPr>
         </p:nvSpPr>
         <p:spPr>
@@ -2035,7 +1863,7 @@
           <a:bodyPr wrap="square" lIns="0" tIns="0" rIns="0" bIns="0" rtlCol="0" anchor="ctr"/>
           <a:lstStyle/>
           <a:p>
-            <a:pPr algn="l" indent="0" marL="0">
+            <a:pPr marL="0" indent="0" algn="l">
               <a:buNone/>
             </a:pPr>
             <a:r>
@@ -2074,11 +1902,11 @@
           <a:bodyPr wrap="square" lIns="0" tIns="0" rIns="0" bIns="0" rtlCol="0" anchor="ctr"/>
           <a:lstStyle/>
           <a:p>
-            <a:pPr indent="0" marL="0">
-              <a:buNone/>
-            </a:pPr>
-            <a:r>
-              <a:rPr lang="en-US" sz="1100" b="1" spc="100" kern="0" dirty="0">
+            <a:pPr marL="0" indent="0">
+              <a:buNone/>
+            </a:pPr>
+            <a:r>
+              <a:rPr lang="en-US" sz="1100" b="1" kern="0" spc="100" dirty="0">
                 <a:solidFill>
                   <a:srgbClr val="5B6B82"/>
                 </a:solidFill>
@@ -2113,11 +1941,11 @@
           <a:bodyPr wrap="square" lIns="0" tIns="0" rIns="0" bIns="0" rtlCol="0" anchor="ctr"/>
           <a:lstStyle/>
           <a:p>
-            <a:pPr indent="0" marL="0">
-              <a:buNone/>
-            </a:pPr>
-            <a:r>
-              <a:rPr lang="en-US" sz="1100" b="1" spc="100" kern="0" dirty="0">
+            <a:pPr marL="0" indent="0">
+              <a:buNone/>
+            </a:pPr>
+            <a:r>
+              <a:rPr lang="en-US" sz="1100" b="1" kern="0" spc="100" dirty="0">
                 <a:solidFill>
                   <a:srgbClr val="5B6B82"/>
                 </a:solidFill>
@@ -2152,11 +1980,11 @@
           <a:bodyPr wrap="square" lIns="0" tIns="0" rIns="0" bIns="0" rtlCol="0" anchor="ctr"/>
           <a:lstStyle/>
           <a:p>
-            <a:pPr indent="0" marL="0">
-              <a:buNone/>
-            </a:pPr>
-            <a:r>
-              <a:rPr lang="en-US" sz="1100" b="1" spc="100" kern="0" dirty="0">
+            <a:pPr marL="0" indent="0">
+              <a:buNone/>
+            </a:pPr>
+            <a:r>
+              <a:rPr lang="en-US" sz="1100" b="1" kern="0" spc="100" dirty="0">
                 <a:solidFill>
                   <a:srgbClr val="5B6B82"/>
                 </a:solidFill>
@@ -2196,6 +2024,13 @@
             <a:prstDash val="solid"/>
           </a:ln>
         </p:spPr>
+        <p:txBody>
+          <a:bodyPr/>
+          <a:lstStyle/>
+          <a:p>
+            <a:endParaRPr lang="es-ES"/>
+          </a:p>
+        </p:txBody>
       </p:sp>
       <p:sp>
         <p:nvSpPr>
@@ -2221,978 +2056,17 @@
             <a:prstDash val="solid"/>
           </a:ln>
         </p:spPr>
+        <p:txBody>
+          <a:bodyPr/>
+          <a:lstStyle/>
+          <a:p>
+            <a:endParaRPr lang="es-ES"/>
+          </a:p>
+        </p:txBody>
       </p:sp>
       <p:pic>
         <p:nvPicPr>
-          <p:cNvPr id="8" name="Image 0" descr="preencoded.png">    </p:cNvPr>
-          <p:cNvPicPr>
-            <a:picLocks noChangeAspect="1"/>
-          </p:cNvPicPr>
-          <p:nvPr/>
-        </p:nvPicPr>
-        <p:blipFill>
-          <a:blip r:embed="rId1"/>
-          <a:stretch>
-            <a:fillRect/>
-          </a:stretch>
-        </p:blipFill>
-        <p:spPr>
-          <a:xfrm>
-            <a:off x="886968" y="1819656"/>
-            <a:ext cx="374904" cy="374904"/>
-          </a:xfrm>
-          <a:prstGeom prst="rect">
-            <a:avLst/>
-          </a:prstGeom>
-        </p:spPr>
-      </p:pic>
-      <p:sp>
-        <p:nvSpPr>
-          <p:cNvPr id="9" name="Text 6"/>
-          <p:cNvSpPr txBox="1"/>
-          <p:nvPr/>
-        </p:nvSpPr>
-        <p:spPr>
-          <a:xfrm>
-            <a:off x="2788920" y="1572768"/>
-            <a:ext cx="365760" cy="320040"/>
-          </a:xfrm>
-          <a:prstGeom prst="rect">
-            <a:avLst/>
-          </a:prstGeom>
-          <a:noFill/>
-          <a:ln/>
-        </p:spPr>
-        <p:txBody>
-          <a:bodyPr wrap="square" lIns="0" tIns="0" rIns="0" bIns="0" rtlCol="0" anchor="ctr"/>
-          <a:lstStyle/>
-          <a:p>
-            <a:pPr algn="r" indent="0" marL="0">
-              <a:buNone/>
-            </a:pPr>
-            <a:r>
-              <a:rPr lang="en-US" sz="1400" b="1" dirty="0">
-                <a:solidFill>
-                  <a:srgbClr val="FFFFFF"/>
-                </a:solidFill>
-                <a:latin typeface="Calibri" pitchFamily="34" charset="0"/>
-                <a:ea typeface="Calibri" pitchFamily="34" charset="-122"/>
-                <a:cs typeface="Calibri" pitchFamily="34" charset="-120"/>
-              </a:rPr>
-              <a:t>1</a:t>
-            </a:r>
-            <a:endParaRPr lang="en-US" sz="1400" dirty="0"/>
-          </a:p>
-        </p:txBody>
-      </p:sp>
-      <p:sp>
-        <p:nvSpPr>
-          <p:cNvPr id="10" name="Text 7"/>
-          <p:cNvSpPr txBox="1"/>
-          <p:nvPr/>
-        </p:nvSpPr>
-        <p:spPr>
-          <a:xfrm>
-            <a:off x="731520" y="2377440"/>
-            <a:ext cx="2468880" cy="502920"/>
-          </a:xfrm>
-          <a:prstGeom prst="rect">
-            <a:avLst/>
-          </a:prstGeom>
-          <a:noFill/>
-          <a:ln/>
-        </p:spPr>
-        <p:txBody>
-          <a:bodyPr wrap="square" lIns="0" tIns="0" rIns="0" bIns="0" rtlCol="0" anchor="t"/>
-          <a:lstStyle/>
-          <a:p>
-            <a:pPr indent="0" marL="0">
-              <a:buNone/>
-            </a:pPr>
-            <a:r>
-              <a:rPr lang="en-US" sz="1500" b="1" dirty="0">
-                <a:solidFill>
-                  <a:srgbClr val="FFFFFF"/>
-                </a:solidFill>
-                <a:latin typeface="Calibri" pitchFamily="34" charset="0"/>
-                <a:ea typeface="Calibri" pitchFamily="34" charset="-122"/>
-                <a:cs typeface="Calibri" pitchFamily="34" charset="-120"/>
-              </a:rPr>
-              <a:t>Control del proceso empírico</a:t>
-            </a:r>
-            <a:endParaRPr lang="en-US" sz="1500" dirty="0"/>
-          </a:p>
-        </p:txBody>
-      </p:sp>
-      <p:sp>
-        <p:nvSpPr>
-          <p:cNvPr id="11" name="Shape 8"/>
-          <p:cNvSpPr/>
-          <p:nvPr/>
-        </p:nvSpPr>
-        <p:spPr>
-          <a:xfrm>
-            <a:off x="3474720" y="1463040"/>
-            <a:ext cx="3429000" cy="1463040"/>
-          </a:xfrm>
-          <a:prstGeom prst="roundRect">
-            <a:avLst>
-              <a:gd name="adj" fmla="val 7500"/>
-            </a:avLst>
-          </a:prstGeom>
-          <a:solidFill>
-            <a:srgbClr val="FFFFFF"/>
-          </a:solidFill>
-          <a:ln w="9525">
-            <a:solidFill>
-              <a:srgbClr val="D7DEE9"/>
-            </a:solidFill>
-            <a:prstDash val="solid"/>
-          </a:ln>
-        </p:spPr>
-      </p:sp>
-      <p:sp>
-        <p:nvSpPr>
-          <p:cNvPr id="12" name="Text 9"/>
-          <p:cNvSpPr txBox="1"/>
-          <p:nvPr/>
-        </p:nvSpPr>
-        <p:spPr>
-          <a:xfrm>
-            <a:off x="3639312" y="1572768"/>
-            <a:ext cx="3127248" cy="868680"/>
-          </a:xfrm>
-          <a:prstGeom prst="rect">
-            <a:avLst/>
-          </a:prstGeom>
-          <a:noFill/>
-          <a:ln/>
-        </p:spPr>
-        <p:txBody>
-          <a:bodyPr wrap="square" lIns="0" tIns="0" rIns="0" bIns="0" rtlCol="0" anchor="t"/>
-          <a:lstStyle/>
-          <a:p>
-            <a:pPr indent="0" marL="0">
-              <a:buNone/>
-            </a:pPr>
-            <a:r>
-              <a:rPr lang="en-US" sz="1300" dirty="0">
-                <a:solidFill>
-                  <a:srgbClr val="0F1B2D"/>
-                </a:solidFill>
-                <a:latin typeface="Calibri" pitchFamily="34" charset="0"/>
-                <a:ea typeface="Calibri" pitchFamily="34" charset="-122"/>
-                <a:cs typeface="Calibri" pitchFamily="34" charset="-120"/>
-              </a:rPr>
-              <a:t>Decidir con lo que se observa, no con suposiciones. Se trabaja en ciclos cortos y se ajusta con lo aprendido.</a:t>
-            </a:r>
-            <a:endParaRPr lang="en-US" sz="1300" dirty="0"/>
-          </a:p>
-        </p:txBody>
-      </p:sp>
-      <p:sp>
-        <p:nvSpPr>
-          <p:cNvPr id="13" name="Shape 10"/>
-          <p:cNvSpPr/>
-          <p:nvPr/>
-        </p:nvSpPr>
-        <p:spPr>
-          <a:xfrm>
-            <a:off x="3639312" y="2514600"/>
-            <a:ext cx="1038758" cy="274320"/>
-          </a:xfrm>
-          <a:prstGeom prst="roundRect">
-            <a:avLst>
-              <a:gd name="adj" fmla="val 50000"/>
-            </a:avLst>
-          </a:prstGeom>
-          <a:solidFill>
-            <a:srgbClr val="E6EFFF"/>
-          </a:solidFill>
-          <a:ln w="12700">
-            <a:solidFill>
-              <a:srgbClr val="E6EFFF"/>
-            </a:solidFill>
-            <a:prstDash val="solid"/>
-          </a:ln>
-        </p:spPr>
-      </p:sp>
-      <p:sp>
-        <p:nvSpPr>
-          <p:cNvPr id="14" name="Text 11"/>
-          <p:cNvSpPr txBox="1"/>
-          <p:nvPr/>
-        </p:nvSpPr>
-        <p:spPr>
-          <a:xfrm>
-            <a:off x="3639312" y="2514600"/>
-            <a:ext cx="1038758" cy="274320"/>
-          </a:xfrm>
-          <a:prstGeom prst="rect">
-            <a:avLst/>
-          </a:prstGeom>
-          <a:noFill/>
-          <a:ln/>
-        </p:spPr>
-        <p:txBody>
-          <a:bodyPr wrap="square" lIns="0" tIns="0" rIns="0" bIns="0" rtlCol="0" anchor="ctr"/>
-          <a:lstStyle/>
-          <a:p>
-            <a:pPr algn="ctr" indent="0" marL="0">
-              <a:buNone/>
-            </a:pPr>
-            <a:r>
-              <a:rPr lang="en-US" sz="1050" b="1" dirty="0">
-                <a:solidFill>
-                  <a:srgbClr val="2F6FE4"/>
-                </a:solidFill>
-                <a:latin typeface="Calibri" pitchFamily="34" charset="0"/>
-                <a:ea typeface="Calibri" pitchFamily="34" charset="-122"/>
-                <a:cs typeface="Calibri" pitchFamily="34" charset="-120"/>
-              </a:rPr>
-              <a:t>Transparencia</a:t>
-            </a:r>
-            <a:endParaRPr lang="en-US" sz="1050" dirty="0"/>
-          </a:p>
-        </p:txBody>
-      </p:sp>
-      <p:sp>
-        <p:nvSpPr>
-          <p:cNvPr id="15" name="Shape 12"/>
-          <p:cNvSpPr/>
-          <p:nvPr/>
-        </p:nvSpPr>
-        <p:spPr>
-          <a:xfrm>
-            <a:off x="4751222" y="2514600"/>
-            <a:ext cx="841248" cy="274320"/>
-          </a:xfrm>
-          <a:prstGeom prst="roundRect">
-            <a:avLst>
-              <a:gd name="adj" fmla="val 50000"/>
-            </a:avLst>
-          </a:prstGeom>
-          <a:solidFill>
-            <a:srgbClr val="E6EFFF"/>
-          </a:solidFill>
-          <a:ln w="12700">
-            <a:solidFill>
-              <a:srgbClr val="E6EFFF"/>
-            </a:solidFill>
-            <a:prstDash val="solid"/>
-          </a:ln>
-        </p:spPr>
-      </p:sp>
-      <p:sp>
-        <p:nvSpPr>
-          <p:cNvPr id="16" name="Text 13"/>
-          <p:cNvSpPr txBox="1"/>
-          <p:nvPr/>
-        </p:nvSpPr>
-        <p:spPr>
-          <a:xfrm>
-            <a:off x="4751222" y="2514600"/>
-            <a:ext cx="841248" cy="274320"/>
-          </a:xfrm>
-          <a:prstGeom prst="rect">
-            <a:avLst/>
-          </a:prstGeom>
-          <a:noFill/>
-          <a:ln/>
-        </p:spPr>
-        <p:txBody>
-          <a:bodyPr wrap="square" lIns="0" tIns="0" rIns="0" bIns="0" rtlCol="0" anchor="ctr"/>
-          <a:lstStyle/>
-          <a:p>
-            <a:pPr algn="ctr" indent="0" marL="0">
-              <a:buNone/>
-            </a:pPr>
-            <a:r>
-              <a:rPr lang="en-US" sz="1050" b="1" dirty="0">
-                <a:solidFill>
-                  <a:srgbClr val="2F6FE4"/>
-                </a:solidFill>
-                <a:latin typeface="Calibri" pitchFamily="34" charset="0"/>
-                <a:ea typeface="Calibri" pitchFamily="34" charset="-122"/>
-                <a:cs typeface="Calibri" pitchFamily="34" charset="-120"/>
-              </a:rPr>
-              <a:t>Inspección</a:t>
-            </a:r>
-            <a:endParaRPr lang="en-US" sz="1050" dirty="0"/>
-          </a:p>
-        </p:txBody>
-      </p:sp>
-      <p:sp>
-        <p:nvSpPr>
-          <p:cNvPr id="17" name="Shape 14"/>
-          <p:cNvSpPr/>
-          <p:nvPr/>
-        </p:nvSpPr>
-        <p:spPr>
-          <a:xfrm>
-            <a:off x="5665622" y="2514600"/>
-            <a:ext cx="841248" cy="274320"/>
-          </a:xfrm>
-          <a:prstGeom prst="roundRect">
-            <a:avLst>
-              <a:gd name="adj" fmla="val 50000"/>
-            </a:avLst>
-          </a:prstGeom>
-          <a:solidFill>
-            <a:srgbClr val="E6EFFF"/>
-          </a:solidFill>
-          <a:ln w="12700">
-            <a:solidFill>
-              <a:srgbClr val="E6EFFF"/>
-            </a:solidFill>
-            <a:prstDash val="solid"/>
-          </a:ln>
-        </p:spPr>
-      </p:sp>
-      <p:sp>
-        <p:nvSpPr>
-          <p:cNvPr id="18" name="Text 15"/>
-          <p:cNvSpPr txBox="1"/>
-          <p:nvPr/>
-        </p:nvSpPr>
-        <p:spPr>
-          <a:xfrm>
-            <a:off x="5665622" y="2514600"/>
-            <a:ext cx="841248" cy="274320"/>
-          </a:xfrm>
-          <a:prstGeom prst="rect">
-            <a:avLst/>
-          </a:prstGeom>
-          <a:noFill/>
-          <a:ln/>
-        </p:spPr>
-        <p:txBody>
-          <a:bodyPr wrap="square" lIns="0" tIns="0" rIns="0" bIns="0" rtlCol="0" anchor="ctr"/>
-          <a:lstStyle/>
-          <a:p>
-            <a:pPr algn="ctr" indent="0" marL="0">
-              <a:buNone/>
-            </a:pPr>
-            <a:r>
-              <a:rPr lang="en-US" sz="1050" b="1" dirty="0">
-                <a:solidFill>
-                  <a:srgbClr val="2F6FE4"/>
-                </a:solidFill>
-                <a:latin typeface="Calibri" pitchFamily="34" charset="0"/>
-                <a:ea typeface="Calibri" pitchFamily="34" charset="-122"/>
-                <a:cs typeface="Calibri" pitchFamily="34" charset="-120"/>
-              </a:rPr>
-              <a:t>Adaptación</a:t>
-            </a:r>
-            <a:endParaRPr lang="en-US" sz="1050" dirty="0"/>
-          </a:p>
-        </p:txBody>
-      </p:sp>
-      <p:sp>
-        <p:nvSpPr>
-          <p:cNvPr id="19" name="Shape 16"/>
-          <p:cNvSpPr/>
-          <p:nvPr/>
-        </p:nvSpPr>
-        <p:spPr>
-          <a:xfrm>
-            <a:off x="7086600" y="1463040"/>
-            <a:ext cx="4526280" cy="1463040"/>
-          </a:xfrm>
-          <a:prstGeom prst="roundRect">
-            <a:avLst>
-              <a:gd name="adj" fmla="val 7500"/>
-            </a:avLst>
-          </a:prstGeom>
-          <a:solidFill>
-            <a:srgbClr val="E6EFFF"/>
-          </a:solidFill>
-          <a:ln w="12700">
-            <a:solidFill>
-              <a:srgbClr val="E6EFFF"/>
-            </a:solidFill>
-            <a:prstDash val="solid"/>
-          </a:ln>
-        </p:spPr>
-      </p:sp>
-      <p:sp>
-        <p:nvSpPr>
-          <p:cNvPr id="20" name="Text 17"/>
-          <p:cNvSpPr txBox="1"/>
-          <p:nvPr/>
-        </p:nvSpPr>
-        <p:spPr>
-          <a:xfrm>
-            <a:off x="7269480" y="1572768"/>
-            <a:ext cx="4206240" cy="1243584"/>
-          </a:xfrm>
-          <a:prstGeom prst="rect">
-            <a:avLst/>
-          </a:prstGeom>
-          <a:noFill/>
-          <a:ln/>
-        </p:spPr>
-        <p:txBody>
-          <a:bodyPr wrap="square" lIns="0" tIns="0" rIns="0" bIns="0" rtlCol="0" anchor="ctr"/>
-          <a:lstStyle/>
-          <a:p>
-            <a:pPr indent="0" marL="0">
-              <a:buNone/>
-            </a:pPr>
-            <a:r>
-              <a:rPr lang="en-US" sz="1250" dirty="0">
-                <a:solidFill>
-                  <a:srgbClr val="0F1B2D"/>
-                </a:solidFill>
-                <a:latin typeface="Calibri" pitchFamily="34" charset="0"/>
-                <a:ea typeface="Calibri" pitchFamily="34" charset="-122"/>
-                <a:cs typeface="Calibri" pitchFamily="34" charset="-120"/>
-              </a:rPr>
-              <a:t>Los tres vemos el mismo tablero Kanban (transparencia). En la revisión del Sprint 3 revisamos las métricas por clase del ConvLSTM (inspección). Si hay muchas falsas alarmas, ajustamos el umbral de confianza (HU11) en el Sprint 4 (adaptación).</a:t>
-            </a:r>
-            <a:endParaRPr lang="en-US" sz="1250" dirty="0"/>
-          </a:p>
-        </p:txBody>
-      </p:sp>
-      <p:sp>
-        <p:nvSpPr>
-          <p:cNvPr id="21" name="Shape 18"/>
-          <p:cNvSpPr/>
-          <p:nvPr/>
-        </p:nvSpPr>
-        <p:spPr>
-          <a:xfrm>
-            <a:off x="548640" y="3063240"/>
-            <a:ext cx="2743200" cy="1463040"/>
-          </a:xfrm>
-          <a:prstGeom prst="roundRect">
-            <a:avLst>
-              <a:gd name="adj" fmla="val 7500"/>
-            </a:avLst>
-          </a:prstGeom>
-          <a:solidFill>
-            <a:srgbClr val="0F9D8A"/>
-          </a:solidFill>
-          <a:ln w="12700">
-            <a:solidFill>
-              <a:srgbClr val="0F9D8A"/>
-            </a:solidFill>
-            <a:prstDash val="solid"/>
-          </a:ln>
-        </p:spPr>
-      </p:sp>
-      <p:sp>
-        <p:nvSpPr>
-          <p:cNvPr id="22" name="Shape 19"/>
-          <p:cNvSpPr/>
-          <p:nvPr/>
-        </p:nvSpPr>
-        <p:spPr>
-          <a:xfrm>
-            <a:off x="731520" y="3264408"/>
-            <a:ext cx="685800" cy="685800"/>
-          </a:xfrm>
-          <a:prstGeom prst="ellipse">
-            <a:avLst/>
-          </a:prstGeom>
-          <a:solidFill>
-            <a:srgbClr val="FFFFFF"/>
-          </a:solidFill>
-          <a:ln w="12700">
-            <a:solidFill>
-              <a:srgbClr val="FFFFFF"/>
-            </a:solidFill>
-            <a:prstDash val="solid"/>
-          </a:ln>
-        </p:spPr>
-      </p:sp>
-      <p:pic>
-        <p:nvPicPr>
-          <p:cNvPr id="23" name="Image 1" descr="preencoded.png">    </p:cNvPr>
-          <p:cNvPicPr>
-            <a:picLocks noChangeAspect="1"/>
-          </p:cNvPicPr>
-          <p:nvPr/>
-        </p:nvPicPr>
-        <p:blipFill>
-          <a:blip r:embed="rId2"/>
-          <a:stretch>
-            <a:fillRect/>
-          </a:stretch>
-        </p:blipFill>
-        <p:spPr>
-          <a:xfrm>
-            <a:off x="886968" y="3419856"/>
-            <a:ext cx="374904" cy="374904"/>
-          </a:xfrm>
-          <a:prstGeom prst="rect">
-            <a:avLst/>
-          </a:prstGeom>
-        </p:spPr>
-      </p:pic>
-      <p:sp>
-        <p:nvSpPr>
-          <p:cNvPr id="24" name="Text 20"/>
-          <p:cNvSpPr txBox="1"/>
-          <p:nvPr/>
-        </p:nvSpPr>
-        <p:spPr>
-          <a:xfrm>
-            <a:off x="2788920" y="3172968"/>
-            <a:ext cx="365760" cy="320040"/>
-          </a:xfrm>
-          <a:prstGeom prst="rect">
-            <a:avLst/>
-          </a:prstGeom>
-          <a:noFill/>
-          <a:ln/>
-        </p:spPr>
-        <p:txBody>
-          <a:bodyPr wrap="square" lIns="0" tIns="0" rIns="0" bIns="0" rtlCol="0" anchor="ctr"/>
-          <a:lstStyle/>
-          <a:p>
-            <a:pPr algn="r" indent="0" marL="0">
-              <a:buNone/>
-            </a:pPr>
-            <a:r>
-              <a:rPr lang="en-US" sz="1400" b="1" dirty="0">
-                <a:solidFill>
-                  <a:srgbClr val="FFFFFF"/>
-                </a:solidFill>
-                <a:latin typeface="Calibri" pitchFamily="34" charset="0"/>
-                <a:ea typeface="Calibri" pitchFamily="34" charset="-122"/>
-                <a:cs typeface="Calibri" pitchFamily="34" charset="-120"/>
-              </a:rPr>
-              <a:t>2</a:t>
-            </a:r>
-            <a:endParaRPr lang="en-US" sz="1400" dirty="0"/>
-          </a:p>
-        </p:txBody>
-      </p:sp>
-      <p:sp>
-        <p:nvSpPr>
-          <p:cNvPr id="25" name="Text 21"/>
-          <p:cNvSpPr txBox="1"/>
-          <p:nvPr/>
-        </p:nvSpPr>
-        <p:spPr>
-          <a:xfrm>
-            <a:off x="731520" y="3977640"/>
-            <a:ext cx="2468880" cy="502920"/>
-          </a:xfrm>
-          <a:prstGeom prst="rect">
-            <a:avLst/>
-          </a:prstGeom>
-          <a:noFill/>
-          <a:ln/>
-        </p:spPr>
-        <p:txBody>
-          <a:bodyPr wrap="square" lIns="0" tIns="0" rIns="0" bIns="0" rtlCol="0" anchor="t"/>
-          <a:lstStyle/>
-          <a:p>
-            <a:pPr indent="0" marL="0">
-              <a:buNone/>
-            </a:pPr>
-            <a:r>
-              <a:rPr lang="en-US" sz="1500" b="1" dirty="0">
-                <a:solidFill>
-                  <a:srgbClr val="FFFFFF"/>
-                </a:solidFill>
-                <a:latin typeface="Calibri" pitchFamily="34" charset="0"/>
-                <a:ea typeface="Calibri" pitchFamily="34" charset="-122"/>
-                <a:cs typeface="Calibri" pitchFamily="34" charset="-120"/>
-              </a:rPr>
-              <a:t>Autoorganización</a:t>
-            </a:r>
-            <a:endParaRPr lang="en-US" sz="1500" dirty="0"/>
-          </a:p>
-        </p:txBody>
-      </p:sp>
-      <p:sp>
-        <p:nvSpPr>
-          <p:cNvPr id="26" name="Shape 22"/>
-          <p:cNvSpPr/>
-          <p:nvPr/>
-        </p:nvSpPr>
-        <p:spPr>
-          <a:xfrm>
-            <a:off x="3474720" y="3063240"/>
-            <a:ext cx="3429000" cy="1463040"/>
-          </a:xfrm>
-          <a:prstGeom prst="roundRect">
-            <a:avLst>
-              <a:gd name="adj" fmla="val 7500"/>
-            </a:avLst>
-          </a:prstGeom>
-          <a:solidFill>
-            <a:srgbClr val="FFFFFF"/>
-          </a:solidFill>
-          <a:ln w="9525">
-            <a:solidFill>
-              <a:srgbClr val="D7DEE9"/>
-            </a:solidFill>
-            <a:prstDash val="solid"/>
-          </a:ln>
-        </p:spPr>
-      </p:sp>
-      <p:sp>
-        <p:nvSpPr>
-          <p:cNvPr id="27" name="Text 23"/>
-          <p:cNvSpPr txBox="1"/>
-          <p:nvPr/>
-        </p:nvSpPr>
-        <p:spPr>
-          <a:xfrm>
-            <a:off x="3639312" y="3172968"/>
-            <a:ext cx="3127248" cy="868680"/>
-          </a:xfrm>
-          <a:prstGeom prst="rect">
-            <a:avLst/>
-          </a:prstGeom>
-          <a:noFill/>
-          <a:ln/>
-        </p:spPr>
-        <p:txBody>
-          <a:bodyPr wrap="square" lIns="0" tIns="0" rIns="0" bIns="0" rtlCol="0" anchor="t"/>
-          <a:lstStyle/>
-          <a:p>
-            <a:pPr indent="0" marL="0">
-              <a:buNone/>
-            </a:pPr>
-            <a:r>
-              <a:rPr lang="en-US" sz="1300" dirty="0">
-                <a:solidFill>
-                  <a:srgbClr val="0F1B2D"/>
-                </a:solidFill>
-                <a:latin typeface="Calibri" pitchFamily="34" charset="0"/>
-                <a:ea typeface="Calibri" pitchFamily="34" charset="-122"/>
-                <a:cs typeface="Calibri" pitchFamily="34" charset="-120"/>
-              </a:rPr>
-              <a:t>El equipo decide cómo hacer el trabajo y se reparte las tareas; nadie se las impone desde fuera.</a:t>
-            </a:r>
-            <a:endParaRPr lang="en-US" sz="1300" dirty="0"/>
-          </a:p>
-        </p:txBody>
-      </p:sp>
-      <p:sp>
-        <p:nvSpPr>
-          <p:cNvPr id="28" name="Shape 24"/>
-          <p:cNvSpPr/>
-          <p:nvPr/>
-        </p:nvSpPr>
-        <p:spPr>
-          <a:xfrm>
-            <a:off x="3639312" y="4114800"/>
-            <a:ext cx="1056626" cy="274320"/>
-          </a:xfrm>
-          <a:prstGeom prst="roundRect">
-            <a:avLst>
-              <a:gd name="adj" fmla="val 50000"/>
-            </a:avLst>
-          </a:prstGeom>
-          <a:solidFill>
-            <a:srgbClr val="E2F6F3"/>
-          </a:solidFill>
-          <a:ln w="12700">
-            <a:solidFill>
-              <a:srgbClr val="E2F6F3"/>
-            </a:solidFill>
-            <a:prstDash val="solid"/>
-          </a:ln>
-        </p:spPr>
-      </p:sp>
-      <p:sp>
-        <p:nvSpPr>
-          <p:cNvPr id="29" name="Text 25"/>
-          <p:cNvSpPr txBox="1"/>
-          <p:nvPr/>
-        </p:nvSpPr>
-        <p:spPr>
-          <a:xfrm>
-            <a:off x="3639312" y="4114800"/>
-            <a:ext cx="1056626" cy="274320"/>
-          </a:xfrm>
-          <a:prstGeom prst="rect">
-            <a:avLst/>
-          </a:prstGeom>
-          <a:noFill/>
-          <a:ln/>
-        </p:spPr>
-        <p:txBody>
-          <a:bodyPr wrap="square" lIns="0" tIns="0" rIns="0" bIns="0" rtlCol="0" anchor="ctr"/>
-          <a:lstStyle/>
-          <a:p>
-            <a:pPr algn="ctr" indent="0" marL="0">
-              <a:buNone/>
-            </a:pPr>
-            <a:r>
-              <a:rPr lang="en-US" sz="1050" b="1" dirty="0">
-                <a:solidFill>
-                  <a:srgbClr val="0F9D8A"/>
-                </a:solidFill>
-                <a:latin typeface="Calibri" pitchFamily="34" charset="0"/>
-                <a:ea typeface="Calibri" pitchFamily="34" charset="-122"/>
-                <a:cs typeface="Calibri" pitchFamily="34" charset="-120"/>
-              </a:rPr>
-              <a:t>Autoasignación</a:t>
-            </a:r>
-            <a:endParaRPr lang="en-US" sz="1050" dirty="0"/>
-          </a:p>
-        </p:txBody>
-      </p:sp>
-      <p:sp>
-        <p:nvSpPr>
-          <p:cNvPr id="30" name="Shape 26"/>
-          <p:cNvSpPr/>
-          <p:nvPr/>
-        </p:nvSpPr>
-        <p:spPr>
-          <a:xfrm>
-            <a:off x="4769090" y="4114800"/>
-            <a:ext cx="1119603" cy="274320"/>
-          </a:xfrm>
-          <a:prstGeom prst="roundRect">
-            <a:avLst>
-              <a:gd name="adj" fmla="val 50000"/>
-            </a:avLst>
-          </a:prstGeom>
-          <a:solidFill>
-            <a:srgbClr val="E2F6F3"/>
-          </a:solidFill>
-          <a:ln w="12700">
-            <a:solidFill>
-              <a:srgbClr val="E2F6F3"/>
-            </a:solidFill>
-            <a:prstDash val="solid"/>
-          </a:ln>
-        </p:spPr>
-      </p:sp>
-      <p:sp>
-        <p:nvSpPr>
-          <p:cNvPr id="31" name="Text 27"/>
-          <p:cNvSpPr txBox="1"/>
-          <p:nvPr/>
-        </p:nvSpPr>
-        <p:spPr>
-          <a:xfrm>
-            <a:off x="4769090" y="4114800"/>
-            <a:ext cx="1119603" cy="274320"/>
-          </a:xfrm>
-          <a:prstGeom prst="rect">
-            <a:avLst/>
-          </a:prstGeom>
-          <a:noFill/>
-          <a:ln/>
-        </p:spPr>
-        <p:txBody>
-          <a:bodyPr wrap="square" lIns="0" tIns="0" rIns="0" bIns="0" rtlCol="0" anchor="ctr"/>
-          <a:lstStyle/>
-          <a:p>
-            <a:pPr algn="ctr" indent="0" marL="0">
-              <a:buNone/>
-            </a:pPr>
-            <a:r>
-              <a:rPr lang="en-US" sz="1050" b="1" dirty="0">
-                <a:solidFill>
-                  <a:srgbClr val="0F9D8A"/>
-                </a:solidFill>
-                <a:latin typeface="Calibri" pitchFamily="34" charset="0"/>
-                <a:ea typeface="Calibri" pitchFamily="34" charset="-122"/>
-                <a:cs typeface="Calibri" pitchFamily="34" charset="-120"/>
-              </a:rPr>
-              <a:t>Responsabilidad</a:t>
-            </a:r>
-            <a:endParaRPr lang="en-US" sz="1050" dirty="0"/>
-          </a:p>
-        </p:txBody>
-      </p:sp>
-      <p:sp>
-        <p:nvSpPr>
-          <p:cNvPr id="32" name="Shape 28"/>
-          <p:cNvSpPr/>
-          <p:nvPr/>
-        </p:nvSpPr>
-        <p:spPr>
-          <a:xfrm>
-            <a:off x="5961845" y="4114800"/>
-            <a:ext cx="804715" cy="274320"/>
-          </a:xfrm>
-          <a:prstGeom prst="roundRect">
-            <a:avLst>
-              <a:gd name="adj" fmla="val 50000"/>
-            </a:avLst>
-          </a:prstGeom>
-          <a:solidFill>
-            <a:srgbClr val="E2F6F3"/>
-          </a:solidFill>
-          <a:ln w="12700">
-            <a:solidFill>
-              <a:srgbClr val="E2F6F3"/>
-            </a:solidFill>
-            <a:prstDash val="solid"/>
-          </a:ln>
-        </p:spPr>
-      </p:sp>
-      <p:sp>
-        <p:nvSpPr>
-          <p:cNvPr id="33" name="Text 29"/>
-          <p:cNvSpPr txBox="1"/>
-          <p:nvPr/>
-        </p:nvSpPr>
-        <p:spPr>
-          <a:xfrm>
-            <a:off x="5961845" y="4114800"/>
-            <a:ext cx="804715" cy="274320"/>
-          </a:xfrm>
-          <a:prstGeom prst="rect">
-            <a:avLst/>
-          </a:prstGeom>
-          <a:noFill/>
-          <a:ln/>
-        </p:spPr>
-        <p:txBody>
-          <a:bodyPr wrap="square" lIns="0" tIns="0" rIns="0" bIns="0" rtlCol="0" anchor="ctr"/>
-          <a:lstStyle/>
-          <a:p>
-            <a:pPr algn="ctr" indent="0" marL="0">
-              <a:buNone/>
-            </a:pPr>
-            <a:r>
-              <a:rPr lang="en-US" sz="1050" b="1" dirty="0">
-                <a:solidFill>
-                  <a:srgbClr val="0F9D8A"/>
-                </a:solidFill>
-                <a:latin typeface="Calibri" pitchFamily="34" charset="0"/>
-                <a:ea typeface="Calibri" pitchFamily="34" charset="-122"/>
-                <a:cs typeface="Calibri" pitchFamily="34" charset="-120"/>
-              </a:rPr>
-              <a:t>Iniciativa</a:t>
-            </a:r>
-            <a:endParaRPr lang="en-US" sz="1050" dirty="0"/>
-          </a:p>
-        </p:txBody>
-      </p:sp>
-      <p:sp>
-        <p:nvSpPr>
-          <p:cNvPr id="34" name="Shape 30"/>
-          <p:cNvSpPr/>
-          <p:nvPr/>
-        </p:nvSpPr>
-        <p:spPr>
-          <a:xfrm>
-            <a:off x="7086600" y="3063240"/>
-            <a:ext cx="4526280" cy="1463040"/>
-          </a:xfrm>
-          <a:prstGeom prst="roundRect">
-            <a:avLst>
-              <a:gd name="adj" fmla="val 7500"/>
-            </a:avLst>
-          </a:prstGeom>
-          <a:solidFill>
-            <a:srgbClr val="E2F6F3"/>
-          </a:solidFill>
-          <a:ln w="12700">
-            <a:solidFill>
-              <a:srgbClr val="E2F6F3"/>
-            </a:solidFill>
-            <a:prstDash val="solid"/>
-          </a:ln>
-        </p:spPr>
-      </p:sp>
-      <p:sp>
-        <p:nvSpPr>
-          <p:cNvPr id="35" name="Text 31"/>
-          <p:cNvSpPr txBox="1"/>
-          <p:nvPr/>
-        </p:nvSpPr>
-        <p:spPr>
-          <a:xfrm>
-            <a:off x="7269480" y="3172968"/>
-            <a:ext cx="4206240" cy="1243584"/>
-          </a:xfrm>
-          <a:prstGeom prst="rect">
-            <a:avLst/>
-          </a:prstGeom>
-          <a:noFill/>
-          <a:ln/>
-        </p:spPr>
-        <p:txBody>
-          <a:bodyPr wrap="square" lIns="0" tIns="0" rIns="0" bIns="0" rtlCol="0" anchor="ctr"/>
-          <a:lstStyle/>
-          <a:p>
-            <a:pPr indent="0" marL="0">
-              <a:buNone/>
-            </a:pPr>
-            <a:r>
-              <a:rPr lang="en-US" sz="1250" dirty="0">
-                <a:solidFill>
-                  <a:srgbClr val="0F1B2D"/>
-                </a:solidFill>
-                <a:latin typeface="Calibri" pitchFamily="34" charset="0"/>
-                <a:ea typeface="Calibri" pitchFamily="34" charset="-122"/>
-                <a:cs typeface="Calibri" pitchFamily="34" charset="-120"/>
-              </a:rPr>
-              <a:t>En la planificación, Luis toma las historias de YOLOv4 y ConvLSTM (EP02–EP04) y Anthony las de interfaz y alertas (EP05). Si alguien termina antes, toma la siguiente historia del tablero sin esperar órdenes.</a:t>
-            </a:r>
-            <a:endParaRPr lang="en-US" sz="1250" dirty="0"/>
-          </a:p>
-        </p:txBody>
-      </p:sp>
-      <p:sp>
-        <p:nvSpPr>
-          <p:cNvPr id="36" name="Shape 32"/>
-          <p:cNvSpPr/>
-          <p:nvPr/>
-        </p:nvSpPr>
-        <p:spPr>
-          <a:xfrm>
-            <a:off x="548640" y="4663440"/>
-            <a:ext cx="2743200" cy="1463040"/>
-          </a:xfrm>
-          <a:prstGeom prst="roundRect">
-            <a:avLst>
-              <a:gd name="adj" fmla="val 7500"/>
-            </a:avLst>
-          </a:prstGeom>
-          <a:solidFill>
-            <a:srgbClr val="5B4BDB"/>
-          </a:solidFill>
-          <a:ln w="12700">
-            <a:solidFill>
-              <a:srgbClr val="5B4BDB"/>
-            </a:solidFill>
-            <a:prstDash val="solid"/>
-          </a:ln>
-        </p:spPr>
-      </p:sp>
-      <p:sp>
-        <p:nvSpPr>
-          <p:cNvPr id="37" name="Shape 33"/>
-          <p:cNvSpPr/>
-          <p:nvPr/>
-        </p:nvSpPr>
-        <p:spPr>
-          <a:xfrm>
-            <a:off x="731520" y="4864608"/>
-            <a:ext cx="685800" cy="685800"/>
-          </a:xfrm>
-          <a:prstGeom prst="ellipse">
-            <a:avLst/>
-          </a:prstGeom>
-          <a:solidFill>
-            <a:srgbClr val="FFFFFF"/>
-          </a:solidFill>
-          <a:ln w="12700">
-            <a:solidFill>
-              <a:srgbClr val="FFFFFF"/>
-            </a:solidFill>
-            <a:prstDash val="solid"/>
-          </a:ln>
-        </p:spPr>
-      </p:sp>
-      <p:pic>
-        <p:nvPicPr>
-          <p:cNvPr id="38" name="Image 2" descr="preencoded.png">    </p:cNvPr>
+          <p:cNvPr id="8" name="Image 0" descr="preencoded.png"/>
           <p:cNvPicPr>
             <a:picLocks noChangeAspect="1"/>
           </p:cNvPicPr>
@@ -3206,7 +2080,7 @@
         </p:blipFill>
         <p:spPr>
           <a:xfrm>
-            <a:off x="886968" y="5020056"/>
+            <a:off x="886968" y="1819656"/>
             <a:ext cx="374904" cy="374904"/>
           </a:xfrm>
           <a:prstGeom prst="rect">
@@ -3216,13 +2090,13 @@
       </p:pic>
       <p:sp>
         <p:nvSpPr>
-          <p:cNvPr id="39" name="Text 34"/>
+          <p:cNvPr id="9" name="Text 6"/>
           <p:cNvSpPr txBox="1"/>
           <p:nvPr/>
         </p:nvSpPr>
         <p:spPr>
           <a:xfrm>
-            <a:off x="2788920" y="4773168"/>
+            <a:off x="2788920" y="1572768"/>
             <a:ext cx="365760" cy="320040"/>
           </a:xfrm>
           <a:prstGeom prst="rect">
@@ -3235,7 +2109,7 @@
           <a:bodyPr wrap="square" lIns="0" tIns="0" rIns="0" bIns="0" rtlCol="0" anchor="ctr"/>
           <a:lstStyle/>
           <a:p>
-            <a:pPr algn="r" indent="0" marL="0">
+            <a:pPr marL="0" indent="0" algn="r">
               <a:buNone/>
             </a:pPr>
             <a:r>
@@ -3247,7 +2121,7 @@
                 <a:ea typeface="Calibri" pitchFamily="34" charset="-122"/>
                 <a:cs typeface="Calibri" pitchFamily="34" charset="-120"/>
               </a:rPr>
-              <a:t>3</a:t>
+              <a:t>1</a:t>
             </a:r>
             <a:endParaRPr lang="en-US" sz="1400" dirty="0"/>
           </a:p>
@@ -3255,13 +2129,13 @@
       </p:sp>
       <p:sp>
         <p:nvSpPr>
-          <p:cNvPr id="40" name="Text 35"/>
+          <p:cNvPr id="10" name="Text 7"/>
           <p:cNvSpPr txBox="1"/>
           <p:nvPr/>
         </p:nvSpPr>
         <p:spPr>
           <a:xfrm>
-            <a:off x="731520" y="5577840"/>
+            <a:off x="731520" y="2377440"/>
             <a:ext cx="2468880" cy="502920"/>
           </a:xfrm>
           <a:prstGeom prst="rect">
@@ -3274,7 +2148,7 @@
           <a:bodyPr wrap="square" lIns="0" tIns="0" rIns="0" bIns="0" rtlCol="0" anchor="t"/>
           <a:lstStyle/>
           <a:p>
-            <a:pPr indent="0" marL="0">
+            <a:pPr marL="0" indent="0">
               <a:buNone/>
             </a:pPr>
             <a:r>
@@ -3286,7 +2160,7 @@
                 <a:ea typeface="Calibri" pitchFamily="34" charset="-122"/>
                 <a:cs typeface="Calibri" pitchFamily="34" charset="-120"/>
               </a:rPr>
-              <a:t>Colaboración</a:t>
+              <a:t>Control del proceso empírico</a:t>
             </a:r>
             <a:endParaRPr lang="en-US" sz="1500" dirty="0"/>
           </a:p>
@@ -3294,13 +2168,13 @@
       </p:sp>
       <p:sp>
         <p:nvSpPr>
-          <p:cNvPr id="41" name="Shape 36"/>
+          <p:cNvPr id="11" name="Shape 8"/>
           <p:cNvSpPr/>
           <p:nvPr/>
         </p:nvSpPr>
         <p:spPr>
           <a:xfrm>
-            <a:off x="3474720" y="4663440"/>
+            <a:off x="3474720" y="1463040"/>
             <a:ext cx="3429000" cy="1463040"/>
           </a:xfrm>
           <a:prstGeom prst="roundRect">
@@ -3318,6 +2192,1079 @@
             <a:prstDash val="solid"/>
           </a:ln>
         </p:spPr>
+        <p:txBody>
+          <a:bodyPr/>
+          <a:lstStyle/>
+          <a:p>
+            <a:endParaRPr lang="es-ES"/>
+          </a:p>
+        </p:txBody>
+      </p:sp>
+      <p:sp>
+        <p:nvSpPr>
+          <p:cNvPr id="12" name="Text 9"/>
+          <p:cNvSpPr txBox="1"/>
+          <p:nvPr/>
+        </p:nvSpPr>
+        <p:spPr>
+          <a:xfrm>
+            <a:off x="3639312" y="1572768"/>
+            <a:ext cx="3127248" cy="868680"/>
+          </a:xfrm>
+          <a:prstGeom prst="rect">
+            <a:avLst/>
+          </a:prstGeom>
+          <a:noFill/>
+          <a:ln/>
+        </p:spPr>
+        <p:txBody>
+          <a:bodyPr wrap="square" lIns="0" tIns="0" rIns="0" bIns="0" rtlCol="0" anchor="t"/>
+          <a:lstStyle/>
+          <a:p>
+            <a:pPr marL="0" indent="0">
+              <a:buNone/>
+            </a:pPr>
+            <a:r>
+              <a:rPr lang="en-US" sz="1300" dirty="0">
+                <a:solidFill>
+                  <a:srgbClr val="0F1B2D"/>
+                </a:solidFill>
+                <a:latin typeface="Calibri" pitchFamily="34" charset="0"/>
+                <a:ea typeface="Calibri" pitchFamily="34" charset="-122"/>
+                <a:cs typeface="Calibri" pitchFamily="34" charset="-120"/>
+              </a:rPr>
+              <a:t>Decidir con lo que se observa, no con suposiciones. Se trabaja en ciclos cortos y se ajusta con lo aprendido.</a:t>
+            </a:r>
+            <a:endParaRPr lang="en-US" sz="1300" dirty="0"/>
+          </a:p>
+        </p:txBody>
+      </p:sp>
+      <p:sp>
+        <p:nvSpPr>
+          <p:cNvPr id="13" name="Shape 10"/>
+          <p:cNvSpPr/>
+          <p:nvPr/>
+        </p:nvSpPr>
+        <p:spPr>
+          <a:xfrm>
+            <a:off x="3639312" y="2514600"/>
+            <a:ext cx="1038758" cy="274320"/>
+          </a:xfrm>
+          <a:prstGeom prst="roundRect">
+            <a:avLst>
+              <a:gd name="adj" fmla="val 50000"/>
+            </a:avLst>
+          </a:prstGeom>
+          <a:solidFill>
+            <a:srgbClr val="E6EFFF"/>
+          </a:solidFill>
+          <a:ln w="12700">
+            <a:solidFill>
+              <a:srgbClr val="E6EFFF"/>
+            </a:solidFill>
+            <a:prstDash val="solid"/>
+          </a:ln>
+        </p:spPr>
+        <p:txBody>
+          <a:bodyPr/>
+          <a:lstStyle/>
+          <a:p>
+            <a:endParaRPr lang="es-ES"/>
+          </a:p>
+        </p:txBody>
+      </p:sp>
+      <p:sp>
+        <p:nvSpPr>
+          <p:cNvPr id="14" name="Text 11"/>
+          <p:cNvSpPr txBox="1"/>
+          <p:nvPr/>
+        </p:nvSpPr>
+        <p:spPr>
+          <a:xfrm>
+            <a:off x="3639312" y="2514600"/>
+            <a:ext cx="1038758" cy="274320"/>
+          </a:xfrm>
+          <a:prstGeom prst="rect">
+            <a:avLst/>
+          </a:prstGeom>
+          <a:noFill/>
+          <a:ln/>
+        </p:spPr>
+        <p:txBody>
+          <a:bodyPr wrap="square" lIns="0" tIns="0" rIns="0" bIns="0" rtlCol="0" anchor="ctr"/>
+          <a:lstStyle/>
+          <a:p>
+            <a:pPr marL="0" indent="0" algn="ctr">
+              <a:buNone/>
+            </a:pPr>
+            <a:r>
+              <a:rPr lang="en-US" sz="1050" b="1" dirty="0">
+                <a:solidFill>
+                  <a:srgbClr val="2F6FE4"/>
+                </a:solidFill>
+                <a:latin typeface="Calibri" pitchFamily="34" charset="0"/>
+                <a:ea typeface="Calibri" pitchFamily="34" charset="-122"/>
+                <a:cs typeface="Calibri" pitchFamily="34" charset="-120"/>
+              </a:rPr>
+              <a:t>Transparencia</a:t>
+            </a:r>
+            <a:endParaRPr lang="en-US" sz="1050" dirty="0"/>
+          </a:p>
+        </p:txBody>
+      </p:sp>
+      <p:sp>
+        <p:nvSpPr>
+          <p:cNvPr id="15" name="Shape 12"/>
+          <p:cNvSpPr/>
+          <p:nvPr/>
+        </p:nvSpPr>
+        <p:spPr>
+          <a:xfrm>
+            <a:off x="4751222" y="2514600"/>
+            <a:ext cx="841248" cy="274320"/>
+          </a:xfrm>
+          <a:prstGeom prst="roundRect">
+            <a:avLst>
+              <a:gd name="adj" fmla="val 50000"/>
+            </a:avLst>
+          </a:prstGeom>
+          <a:solidFill>
+            <a:srgbClr val="E6EFFF"/>
+          </a:solidFill>
+          <a:ln w="12700">
+            <a:solidFill>
+              <a:srgbClr val="E6EFFF"/>
+            </a:solidFill>
+            <a:prstDash val="solid"/>
+          </a:ln>
+        </p:spPr>
+        <p:txBody>
+          <a:bodyPr/>
+          <a:lstStyle/>
+          <a:p>
+            <a:endParaRPr lang="es-ES"/>
+          </a:p>
+        </p:txBody>
+      </p:sp>
+      <p:sp>
+        <p:nvSpPr>
+          <p:cNvPr id="16" name="Text 13"/>
+          <p:cNvSpPr txBox="1"/>
+          <p:nvPr/>
+        </p:nvSpPr>
+        <p:spPr>
+          <a:xfrm>
+            <a:off x="4751222" y="2514600"/>
+            <a:ext cx="841248" cy="274320"/>
+          </a:xfrm>
+          <a:prstGeom prst="rect">
+            <a:avLst/>
+          </a:prstGeom>
+          <a:noFill/>
+          <a:ln/>
+        </p:spPr>
+        <p:txBody>
+          <a:bodyPr wrap="square" lIns="0" tIns="0" rIns="0" bIns="0" rtlCol="0" anchor="ctr"/>
+          <a:lstStyle/>
+          <a:p>
+            <a:pPr marL="0" indent="0" algn="ctr">
+              <a:buNone/>
+            </a:pPr>
+            <a:r>
+              <a:rPr lang="en-US" sz="1050" b="1" dirty="0">
+                <a:solidFill>
+                  <a:srgbClr val="2F6FE4"/>
+                </a:solidFill>
+                <a:latin typeface="Calibri" pitchFamily="34" charset="0"/>
+                <a:ea typeface="Calibri" pitchFamily="34" charset="-122"/>
+                <a:cs typeface="Calibri" pitchFamily="34" charset="-120"/>
+              </a:rPr>
+              <a:t>Inspección</a:t>
+            </a:r>
+            <a:endParaRPr lang="en-US" sz="1050" dirty="0"/>
+          </a:p>
+        </p:txBody>
+      </p:sp>
+      <p:sp>
+        <p:nvSpPr>
+          <p:cNvPr id="17" name="Shape 14"/>
+          <p:cNvSpPr/>
+          <p:nvPr/>
+        </p:nvSpPr>
+        <p:spPr>
+          <a:xfrm>
+            <a:off x="5665622" y="2514600"/>
+            <a:ext cx="841248" cy="274320"/>
+          </a:xfrm>
+          <a:prstGeom prst="roundRect">
+            <a:avLst>
+              <a:gd name="adj" fmla="val 50000"/>
+            </a:avLst>
+          </a:prstGeom>
+          <a:solidFill>
+            <a:srgbClr val="E6EFFF"/>
+          </a:solidFill>
+          <a:ln w="12700">
+            <a:solidFill>
+              <a:srgbClr val="E6EFFF"/>
+            </a:solidFill>
+            <a:prstDash val="solid"/>
+          </a:ln>
+        </p:spPr>
+        <p:txBody>
+          <a:bodyPr/>
+          <a:lstStyle/>
+          <a:p>
+            <a:endParaRPr lang="es-ES"/>
+          </a:p>
+        </p:txBody>
+      </p:sp>
+      <p:sp>
+        <p:nvSpPr>
+          <p:cNvPr id="18" name="Text 15"/>
+          <p:cNvSpPr txBox="1"/>
+          <p:nvPr/>
+        </p:nvSpPr>
+        <p:spPr>
+          <a:xfrm>
+            <a:off x="5665622" y="2514600"/>
+            <a:ext cx="841248" cy="274320"/>
+          </a:xfrm>
+          <a:prstGeom prst="rect">
+            <a:avLst/>
+          </a:prstGeom>
+          <a:noFill/>
+          <a:ln/>
+        </p:spPr>
+        <p:txBody>
+          <a:bodyPr wrap="square" lIns="0" tIns="0" rIns="0" bIns="0" rtlCol="0" anchor="ctr"/>
+          <a:lstStyle/>
+          <a:p>
+            <a:pPr marL="0" indent="0" algn="ctr">
+              <a:buNone/>
+            </a:pPr>
+            <a:r>
+              <a:rPr lang="en-US" sz="1050" b="1" dirty="0">
+                <a:solidFill>
+                  <a:srgbClr val="2F6FE4"/>
+                </a:solidFill>
+                <a:latin typeface="Calibri" pitchFamily="34" charset="0"/>
+                <a:ea typeface="Calibri" pitchFamily="34" charset="-122"/>
+                <a:cs typeface="Calibri" pitchFamily="34" charset="-120"/>
+              </a:rPr>
+              <a:t>Adaptación</a:t>
+            </a:r>
+            <a:endParaRPr lang="en-US" sz="1050" dirty="0"/>
+          </a:p>
+        </p:txBody>
+      </p:sp>
+      <p:sp>
+        <p:nvSpPr>
+          <p:cNvPr id="19" name="Shape 16"/>
+          <p:cNvSpPr/>
+          <p:nvPr/>
+        </p:nvSpPr>
+        <p:spPr>
+          <a:xfrm>
+            <a:off x="7086600" y="1463040"/>
+            <a:ext cx="4526280" cy="1463040"/>
+          </a:xfrm>
+          <a:prstGeom prst="roundRect">
+            <a:avLst>
+              <a:gd name="adj" fmla="val 7500"/>
+            </a:avLst>
+          </a:prstGeom>
+          <a:solidFill>
+            <a:srgbClr val="E6EFFF"/>
+          </a:solidFill>
+          <a:ln w="12700">
+            <a:solidFill>
+              <a:srgbClr val="E6EFFF"/>
+            </a:solidFill>
+            <a:prstDash val="solid"/>
+          </a:ln>
+        </p:spPr>
+        <p:txBody>
+          <a:bodyPr/>
+          <a:lstStyle/>
+          <a:p>
+            <a:endParaRPr lang="es-ES"/>
+          </a:p>
+        </p:txBody>
+      </p:sp>
+      <p:sp>
+        <p:nvSpPr>
+          <p:cNvPr id="20" name="Text 17"/>
+          <p:cNvSpPr txBox="1"/>
+          <p:nvPr/>
+        </p:nvSpPr>
+        <p:spPr>
+          <a:xfrm>
+            <a:off x="7269480" y="1572768"/>
+            <a:ext cx="4206240" cy="1243584"/>
+          </a:xfrm>
+          <a:prstGeom prst="rect">
+            <a:avLst/>
+          </a:prstGeom>
+          <a:noFill/>
+          <a:ln/>
+        </p:spPr>
+        <p:txBody>
+          <a:bodyPr wrap="square" lIns="0" tIns="0" rIns="0" bIns="0" rtlCol="0" anchor="ctr"/>
+          <a:lstStyle/>
+          <a:p>
+            <a:pPr marL="0" indent="0">
+              <a:buNone/>
+            </a:pPr>
+            <a:r>
+              <a:rPr lang="es-ES" sz="1250">
+                <a:solidFill>
+                  <a:srgbClr val="0F1B2D"/>
+                </a:solidFill>
+                <a:latin typeface="Calibri" pitchFamily="34" charset="0"/>
+                <a:ea typeface="Calibri" pitchFamily="34" charset="-122"/>
+                <a:cs typeface="Calibri" pitchFamily="34" charset="-120"/>
+              </a:rPr>
+              <a:t>Los tres vemos el mismo tablero Kanban (transparencia). En la revisión del Sprint 3 revisamos las métricas por clase del ConvLSTM (inspección). Si hay muchas falsas alarmas, ajustamos el umbral de confianza (HU11) en el Sprint 2 (adaptación).</a:t>
+            </a:r>
+            <a:endParaRPr lang="en-US" sz="1250" dirty="0"/>
+          </a:p>
+        </p:txBody>
+      </p:sp>
+      <p:sp>
+        <p:nvSpPr>
+          <p:cNvPr id="21" name="Shape 18"/>
+          <p:cNvSpPr/>
+          <p:nvPr/>
+        </p:nvSpPr>
+        <p:spPr>
+          <a:xfrm>
+            <a:off x="548640" y="3063240"/>
+            <a:ext cx="2743200" cy="1463040"/>
+          </a:xfrm>
+          <a:prstGeom prst="roundRect">
+            <a:avLst>
+              <a:gd name="adj" fmla="val 7500"/>
+            </a:avLst>
+          </a:prstGeom>
+          <a:solidFill>
+            <a:srgbClr val="0F9D8A"/>
+          </a:solidFill>
+          <a:ln w="12700">
+            <a:solidFill>
+              <a:srgbClr val="0F9D8A"/>
+            </a:solidFill>
+            <a:prstDash val="solid"/>
+          </a:ln>
+        </p:spPr>
+        <p:txBody>
+          <a:bodyPr/>
+          <a:lstStyle/>
+          <a:p>
+            <a:endParaRPr lang="es-ES"/>
+          </a:p>
+        </p:txBody>
+      </p:sp>
+      <p:sp>
+        <p:nvSpPr>
+          <p:cNvPr id="22" name="Shape 19"/>
+          <p:cNvSpPr/>
+          <p:nvPr/>
+        </p:nvSpPr>
+        <p:spPr>
+          <a:xfrm>
+            <a:off x="731520" y="3264408"/>
+            <a:ext cx="685800" cy="685800"/>
+          </a:xfrm>
+          <a:prstGeom prst="ellipse">
+            <a:avLst/>
+          </a:prstGeom>
+          <a:solidFill>
+            <a:srgbClr val="FFFFFF"/>
+          </a:solidFill>
+          <a:ln w="12700">
+            <a:solidFill>
+              <a:srgbClr val="FFFFFF"/>
+            </a:solidFill>
+            <a:prstDash val="solid"/>
+          </a:ln>
+        </p:spPr>
+        <p:txBody>
+          <a:bodyPr/>
+          <a:lstStyle/>
+          <a:p>
+            <a:endParaRPr lang="es-ES"/>
+          </a:p>
+        </p:txBody>
+      </p:sp>
+      <p:pic>
+        <p:nvPicPr>
+          <p:cNvPr id="23" name="Image 1" descr="preencoded.png"/>
+          <p:cNvPicPr>
+            <a:picLocks noChangeAspect="1"/>
+          </p:cNvPicPr>
+          <p:nvPr/>
+        </p:nvPicPr>
+        <p:blipFill>
+          <a:blip r:embed="rId4"/>
+          <a:stretch>
+            <a:fillRect/>
+          </a:stretch>
+        </p:blipFill>
+        <p:spPr>
+          <a:xfrm>
+            <a:off x="886968" y="3419856"/>
+            <a:ext cx="374904" cy="374904"/>
+          </a:xfrm>
+          <a:prstGeom prst="rect">
+            <a:avLst/>
+          </a:prstGeom>
+        </p:spPr>
+      </p:pic>
+      <p:sp>
+        <p:nvSpPr>
+          <p:cNvPr id="24" name="Text 20"/>
+          <p:cNvSpPr txBox="1"/>
+          <p:nvPr/>
+        </p:nvSpPr>
+        <p:spPr>
+          <a:xfrm>
+            <a:off x="2788920" y="3172968"/>
+            <a:ext cx="365760" cy="320040"/>
+          </a:xfrm>
+          <a:prstGeom prst="rect">
+            <a:avLst/>
+          </a:prstGeom>
+          <a:noFill/>
+          <a:ln/>
+        </p:spPr>
+        <p:txBody>
+          <a:bodyPr wrap="square" lIns="0" tIns="0" rIns="0" bIns="0" rtlCol="0" anchor="ctr"/>
+          <a:lstStyle/>
+          <a:p>
+            <a:pPr marL="0" indent="0" algn="r">
+              <a:buNone/>
+            </a:pPr>
+            <a:r>
+              <a:rPr lang="en-US" sz="1400" b="1" dirty="0">
+                <a:solidFill>
+                  <a:srgbClr val="FFFFFF"/>
+                </a:solidFill>
+                <a:latin typeface="Calibri" pitchFamily="34" charset="0"/>
+                <a:ea typeface="Calibri" pitchFamily="34" charset="-122"/>
+                <a:cs typeface="Calibri" pitchFamily="34" charset="-120"/>
+              </a:rPr>
+              <a:t>2</a:t>
+            </a:r>
+            <a:endParaRPr lang="en-US" sz="1400" dirty="0"/>
+          </a:p>
+        </p:txBody>
+      </p:sp>
+      <p:sp>
+        <p:nvSpPr>
+          <p:cNvPr id="25" name="Text 21"/>
+          <p:cNvSpPr txBox="1"/>
+          <p:nvPr/>
+        </p:nvSpPr>
+        <p:spPr>
+          <a:xfrm>
+            <a:off x="731520" y="3977640"/>
+            <a:ext cx="2468880" cy="502920"/>
+          </a:xfrm>
+          <a:prstGeom prst="rect">
+            <a:avLst/>
+          </a:prstGeom>
+          <a:noFill/>
+          <a:ln/>
+        </p:spPr>
+        <p:txBody>
+          <a:bodyPr wrap="square" lIns="0" tIns="0" rIns="0" bIns="0" rtlCol="0" anchor="t"/>
+          <a:lstStyle/>
+          <a:p>
+            <a:pPr marL="0" indent="0">
+              <a:buNone/>
+            </a:pPr>
+            <a:r>
+              <a:rPr lang="en-US" sz="1500" b="1" dirty="0">
+                <a:solidFill>
+                  <a:srgbClr val="FFFFFF"/>
+                </a:solidFill>
+                <a:latin typeface="Calibri" pitchFamily="34" charset="0"/>
+                <a:ea typeface="Calibri" pitchFamily="34" charset="-122"/>
+                <a:cs typeface="Calibri" pitchFamily="34" charset="-120"/>
+              </a:rPr>
+              <a:t>Autoorganización</a:t>
+            </a:r>
+            <a:endParaRPr lang="en-US" sz="1500" dirty="0"/>
+          </a:p>
+        </p:txBody>
+      </p:sp>
+      <p:sp>
+        <p:nvSpPr>
+          <p:cNvPr id="26" name="Shape 22"/>
+          <p:cNvSpPr/>
+          <p:nvPr/>
+        </p:nvSpPr>
+        <p:spPr>
+          <a:xfrm>
+            <a:off x="3474720" y="3063240"/>
+            <a:ext cx="3429000" cy="1463040"/>
+          </a:xfrm>
+          <a:prstGeom prst="roundRect">
+            <a:avLst>
+              <a:gd name="adj" fmla="val 7500"/>
+            </a:avLst>
+          </a:prstGeom>
+          <a:solidFill>
+            <a:srgbClr val="FFFFFF"/>
+          </a:solidFill>
+          <a:ln w="9525">
+            <a:solidFill>
+              <a:srgbClr val="D7DEE9"/>
+            </a:solidFill>
+            <a:prstDash val="solid"/>
+          </a:ln>
+        </p:spPr>
+        <p:txBody>
+          <a:bodyPr/>
+          <a:lstStyle/>
+          <a:p>
+            <a:endParaRPr lang="es-ES"/>
+          </a:p>
+        </p:txBody>
+      </p:sp>
+      <p:sp>
+        <p:nvSpPr>
+          <p:cNvPr id="27" name="Text 23"/>
+          <p:cNvSpPr txBox="1"/>
+          <p:nvPr/>
+        </p:nvSpPr>
+        <p:spPr>
+          <a:xfrm>
+            <a:off x="3639312" y="3172968"/>
+            <a:ext cx="3127248" cy="868680"/>
+          </a:xfrm>
+          <a:prstGeom prst="rect">
+            <a:avLst/>
+          </a:prstGeom>
+          <a:noFill/>
+          <a:ln/>
+        </p:spPr>
+        <p:txBody>
+          <a:bodyPr wrap="square" lIns="0" tIns="0" rIns="0" bIns="0" rtlCol="0" anchor="t"/>
+          <a:lstStyle/>
+          <a:p>
+            <a:pPr marL="0" indent="0">
+              <a:buNone/>
+            </a:pPr>
+            <a:r>
+              <a:rPr lang="en-US" sz="1300" dirty="0">
+                <a:solidFill>
+                  <a:srgbClr val="0F1B2D"/>
+                </a:solidFill>
+                <a:latin typeface="Calibri" pitchFamily="34" charset="0"/>
+                <a:ea typeface="Calibri" pitchFamily="34" charset="-122"/>
+                <a:cs typeface="Calibri" pitchFamily="34" charset="-120"/>
+              </a:rPr>
+              <a:t>El equipo decide cómo hacer el trabajo y se reparte las tareas; nadie se las impone desde fuera.</a:t>
+            </a:r>
+            <a:endParaRPr lang="en-US" sz="1300" dirty="0"/>
+          </a:p>
+        </p:txBody>
+      </p:sp>
+      <p:sp>
+        <p:nvSpPr>
+          <p:cNvPr id="28" name="Shape 24"/>
+          <p:cNvSpPr/>
+          <p:nvPr/>
+        </p:nvSpPr>
+        <p:spPr>
+          <a:xfrm>
+            <a:off x="3639312" y="4114800"/>
+            <a:ext cx="1056626" cy="274320"/>
+          </a:xfrm>
+          <a:prstGeom prst="roundRect">
+            <a:avLst>
+              <a:gd name="adj" fmla="val 50000"/>
+            </a:avLst>
+          </a:prstGeom>
+          <a:solidFill>
+            <a:srgbClr val="E2F6F3"/>
+          </a:solidFill>
+          <a:ln w="12700">
+            <a:solidFill>
+              <a:srgbClr val="E2F6F3"/>
+            </a:solidFill>
+            <a:prstDash val="solid"/>
+          </a:ln>
+        </p:spPr>
+        <p:txBody>
+          <a:bodyPr/>
+          <a:lstStyle/>
+          <a:p>
+            <a:endParaRPr lang="es-ES"/>
+          </a:p>
+        </p:txBody>
+      </p:sp>
+      <p:sp>
+        <p:nvSpPr>
+          <p:cNvPr id="29" name="Text 25"/>
+          <p:cNvSpPr txBox="1"/>
+          <p:nvPr/>
+        </p:nvSpPr>
+        <p:spPr>
+          <a:xfrm>
+            <a:off x="3639312" y="4114800"/>
+            <a:ext cx="1056626" cy="274320"/>
+          </a:xfrm>
+          <a:prstGeom prst="rect">
+            <a:avLst/>
+          </a:prstGeom>
+          <a:noFill/>
+          <a:ln/>
+        </p:spPr>
+        <p:txBody>
+          <a:bodyPr wrap="square" lIns="0" tIns="0" rIns="0" bIns="0" rtlCol="0" anchor="ctr"/>
+          <a:lstStyle/>
+          <a:p>
+            <a:pPr marL="0" indent="0" algn="ctr">
+              <a:buNone/>
+            </a:pPr>
+            <a:r>
+              <a:rPr lang="en-US" sz="1050" b="1" dirty="0">
+                <a:solidFill>
+                  <a:srgbClr val="0F9D8A"/>
+                </a:solidFill>
+                <a:latin typeface="Calibri" pitchFamily="34" charset="0"/>
+                <a:ea typeface="Calibri" pitchFamily="34" charset="-122"/>
+                <a:cs typeface="Calibri" pitchFamily="34" charset="-120"/>
+              </a:rPr>
+              <a:t>Autoasignación</a:t>
+            </a:r>
+            <a:endParaRPr lang="en-US" sz="1050" dirty="0"/>
+          </a:p>
+        </p:txBody>
+      </p:sp>
+      <p:sp>
+        <p:nvSpPr>
+          <p:cNvPr id="30" name="Shape 26"/>
+          <p:cNvSpPr/>
+          <p:nvPr/>
+        </p:nvSpPr>
+        <p:spPr>
+          <a:xfrm>
+            <a:off x="4769090" y="4114800"/>
+            <a:ext cx="1119603" cy="274320"/>
+          </a:xfrm>
+          <a:prstGeom prst="roundRect">
+            <a:avLst>
+              <a:gd name="adj" fmla="val 50000"/>
+            </a:avLst>
+          </a:prstGeom>
+          <a:solidFill>
+            <a:srgbClr val="E2F6F3"/>
+          </a:solidFill>
+          <a:ln w="12700">
+            <a:solidFill>
+              <a:srgbClr val="E2F6F3"/>
+            </a:solidFill>
+            <a:prstDash val="solid"/>
+          </a:ln>
+        </p:spPr>
+        <p:txBody>
+          <a:bodyPr/>
+          <a:lstStyle/>
+          <a:p>
+            <a:endParaRPr lang="es-ES"/>
+          </a:p>
+        </p:txBody>
+      </p:sp>
+      <p:sp>
+        <p:nvSpPr>
+          <p:cNvPr id="31" name="Text 27"/>
+          <p:cNvSpPr txBox="1"/>
+          <p:nvPr/>
+        </p:nvSpPr>
+        <p:spPr>
+          <a:xfrm>
+            <a:off x="4769090" y="4114800"/>
+            <a:ext cx="1119603" cy="274320"/>
+          </a:xfrm>
+          <a:prstGeom prst="rect">
+            <a:avLst/>
+          </a:prstGeom>
+          <a:noFill/>
+          <a:ln/>
+        </p:spPr>
+        <p:txBody>
+          <a:bodyPr wrap="square" lIns="0" tIns="0" rIns="0" bIns="0" rtlCol="0" anchor="ctr"/>
+          <a:lstStyle/>
+          <a:p>
+            <a:pPr marL="0" indent="0" algn="ctr">
+              <a:buNone/>
+            </a:pPr>
+            <a:r>
+              <a:rPr lang="en-US" sz="1050" b="1" dirty="0">
+                <a:solidFill>
+                  <a:srgbClr val="0F9D8A"/>
+                </a:solidFill>
+                <a:latin typeface="Calibri" pitchFamily="34" charset="0"/>
+                <a:ea typeface="Calibri" pitchFamily="34" charset="-122"/>
+                <a:cs typeface="Calibri" pitchFamily="34" charset="-120"/>
+              </a:rPr>
+              <a:t>Responsabilidad</a:t>
+            </a:r>
+            <a:endParaRPr lang="en-US" sz="1050" dirty="0"/>
+          </a:p>
+        </p:txBody>
+      </p:sp>
+      <p:sp>
+        <p:nvSpPr>
+          <p:cNvPr id="32" name="Shape 28"/>
+          <p:cNvSpPr/>
+          <p:nvPr/>
+        </p:nvSpPr>
+        <p:spPr>
+          <a:xfrm>
+            <a:off x="5961845" y="4114800"/>
+            <a:ext cx="804715" cy="274320"/>
+          </a:xfrm>
+          <a:prstGeom prst="roundRect">
+            <a:avLst>
+              <a:gd name="adj" fmla="val 50000"/>
+            </a:avLst>
+          </a:prstGeom>
+          <a:solidFill>
+            <a:srgbClr val="E2F6F3"/>
+          </a:solidFill>
+          <a:ln w="12700">
+            <a:solidFill>
+              <a:srgbClr val="E2F6F3"/>
+            </a:solidFill>
+            <a:prstDash val="solid"/>
+          </a:ln>
+        </p:spPr>
+        <p:txBody>
+          <a:bodyPr/>
+          <a:lstStyle/>
+          <a:p>
+            <a:endParaRPr lang="es-ES"/>
+          </a:p>
+        </p:txBody>
+      </p:sp>
+      <p:sp>
+        <p:nvSpPr>
+          <p:cNvPr id="33" name="Text 29"/>
+          <p:cNvSpPr txBox="1"/>
+          <p:nvPr/>
+        </p:nvSpPr>
+        <p:spPr>
+          <a:xfrm>
+            <a:off x="5961845" y="4114800"/>
+            <a:ext cx="804715" cy="274320"/>
+          </a:xfrm>
+          <a:prstGeom prst="rect">
+            <a:avLst/>
+          </a:prstGeom>
+          <a:noFill/>
+          <a:ln/>
+        </p:spPr>
+        <p:txBody>
+          <a:bodyPr wrap="square" lIns="0" tIns="0" rIns="0" bIns="0" rtlCol="0" anchor="ctr"/>
+          <a:lstStyle/>
+          <a:p>
+            <a:pPr marL="0" indent="0" algn="ctr">
+              <a:buNone/>
+            </a:pPr>
+            <a:r>
+              <a:rPr lang="en-US" sz="1050" b="1" dirty="0">
+                <a:solidFill>
+                  <a:srgbClr val="0F9D8A"/>
+                </a:solidFill>
+                <a:latin typeface="Calibri" pitchFamily="34" charset="0"/>
+                <a:ea typeface="Calibri" pitchFamily="34" charset="-122"/>
+                <a:cs typeface="Calibri" pitchFamily="34" charset="-120"/>
+              </a:rPr>
+              <a:t>Iniciativa</a:t>
+            </a:r>
+            <a:endParaRPr lang="en-US" sz="1050" dirty="0"/>
+          </a:p>
+        </p:txBody>
+      </p:sp>
+      <p:sp>
+        <p:nvSpPr>
+          <p:cNvPr id="34" name="Shape 30"/>
+          <p:cNvSpPr/>
+          <p:nvPr/>
+        </p:nvSpPr>
+        <p:spPr>
+          <a:xfrm>
+            <a:off x="7086600" y="3063240"/>
+            <a:ext cx="4526280" cy="1463040"/>
+          </a:xfrm>
+          <a:prstGeom prst="roundRect">
+            <a:avLst>
+              <a:gd name="adj" fmla="val 7500"/>
+            </a:avLst>
+          </a:prstGeom>
+          <a:solidFill>
+            <a:srgbClr val="E2F6F3"/>
+          </a:solidFill>
+          <a:ln w="12700">
+            <a:solidFill>
+              <a:srgbClr val="E2F6F3"/>
+            </a:solidFill>
+            <a:prstDash val="solid"/>
+          </a:ln>
+        </p:spPr>
+        <p:txBody>
+          <a:bodyPr/>
+          <a:lstStyle/>
+          <a:p>
+            <a:endParaRPr lang="es-ES"/>
+          </a:p>
+        </p:txBody>
+      </p:sp>
+      <p:sp>
+        <p:nvSpPr>
+          <p:cNvPr id="35" name="Text 31"/>
+          <p:cNvSpPr txBox="1"/>
+          <p:nvPr/>
+        </p:nvSpPr>
+        <p:spPr>
+          <a:xfrm>
+            <a:off x="7269480" y="3172968"/>
+            <a:ext cx="4206240" cy="1243584"/>
+          </a:xfrm>
+          <a:prstGeom prst="rect">
+            <a:avLst/>
+          </a:prstGeom>
+          <a:noFill/>
+          <a:ln/>
+        </p:spPr>
+        <p:txBody>
+          <a:bodyPr wrap="square" lIns="0" tIns="0" rIns="0" bIns="0" rtlCol="0" anchor="ctr"/>
+          <a:lstStyle/>
+          <a:p>
+            <a:pPr marL="0" indent="0">
+              <a:buNone/>
+            </a:pPr>
+            <a:r>
+              <a:rPr lang="es-ES" sz="1250">
+                <a:solidFill>
+                  <a:srgbClr val="0F1B2D"/>
+                </a:solidFill>
+                <a:latin typeface="Calibri" pitchFamily="34" charset="0"/>
+                <a:ea typeface="Calibri" pitchFamily="34" charset="-122"/>
+                <a:cs typeface="Calibri" pitchFamily="34" charset="-120"/>
+              </a:rPr>
+              <a:t>En la planificación, Luis toma las historias de YOLOv8 y ConvLSTM (EP02–EP04) y Anthony las de interfaz y alertas (EP05). Si alguien termina antes, toma la siguiente historia del tablero sin esperar órdenes.</a:t>
+            </a:r>
+            <a:endParaRPr lang="en-US" sz="1250" dirty="0"/>
+          </a:p>
+        </p:txBody>
+      </p:sp>
+      <p:sp>
+        <p:nvSpPr>
+          <p:cNvPr id="36" name="Shape 32"/>
+          <p:cNvSpPr/>
+          <p:nvPr/>
+        </p:nvSpPr>
+        <p:spPr>
+          <a:xfrm>
+            <a:off x="548640" y="4663440"/>
+            <a:ext cx="2743200" cy="1463040"/>
+          </a:xfrm>
+          <a:prstGeom prst="roundRect">
+            <a:avLst>
+              <a:gd name="adj" fmla="val 7500"/>
+            </a:avLst>
+          </a:prstGeom>
+          <a:solidFill>
+            <a:srgbClr val="5B4BDB"/>
+          </a:solidFill>
+          <a:ln w="12700">
+            <a:solidFill>
+              <a:srgbClr val="5B4BDB"/>
+            </a:solidFill>
+            <a:prstDash val="solid"/>
+          </a:ln>
+        </p:spPr>
+        <p:txBody>
+          <a:bodyPr/>
+          <a:lstStyle/>
+          <a:p>
+            <a:endParaRPr lang="es-ES"/>
+          </a:p>
+        </p:txBody>
+      </p:sp>
+      <p:sp>
+        <p:nvSpPr>
+          <p:cNvPr id="37" name="Shape 33"/>
+          <p:cNvSpPr/>
+          <p:nvPr/>
+        </p:nvSpPr>
+        <p:spPr>
+          <a:xfrm>
+            <a:off x="731520" y="4864608"/>
+            <a:ext cx="685800" cy="685800"/>
+          </a:xfrm>
+          <a:prstGeom prst="ellipse">
+            <a:avLst/>
+          </a:prstGeom>
+          <a:solidFill>
+            <a:srgbClr val="FFFFFF"/>
+          </a:solidFill>
+          <a:ln w="12700">
+            <a:solidFill>
+              <a:srgbClr val="FFFFFF"/>
+            </a:solidFill>
+            <a:prstDash val="solid"/>
+          </a:ln>
+        </p:spPr>
+        <p:txBody>
+          <a:bodyPr/>
+          <a:lstStyle/>
+          <a:p>
+            <a:endParaRPr lang="es-ES"/>
+          </a:p>
+        </p:txBody>
+      </p:sp>
+      <p:pic>
+        <p:nvPicPr>
+          <p:cNvPr id="38" name="Image 2" descr="preencoded.png"/>
+          <p:cNvPicPr>
+            <a:picLocks noChangeAspect="1"/>
+          </p:cNvPicPr>
+          <p:nvPr/>
+        </p:nvPicPr>
+        <p:blipFill>
+          <a:blip r:embed="rId5"/>
+          <a:stretch>
+            <a:fillRect/>
+          </a:stretch>
+        </p:blipFill>
+        <p:spPr>
+          <a:xfrm>
+            <a:off x="886968" y="5020056"/>
+            <a:ext cx="374904" cy="374904"/>
+          </a:xfrm>
+          <a:prstGeom prst="rect">
+            <a:avLst/>
+          </a:prstGeom>
+        </p:spPr>
+      </p:pic>
+      <p:sp>
+        <p:nvSpPr>
+          <p:cNvPr id="39" name="Text 34"/>
+          <p:cNvSpPr txBox="1"/>
+          <p:nvPr/>
+        </p:nvSpPr>
+        <p:spPr>
+          <a:xfrm>
+            <a:off x="2788920" y="4773168"/>
+            <a:ext cx="365760" cy="320040"/>
+          </a:xfrm>
+          <a:prstGeom prst="rect">
+            <a:avLst/>
+          </a:prstGeom>
+          <a:noFill/>
+          <a:ln/>
+        </p:spPr>
+        <p:txBody>
+          <a:bodyPr wrap="square" lIns="0" tIns="0" rIns="0" bIns="0" rtlCol="0" anchor="ctr"/>
+          <a:lstStyle/>
+          <a:p>
+            <a:pPr marL="0" indent="0" algn="r">
+              <a:buNone/>
+            </a:pPr>
+            <a:r>
+              <a:rPr lang="en-US" sz="1400" b="1" dirty="0">
+                <a:solidFill>
+                  <a:srgbClr val="FFFFFF"/>
+                </a:solidFill>
+                <a:latin typeface="Calibri" pitchFamily="34" charset="0"/>
+                <a:ea typeface="Calibri" pitchFamily="34" charset="-122"/>
+                <a:cs typeface="Calibri" pitchFamily="34" charset="-120"/>
+              </a:rPr>
+              <a:t>3</a:t>
+            </a:r>
+            <a:endParaRPr lang="en-US" sz="1400" dirty="0"/>
+          </a:p>
+        </p:txBody>
+      </p:sp>
+      <p:sp>
+        <p:nvSpPr>
+          <p:cNvPr id="40" name="Text 35"/>
+          <p:cNvSpPr txBox="1"/>
+          <p:nvPr/>
+        </p:nvSpPr>
+        <p:spPr>
+          <a:xfrm>
+            <a:off x="731520" y="5577840"/>
+            <a:ext cx="2468880" cy="502920"/>
+          </a:xfrm>
+          <a:prstGeom prst="rect">
+            <a:avLst/>
+          </a:prstGeom>
+          <a:noFill/>
+          <a:ln/>
+        </p:spPr>
+        <p:txBody>
+          <a:bodyPr wrap="square" lIns="0" tIns="0" rIns="0" bIns="0" rtlCol="0" anchor="t"/>
+          <a:lstStyle/>
+          <a:p>
+            <a:pPr marL="0" indent="0">
+              <a:buNone/>
+            </a:pPr>
+            <a:r>
+              <a:rPr lang="en-US" sz="1500" b="1" dirty="0">
+                <a:solidFill>
+                  <a:srgbClr val="FFFFFF"/>
+                </a:solidFill>
+                <a:latin typeface="Calibri" pitchFamily="34" charset="0"/>
+                <a:ea typeface="Calibri" pitchFamily="34" charset="-122"/>
+                <a:cs typeface="Calibri" pitchFamily="34" charset="-120"/>
+              </a:rPr>
+              <a:t>Colaboración</a:t>
+            </a:r>
+            <a:endParaRPr lang="en-US" sz="1500" dirty="0"/>
+          </a:p>
+        </p:txBody>
+      </p:sp>
+      <p:sp>
+        <p:nvSpPr>
+          <p:cNvPr id="41" name="Shape 36"/>
+          <p:cNvSpPr/>
+          <p:nvPr/>
+        </p:nvSpPr>
+        <p:spPr>
+          <a:xfrm>
+            <a:off x="3474720" y="4663440"/>
+            <a:ext cx="3429000" cy="1463040"/>
+          </a:xfrm>
+          <a:prstGeom prst="roundRect">
+            <a:avLst>
+              <a:gd name="adj" fmla="val 7500"/>
+            </a:avLst>
+          </a:prstGeom>
+          <a:solidFill>
+            <a:srgbClr val="FFFFFF"/>
+          </a:solidFill>
+          <a:ln w="9525">
+            <a:solidFill>
+              <a:srgbClr val="D7DEE9"/>
+            </a:solidFill>
+            <a:prstDash val="solid"/>
+          </a:ln>
+        </p:spPr>
+        <p:txBody>
+          <a:bodyPr/>
+          <a:lstStyle/>
+          <a:p>
+            <a:endParaRPr lang="es-ES"/>
+          </a:p>
+        </p:txBody>
       </p:sp>
       <p:sp>
         <p:nvSpPr>
@@ -3340,7 +3287,7 @@
           <a:bodyPr wrap="square" lIns="0" tIns="0" rIns="0" bIns="0" rtlCol="0" anchor="t"/>
           <a:lstStyle/>
           <a:p>
-            <a:pPr indent="0" marL="0">
+            <a:pPr marL="0" indent="0">
               <a:buNone/>
             </a:pPr>
             <a:r>
@@ -3384,6 +3331,13 @@
             <a:prstDash val="solid"/>
           </a:ln>
         </p:spPr>
+        <p:txBody>
+          <a:bodyPr/>
+          <a:lstStyle/>
+          <a:p>
+            <a:endParaRPr lang="es-ES"/>
+          </a:p>
+        </p:txBody>
       </p:sp>
       <p:sp>
         <p:nvSpPr>
@@ -3406,7 +3360,7 @@
           <a:bodyPr wrap="square" lIns="0" tIns="0" rIns="0" bIns="0" rtlCol="0" anchor="ctr"/>
           <a:lstStyle/>
           <a:p>
-            <a:pPr algn="ctr" indent="0" marL="0">
+            <a:pPr marL="0" indent="0" algn="ctr">
               <a:buNone/>
             </a:pPr>
             <a:r>
@@ -3450,6 +3404,13 @@
             <a:prstDash val="solid"/>
           </a:ln>
         </p:spPr>
+        <p:txBody>
+          <a:bodyPr/>
+          <a:lstStyle/>
+          <a:p>
+            <a:endParaRPr lang="es-ES"/>
+          </a:p>
+        </p:txBody>
       </p:sp>
       <p:sp>
         <p:nvSpPr>
@@ -3472,7 +3433,7 @@
           <a:bodyPr wrap="square" lIns="0" tIns="0" rIns="0" bIns="0" rtlCol="0" anchor="ctr"/>
           <a:lstStyle/>
           <a:p>
-            <a:pPr algn="ctr" indent="0" marL="0">
+            <a:pPr marL="0" indent="0" algn="ctr">
               <a:buNone/>
             </a:pPr>
             <a:r>
@@ -3516,6 +3477,13 @@
             <a:prstDash val="solid"/>
           </a:ln>
         </p:spPr>
+        <p:txBody>
+          <a:bodyPr/>
+          <a:lstStyle/>
+          <a:p>
+            <a:endParaRPr lang="es-ES"/>
+          </a:p>
+        </p:txBody>
       </p:sp>
       <p:sp>
         <p:nvSpPr>
@@ -3538,7 +3506,7 @@
           <a:bodyPr wrap="square" lIns="0" tIns="0" rIns="0" bIns="0" rtlCol="0" anchor="ctr"/>
           <a:lstStyle/>
           <a:p>
-            <a:pPr algn="ctr" indent="0" marL="0">
+            <a:pPr marL="0" indent="0" algn="ctr">
               <a:buNone/>
             </a:pPr>
             <a:r>
@@ -3582,6 +3550,13 @@
             <a:prstDash val="solid"/>
           </a:ln>
         </p:spPr>
+        <p:txBody>
+          <a:bodyPr/>
+          <a:lstStyle/>
+          <a:p>
+            <a:endParaRPr lang="es-ES"/>
+          </a:p>
+        </p:txBody>
       </p:sp>
       <p:sp>
         <p:nvSpPr>
@@ -3604,7 +3579,7 @@
           <a:bodyPr wrap="square" lIns="0" tIns="0" rIns="0" bIns="0" rtlCol="0" anchor="ctr"/>
           <a:lstStyle/>
           <a:p>
-            <a:pPr indent="0" marL="0">
+            <a:pPr marL="0" indent="0">
               <a:buNone/>
             </a:pPr>
             <a:r>
@@ -3624,7 +3599,7 @@
       </p:sp>
       <p:sp>
         <p:nvSpPr>
-          <p:cNvPr id="25" name="Slide Number Placeholder 0"/>
+          <p:cNvPr id="51" name="Slide Number Placeholder 0"/>
           <p:cNvSpPr>
             <a:spLocks noGrp="1"/>
           </p:cNvSpPr>
@@ -3642,7 +3617,7 @@
           </a:prstGeom>
           <a:extLst>
             <a:ext uri="{C572A759-6A51-4108-AA02-DFA0A04FC94B}">
-              <ma14:wrappingTextBoxFlag xmlns:ma14="http://schemas.microsoft.com/office/mac/drawingml/2011/main" val="0"/>
+              <ma14:wrappingTextBoxFlag xmlns:ma14="http://schemas.microsoft.com/office/mac/drawingml/2011/main" xmlns="" val="0"/>
             </a:ext>
           </a:extLst>
         </p:spPr>
@@ -3663,7 +3638,7 @@
           <a:p>
             <a:pPr algn="r"/>
             <a:fld id="{F7021451-1387-4CA6-816F-3879F97B5CBC}" type="slidenum">
-              <a:rPr b="0" lang="en-US"/>
+              <a:rPr lang="en-US" b="0"/>
               <a:t>2</a:t>
             </a:fld>
             <a:endParaRPr lang="en-US"/>
@@ -3698,9 +3673,11 @@
       <p:sp>
         <p:nvSpPr>
           <p:cNvPr id="2" name="Text 0"/>
-          <p:cNvSpPr/>
+          <p:cNvSpPr>
+            <a:spLocks noGrp="1"/>
+          </p:cNvSpPr>
           <p:nvPr>
-            <p:ph idx="100" type="title" hasCustomPrompt="1"/>
+            <p:ph type="title" idx="100" hasCustomPrompt="1"/>
           </p:nvPr>
         </p:nvSpPr>
         <p:spPr>
@@ -3718,7 +3695,7 @@
           <a:bodyPr wrap="square" lIns="0" tIns="0" rIns="0" bIns="0" rtlCol="0" anchor="ctr"/>
           <a:lstStyle/>
           <a:p>
-            <a:pPr algn="l" indent="0" marL="0">
+            <a:pPr marL="0" indent="0" algn="l">
               <a:buNone/>
             </a:pPr>
             <a:r>
@@ -3757,11 +3734,11 @@
           <a:bodyPr wrap="square" lIns="0" tIns="0" rIns="0" bIns="0" rtlCol="0" anchor="ctr"/>
           <a:lstStyle/>
           <a:p>
-            <a:pPr indent="0" marL="0">
-              <a:buNone/>
-            </a:pPr>
-            <a:r>
-              <a:rPr lang="en-US" sz="1100" b="1" spc="100" kern="0" dirty="0">
+            <a:pPr marL="0" indent="0">
+              <a:buNone/>
+            </a:pPr>
+            <a:r>
+              <a:rPr lang="en-US" sz="1100" b="1" kern="0" spc="100" dirty="0">
                 <a:solidFill>
                   <a:srgbClr val="5B6B82"/>
                 </a:solidFill>
@@ -3796,11 +3773,11 @@
           <a:bodyPr wrap="square" lIns="0" tIns="0" rIns="0" bIns="0" rtlCol="0" anchor="ctr"/>
           <a:lstStyle/>
           <a:p>
-            <a:pPr indent="0" marL="0">
-              <a:buNone/>
-            </a:pPr>
-            <a:r>
-              <a:rPr lang="en-US" sz="1100" b="1" spc="100" kern="0" dirty="0">
+            <a:pPr marL="0" indent="0">
+              <a:buNone/>
+            </a:pPr>
+            <a:r>
+              <a:rPr lang="en-US" sz="1100" b="1" kern="0" spc="100" dirty="0">
                 <a:solidFill>
                   <a:srgbClr val="5B6B82"/>
                 </a:solidFill>
@@ -3835,11 +3812,11 @@
           <a:bodyPr wrap="square" lIns="0" tIns="0" rIns="0" bIns="0" rtlCol="0" anchor="ctr"/>
           <a:lstStyle/>
           <a:p>
-            <a:pPr indent="0" marL="0">
-              <a:buNone/>
-            </a:pPr>
-            <a:r>
-              <a:rPr lang="en-US" sz="1100" b="1" spc="100" kern="0" dirty="0">
+            <a:pPr marL="0" indent="0">
+              <a:buNone/>
+            </a:pPr>
+            <a:r>
+              <a:rPr lang="en-US" sz="1100" b="1" kern="0" spc="100" dirty="0">
                 <a:solidFill>
                   <a:srgbClr val="5B6B82"/>
                 </a:solidFill>
@@ -3879,6 +3856,13 @@
             <a:prstDash val="solid"/>
           </a:ln>
         </p:spPr>
+        <p:txBody>
+          <a:bodyPr/>
+          <a:lstStyle/>
+          <a:p>
+            <a:endParaRPr lang="es-ES"/>
+          </a:p>
+        </p:txBody>
       </p:sp>
       <p:sp>
         <p:nvSpPr>
@@ -3904,978 +3888,17 @@
             <a:prstDash val="solid"/>
           </a:ln>
         </p:spPr>
+        <p:txBody>
+          <a:bodyPr/>
+          <a:lstStyle/>
+          <a:p>
+            <a:endParaRPr lang="es-ES"/>
+          </a:p>
+        </p:txBody>
       </p:sp>
       <p:pic>
         <p:nvPicPr>
-          <p:cNvPr id="8" name="Image 0" descr="preencoded.png">    </p:cNvPr>
-          <p:cNvPicPr>
-            <a:picLocks noChangeAspect="1"/>
-          </p:cNvPicPr>
-          <p:nvPr/>
-        </p:nvPicPr>
-        <p:blipFill>
-          <a:blip r:embed="rId1"/>
-          <a:stretch>
-            <a:fillRect/>
-          </a:stretch>
-        </p:blipFill>
-        <p:spPr>
-          <a:xfrm>
-            <a:off x="886968" y="1819656"/>
-            <a:ext cx="374904" cy="374904"/>
-          </a:xfrm>
-          <a:prstGeom prst="rect">
-            <a:avLst/>
-          </a:prstGeom>
-        </p:spPr>
-      </p:pic>
-      <p:sp>
-        <p:nvSpPr>
-          <p:cNvPr id="9" name="Text 6"/>
-          <p:cNvSpPr txBox="1"/>
-          <p:nvPr/>
-        </p:nvSpPr>
-        <p:spPr>
-          <a:xfrm>
-            <a:off x="2788920" y="1572768"/>
-            <a:ext cx="365760" cy="320040"/>
-          </a:xfrm>
-          <a:prstGeom prst="rect">
-            <a:avLst/>
-          </a:prstGeom>
-          <a:noFill/>
-          <a:ln/>
-        </p:spPr>
-        <p:txBody>
-          <a:bodyPr wrap="square" lIns="0" tIns="0" rIns="0" bIns="0" rtlCol="0" anchor="ctr"/>
-          <a:lstStyle/>
-          <a:p>
-            <a:pPr algn="r" indent="0" marL="0">
-              <a:buNone/>
-            </a:pPr>
-            <a:r>
-              <a:rPr lang="en-US" sz="1400" b="1" dirty="0">
-                <a:solidFill>
-                  <a:srgbClr val="FFFFFF"/>
-                </a:solidFill>
-                <a:latin typeface="Calibri" pitchFamily="34" charset="0"/>
-                <a:ea typeface="Calibri" pitchFamily="34" charset="-122"/>
-                <a:cs typeface="Calibri" pitchFamily="34" charset="-120"/>
-              </a:rPr>
-              <a:t>4</a:t>
-            </a:r>
-            <a:endParaRPr lang="en-US" sz="1400" dirty="0"/>
-          </a:p>
-        </p:txBody>
-      </p:sp>
-      <p:sp>
-        <p:nvSpPr>
-          <p:cNvPr id="10" name="Text 7"/>
-          <p:cNvSpPr txBox="1"/>
-          <p:nvPr/>
-        </p:nvSpPr>
-        <p:spPr>
-          <a:xfrm>
-            <a:off x="731520" y="2377440"/>
-            <a:ext cx="2468880" cy="502920"/>
-          </a:xfrm>
-          <a:prstGeom prst="rect">
-            <a:avLst/>
-          </a:prstGeom>
-          <a:noFill/>
-          <a:ln/>
-        </p:spPr>
-        <p:txBody>
-          <a:bodyPr wrap="square" lIns="0" tIns="0" rIns="0" bIns="0" rtlCol="0" anchor="t"/>
-          <a:lstStyle/>
-          <a:p>
-            <a:pPr indent="0" marL="0">
-              <a:buNone/>
-            </a:pPr>
-            <a:r>
-              <a:rPr lang="en-US" sz="1500" b="1" dirty="0">
-                <a:solidFill>
-                  <a:srgbClr val="FFFFFF"/>
-                </a:solidFill>
-                <a:latin typeface="Calibri" pitchFamily="34" charset="0"/>
-                <a:ea typeface="Calibri" pitchFamily="34" charset="-122"/>
-                <a:cs typeface="Calibri" pitchFamily="34" charset="-120"/>
-              </a:rPr>
-              <a:t>Priorización basada en el valor</a:t>
-            </a:r>
-            <a:endParaRPr lang="en-US" sz="1500" dirty="0"/>
-          </a:p>
-        </p:txBody>
-      </p:sp>
-      <p:sp>
-        <p:nvSpPr>
-          <p:cNvPr id="11" name="Shape 8"/>
-          <p:cNvSpPr/>
-          <p:nvPr/>
-        </p:nvSpPr>
-        <p:spPr>
-          <a:xfrm>
-            <a:off x="3474720" y="1463040"/>
-            <a:ext cx="3429000" cy="1463040"/>
-          </a:xfrm>
-          <a:prstGeom prst="roundRect">
-            <a:avLst>
-              <a:gd name="adj" fmla="val 7500"/>
-            </a:avLst>
-          </a:prstGeom>
-          <a:solidFill>
-            <a:srgbClr val="FFFFFF"/>
-          </a:solidFill>
-          <a:ln w="9525">
-            <a:solidFill>
-              <a:srgbClr val="D7DEE9"/>
-            </a:solidFill>
-            <a:prstDash val="solid"/>
-          </a:ln>
-        </p:spPr>
-      </p:sp>
-      <p:sp>
-        <p:nvSpPr>
-          <p:cNvPr id="12" name="Text 9"/>
-          <p:cNvSpPr txBox="1"/>
-          <p:nvPr/>
-        </p:nvSpPr>
-        <p:spPr>
-          <a:xfrm>
-            <a:off x="3639312" y="1572768"/>
-            <a:ext cx="3127248" cy="868680"/>
-          </a:xfrm>
-          <a:prstGeom prst="rect">
-            <a:avLst/>
-          </a:prstGeom>
-          <a:noFill/>
-          <a:ln/>
-        </p:spPr>
-        <p:txBody>
-          <a:bodyPr wrap="square" lIns="0" tIns="0" rIns="0" bIns="0" rtlCol="0" anchor="t"/>
-          <a:lstStyle/>
-          <a:p>
-            <a:pPr indent="0" marL="0">
-              <a:buNone/>
-            </a:pPr>
-            <a:r>
-              <a:rPr lang="en-US" sz="1300" dirty="0">
-                <a:solidFill>
-                  <a:srgbClr val="0F1B2D"/>
-                </a:solidFill>
-                <a:latin typeface="Calibri" pitchFamily="34" charset="0"/>
-                <a:ea typeface="Calibri" pitchFamily="34" charset="-122"/>
-                <a:cs typeface="Calibri" pitchFamily="34" charset="-120"/>
-              </a:rPr>
-              <a:t>Hacer primero lo que más valor aporta, considerando también el riesgo y las dependencias.</a:t>
-            </a:r>
-            <a:endParaRPr lang="en-US" sz="1300" dirty="0"/>
-          </a:p>
-        </p:txBody>
-      </p:sp>
-      <p:sp>
-        <p:nvSpPr>
-          <p:cNvPr id="13" name="Shape 10"/>
-          <p:cNvSpPr/>
-          <p:nvPr/>
-        </p:nvSpPr>
-        <p:spPr>
-          <a:xfrm>
-            <a:off x="3639312" y="2514600"/>
-            <a:ext cx="512064" cy="274320"/>
-          </a:xfrm>
-          <a:prstGeom prst="roundRect">
-            <a:avLst>
-              <a:gd name="adj" fmla="val 50000"/>
-            </a:avLst>
-          </a:prstGeom>
-          <a:solidFill>
-            <a:srgbClr val="FFF4DC"/>
-          </a:solidFill>
-          <a:ln w="12700">
-            <a:solidFill>
-              <a:srgbClr val="FFF4DC"/>
-            </a:solidFill>
-            <a:prstDash val="solid"/>
-          </a:ln>
-        </p:spPr>
-      </p:sp>
-      <p:sp>
-        <p:nvSpPr>
-          <p:cNvPr id="14" name="Text 11"/>
-          <p:cNvSpPr txBox="1"/>
-          <p:nvPr/>
-        </p:nvSpPr>
-        <p:spPr>
-          <a:xfrm>
-            <a:off x="3639312" y="2514600"/>
-            <a:ext cx="512064" cy="274320"/>
-          </a:xfrm>
-          <a:prstGeom prst="rect">
-            <a:avLst/>
-          </a:prstGeom>
-          <a:noFill/>
-          <a:ln/>
-        </p:spPr>
-        <p:txBody>
-          <a:bodyPr wrap="square" lIns="0" tIns="0" rIns="0" bIns="0" rtlCol="0" anchor="ctr"/>
-          <a:lstStyle/>
-          <a:p>
-            <a:pPr algn="ctr" indent="0" marL="0">
-              <a:buNone/>
-            </a:pPr>
-            <a:r>
-              <a:rPr lang="en-US" sz="1050" b="1" dirty="0">
-                <a:solidFill>
-                  <a:srgbClr val="8A5A00"/>
-                </a:solidFill>
-                <a:latin typeface="Calibri" pitchFamily="34" charset="0"/>
-                <a:ea typeface="Calibri" pitchFamily="34" charset="-122"/>
-                <a:cs typeface="Calibri" pitchFamily="34" charset="-120"/>
-              </a:rPr>
-              <a:t>Valor</a:t>
-            </a:r>
-            <a:endParaRPr lang="en-US" sz="1050" dirty="0"/>
-          </a:p>
-        </p:txBody>
-      </p:sp>
-      <p:sp>
-        <p:nvSpPr>
-          <p:cNvPr id="15" name="Shape 12"/>
-          <p:cNvSpPr/>
-          <p:nvPr/>
-        </p:nvSpPr>
-        <p:spPr>
-          <a:xfrm>
-            <a:off x="4224528" y="2514600"/>
-            <a:ext cx="577901" cy="274320"/>
-          </a:xfrm>
-          <a:prstGeom prst="roundRect">
-            <a:avLst>
-              <a:gd name="adj" fmla="val 50000"/>
-            </a:avLst>
-          </a:prstGeom>
-          <a:solidFill>
-            <a:srgbClr val="FFF4DC"/>
-          </a:solidFill>
-          <a:ln w="12700">
-            <a:solidFill>
-              <a:srgbClr val="FFF4DC"/>
-            </a:solidFill>
-            <a:prstDash val="solid"/>
-          </a:ln>
-        </p:spPr>
-      </p:sp>
-      <p:sp>
-        <p:nvSpPr>
-          <p:cNvPr id="16" name="Text 13"/>
-          <p:cNvSpPr txBox="1"/>
-          <p:nvPr/>
-        </p:nvSpPr>
-        <p:spPr>
-          <a:xfrm>
-            <a:off x="4224528" y="2514600"/>
-            <a:ext cx="577901" cy="274320"/>
-          </a:xfrm>
-          <a:prstGeom prst="rect">
-            <a:avLst/>
-          </a:prstGeom>
-          <a:noFill/>
-          <a:ln/>
-        </p:spPr>
-        <p:txBody>
-          <a:bodyPr wrap="square" lIns="0" tIns="0" rIns="0" bIns="0" rtlCol="0" anchor="ctr"/>
-          <a:lstStyle/>
-          <a:p>
-            <a:pPr algn="ctr" indent="0" marL="0">
-              <a:buNone/>
-            </a:pPr>
-            <a:r>
-              <a:rPr lang="en-US" sz="1050" b="1" dirty="0">
-                <a:solidFill>
-                  <a:srgbClr val="8A5A00"/>
-                </a:solidFill>
-                <a:latin typeface="Calibri" pitchFamily="34" charset="0"/>
-                <a:ea typeface="Calibri" pitchFamily="34" charset="-122"/>
-                <a:cs typeface="Calibri" pitchFamily="34" charset="-120"/>
-              </a:rPr>
-              <a:t>Riesgo</a:t>
-            </a:r>
-            <a:endParaRPr lang="en-US" sz="1050" dirty="0"/>
-          </a:p>
-        </p:txBody>
-      </p:sp>
-      <p:sp>
-        <p:nvSpPr>
-          <p:cNvPr id="17" name="Shape 14"/>
-          <p:cNvSpPr/>
-          <p:nvPr/>
-        </p:nvSpPr>
-        <p:spPr>
-          <a:xfrm>
-            <a:off x="4875581" y="2514600"/>
-            <a:ext cx="972922" cy="274320"/>
-          </a:xfrm>
-          <a:prstGeom prst="roundRect">
-            <a:avLst>
-              <a:gd name="adj" fmla="val 50000"/>
-            </a:avLst>
-          </a:prstGeom>
-          <a:solidFill>
-            <a:srgbClr val="FFF4DC"/>
-          </a:solidFill>
-          <a:ln w="12700">
-            <a:solidFill>
-              <a:srgbClr val="FFF4DC"/>
-            </a:solidFill>
-            <a:prstDash val="solid"/>
-          </a:ln>
-        </p:spPr>
-      </p:sp>
-      <p:sp>
-        <p:nvSpPr>
-          <p:cNvPr id="18" name="Text 15"/>
-          <p:cNvSpPr txBox="1"/>
-          <p:nvPr/>
-        </p:nvSpPr>
-        <p:spPr>
-          <a:xfrm>
-            <a:off x="4875581" y="2514600"/>
-            <a:ext cx="972922" cy="274320"/>
-          </a:xfrm>
-          <a:prstGeom prst="rect">
-            <a:avLst/>
-          </a:prstGeom>
-          <a:noFill/>
-          <a:ln/>
-        </p:spPr>
-        <p:txBody>
-          <a:bodyPr wrap="square" lIns="0" tIns="0" rIns="0" bIns="0" rtlCol="0" anchor="ctr"/>
-          <a:lstStyle/>
-          <a:p>
-            <a:pPr algn="ctr" indent="0" marL="0">
-              <a:buNone/>
-            </a:pPr>
-            <a:r>
-              <a:rPr lang="en-US" sz="1050" b="1" dirty="0">
-                <a:solidFill>
-                  <a:srgbClr val="8A5A00"/>
-                </a:solidFill>
-                <a:latin typeface="Calibri" pitchFamily="34" charset="0"/>
-                <a:ea typeface="Calibri" pitchFamily="34" charset="-122"/>
-                <a:cs typeface="Calibri" pitchFamily="34" charset="-120"/>
-              </a:rPr>
-              <a:t>Dependencias</a:t>
-            </a:r>
-            <a:endParaRPr lang="en-US" sz="1050" dirty="0"/>
-          </a:p>
-        </p:txBody>
-      </p:sp>
-      <p:sp>
-        <p:nvSpPr>
-          <p:cNvPr id="19" name="Shape 16"/>
-          <p:cNvSpPr/>
-          <p:nvPr/>
-        </p:nvSpPr>
-        <p:spPr>
-          <a:xfrm>
-            <a:off x="7086600" y="1463040"/>
-            <a:ext cx="4526280" cy="1463040"/>
-          </a:xfrm>
-          <a:prstGeom prst="roundRect">
-            <a:avLst>
-              <a:gd name="adj" fmla="val 7500"/>
-            </a:avLst>
-          </a:prstGeom>
-          <a:solidFill>
-            <a:srgbClr val="FFF4DC"/>
-          </a:solidFill>
-          <a:ln w="12700">
-            <a:solidFill>
-              <a:srgbClr val="FFF4DC"/>
-            </a:solidFill>
-            <a:prstDash val="solid"/>
-          </a:ln>
-        </p:spPr>
-      </p:sp>
-      <p:sp>
-        <p:nvSpPr>
-          <p:cNvPr id="20" name="Text 17"/>
-          <p:cNvSpPr txBox="1"/>
-          <p:nvPr/>
-        </p:nvSpPr>
-        <p:spPr>
-          <a:xfrm>
-            <a:off x="7269480" y="1572768"/>
-            <a:ext cx="4206240" cy="1243584"/>
-          </a:xfrm>
-          <a:prstGeom prst="rect">
-            <a:avLst/>
-          </a:prstGeom>
-          <a:noFill/>
-          <a:ln/>
-        </p:spPr>
-        <p:txBody>
-          <a:bodyPr wrap="square" lIns="0" tIns="0" rIns="0" bIns="0" rtlCol="0" anchor="ctr"/>
-          <a:lstStyle/>
-          <a:p>
-            <a:pPr indent="0" marL="0">
-              <a:buNone/>
-            </a:pPr>
-            <a:r>
-              <a:rPr lang="en-US" sz="1250" dirty="0">
-                <a:solidFill>
-                  <a:srgbClr val="0F1B2D"/>
-                </a:solidFill>
-                <a:latin typeface="Calibri" pitchFamily="34" charset="0"/>
-                <a:ea typeface="Calibri" pitchFamily="34" charset="-122"/>
-                <a:cs typeface="Calibri" pitchFamily="34" charset="-120"/>
-              </a:rPr>
-              <a:t>EP01 (cargar el video) va primero porque todo depende de ella. EP04 (ConvLSTM) tiene mucho valor y riesgo: se aborda en el Sprint 3 con el pipeline listo. EP06 (administración) queda al final.</a:t>
-            </a:r>
-            <a:endParaRPr lang="en-US" sz="1250" dirty="0"/>
-          </a:p>
-        </p:txBody>
-      </p:sp>
-      <p:sp>
-        <p:nvSpPr>
-          <p:cNvPr id="21" name="Shape 18"/>
-          <p:cNvSpPr/>
-          <p:nvPr/>
-        </p:nvSpPr>
-        <p:spPr>
-          <a:xfrm>
-            <a:off x="548640" y="3063240"/>
-            <a:ext cx="2743200" cy="1463040"/>
-          </a:xfrm>
-          <a:prstGeom prst="roundRect">
-            <a:avLst>
-              <a:gd name="adj" fmla="val 7500"/>
-            </a:avLst>
-          </a:prstGeom>
-          <a:solidFill>
-            <a:srgbClr val="E0483E"/>
-          </a:solidFill>
-          <a:ln w="12700">
-            <a:solidFill>
-              <a:srgbClr val="E0483E"/>
-            </a:solidFill>
-            <a:prstDash val="solid"/>
-          </a:ln>
-        </p:spPr>
-      </p:sp>
-      <p:sp>
-        <p:nvSpPr>
-          <p:cNvPr id="22" name="Shape 19"/>
-          <p:cNvSpPr/>
-          <p:nvPr/>
-        </p:nvSpPr>
-        <p:spPr>
-          <a:xfrm>
-            <a:off x="731520" y="3264408"/>
-            <a:ext cx="685800" cy="685800"/>
-          </a:xfrm>
-          <a:prstGeom prst="ellipse">
-            <a:avLst/>
-          </a:prstGeom>
-          <a:solidFill>
-            <a:srgbClr val="FFFFFF"/>
-          </a:solidFill>
-          <a:ln w="12700">
-            <a:solidFill>
-              <a:srgbClr val="FFFFFF"/>
-            </a:solidFill>
-            <a:prstDash val="solid"/>
-          </a:ln>
-        </p:spPr>
-      </p:sp>
-      <p:pic>
-        <p:nvPicPr>
-          <p:cNvPr id="23" name="Image 1" descr="preencoded.png">    </p:cNvPr>
-          <p:cNvPicPr>
-            <a:picLocks noChangeAspect="1"/>
-          </p:cNvPicPr>
-          <p:nvPr/>
-        </p:nvPicPr>
-        <p:blipFill>
-          <a:blip r:embed="rId2"/>
-          <a:stretch>
-            <a:fillRect/>
-          </a:stretch>
-        </p:blipFill>
-        <p:spPr>
-          <a:xfrm>
-            <a:off x="886968" y="3419856"/>
-            <a:ext cx="374904" cy="374904"/>
-          </a:xfrm>
-          <a:prstGeom prst="rect">
-            <a:avLst/>
-          </a:prstGeom>
-        </p:spPr>
-      </p:pic>
-      <p:sp>
-        <p:nvSpPr>
-          <p:cNvPr id="24" name="Text 20"/>
-          <p:cNvSpPr txBox="1"/>
-          <p:nvPr/>
-        </p:nvSpPr>
-        <p:spPr>
-          <a:xfrm>
-            <a:off x="2788920" y="3172968"/>
-            <a:ext cx="365760" cy="320040"/>
-          </a:xfrm>
-          <a:prstGeom prst="rect">
-            <a:avLst/>
-          </a:prstGeom>
-          <a:noFill/>
-          <a:ln/>
-        </p:spPr>
-        <p:txBody>
-          <a:bodyPr wrap="square" lIns="0" tIns="0" rIns="0" bIns="0" rtlCol="0" anchor="ctr"/>
-          <a:lstStyle/>
-          <a:p>
-            <a:pPr algn="r" indent="0" marL="0">
-              <a:buNone/>
-            </a:pPr>
-            <a:r>
-              <a:rPr lang="en-US" sz="1400" b="1" dirty="0">
-                <a:solidFill>
-                  <a:srgbClr val="FFFFFF"/>
-                </a:solidFill>
-                <a:latin typeface="Calibri" pitchFamily="34" charset="0"/>
-                <a:ea typeface="Calibri" pitchFamily="34" charset="-122"/>
-                <a:cs typeface="Calibri" pitchFamily="34" charset="-120"/>
-              </a:rPr>
-              <a:t>5</a:t>
-            </a:r>
-            <a:endParaRPr lang="en-US" sz="1400" dirty="0"/>
-          </a:p>
-        </p:txBody>
-      </p:sp>
-      <p:sp>
-        <p:nvSpPr>
-          <p:cNvPr id="25" name="Text 21"/>
-          <p:cNvSpPr txBox="1"/>
-          <p:nvPr/>
-        </p:nvSpPr>
-        <p:spPr>
-          <a:xfrm>
-            <a:off x="731520" y="3977640"/>
-            <a:ext cx="2468880" cy="502920"/>
-          </a:xfrm>
-          <a:prstGeom prst="rect">
-            <a:avLst/>
-          </a:prstGeom>
-          <a:noFill/>
-          <a:ln/>
-        </p:spPr>
-        <p:txBody>
-          <a:bodyPr wrap="square" lIns="0" tIns="0" rIns="0" bIns="0" rtlCol="0" anchor="t"/>
-          <a:lstStyle/>
-          <a:p>
-            <a:pPr indent="0" marL="0">
-              <a:buNone/>
-            </a:pPr>
-            <a:r>
-              <a:rPr lang="en-US" sz="1500" b="1" dirty="0">
-                <a:solidFill>
-                  <a:srgbClr val="FFFFFF"/>
-                </a:solidFill>
-                <a:latin typeface="Calibri" pitchFamily="34" charset="0"/>
-                <a:ea typeface="Calibri" pitchFamily="34" charset="-122"/>
-                <a:cs typeface="Calibri" pitchFamily="34" charset="-120"/>
-              </a:rPr>
-              <a:t>Time-boxing</a:t>
-            </a:r>
-            <a:endParaRPr lang="en-US" sz="1500" dirty="0"/>
-          </a:p>
-        </p:txBody>
-      </p:sp>
-      <p:sp>
-        <p:nvSpPr>
-          <p:cNvPr id="26" name="Shape 22"/>
-          <p:cNvSpPr/>
-          <p:nvPr/>
-        </p:nvSpPr>
-        <p:spPr>
-          <a:xfrm>
-            <a:off x="3474720" y="3063240"/>
-            <a:ext cx="3429000" cy="1463040"/>
-          </a:xfrm>
-          <a:prstGeom prst="roundRect">
-            <a:avLst>
-              <a:gd name="adj" fmla="val 7500"/>
-            </a:avLst>
-          </a:prstGeom>
-          <a:solidFill>
-            <a:srgbClr val="FFFFFF"/>
-          </a:solidFill>
-          <a:ln w="9525">
-            <a:solidFill>
-              <a:srgbClr val="D7DEE9"/>
-            </a:solidFill>
-            <a:prstDash val="solid"/>
-          </a:ln>
-        </p:spPr>
-      </p:sp>
-      <p:sp>
-        <p:nvSpPr>
-          <p:cNvPr id="27" name="Text 23"/>
-          <p:cNvSpPr txBox="1"/>
-          <p:nvPr/>
-        </p:nvSpPr>
-        <p:spPr>
-          <a:xfrm>
-            <a:off x="3639312" y="3172968"/>
-            <a:ext cx="3127248" cy="868680"/>
-          </a:xfrm>
-          <a:prstGeom prst="rect">
-            <a:avLst/>
-          </a:prstGeom>
-          <a:noFill/>
-          <a:ln/>
-        </p:spPr>
-        <p:txBody>
-          <a:bodyPr wrap="square" lIns="0" tIns="0" rIns="0" bIns="0" rtlCol="0" anchor="t"/>
-          <a:lstStyle/>
-          <a:p>
-            <a:pPr indent="0" marL="0">
-              <a:buNone/>
-            </a:pPr>
-            <a:r>
-              <a:rPr lang="en-US" sz="1300" dirty="0">
-                <a:solidFill>
-                  <a:srgbClr val="0F1B2D"/>
-                </a:solidFill>
-                <a:latin typeface="Calibri" pitchFamily="34" charset="0"/>
-                <a:ea typeface="Calibri" pitchFamily="34" charset="-122"/>
-                <a:cs typeface="Calibri" pitchFamily="34" charset="-120"/>
-              </a:rPr>
-              <a:t>Cada actividad tiene un tiempo fijo que no se excede. Da foco y evita perfeccionar sin fin.</a:t>
-            </a:r>
-            <a:endParaRPr lang="en-US" sz="1300" dirty="0"/>
-          </a:p>
-        </p:txBody>
-      </p:sp>
-      <p:sp>
-        <p:nvSpPr>
-          <p:cNvPr id="28" name="Shape 24"/>
-          <p:cNvSpPr/>
-          <p:nvPr/>
-        </p:nvSpPr>
-        <p:spPr>
-          <a:xfrm>
-            <a:off x="3639312" y="4114800"/>
-            <a:ext cx="907085" cy="274320"/>
-          </a:xfrm>
-          <a:prstGeom prst="roundRect">
-            <a:avLst>
-              <a:gd name="adj" fmla="val 50000"/>
-            </a:avLst>
-          </a:prstGeom>
-          <a:solidFill>
-            <a:srgbClr val="FDE8E6"/>
-          </a:solidFill>
-          <a:ln w="12700">
-            <a:solidFill>
-              <a:srgbClr val="FDE8E6"/>
-            </a:solidFill>
-            <a:prstDash val="solid"/>
-          </a:ln>
-        </p:spPr>
-      </p:sp>
-      <p:sp>
-        <p:nvSpPr>
-          <p:cNvPr id="29" name="Text 25"/>
-          <p:cNvSpPr txBox="1"/>
-          <p:nvPr/>
-        </p:nvSpPr>
-        <p:spPr>
-          <a:xfrm>
-            <a:off x="3639312" y="4114800"/>
-            <a:ext cx="907085" cy="274320"/>
-          </a:xfrm>
-          <a:prstGeom prst="rect">
-            <a:avLst/>
-          </a:prstGeom>
-          <a:noFill/>
-          <a:ln/>
-        </p:spPr>
-        <p:txBody>
-          <a:bodyPr wrap="square" lIns="0" tIns="0" rIns="0" bIns="0" rtlCol="0" anchor="ctr"/>
-          <a:lstStyle/>
-          <a:p>
-            <a:pPr algn="ctr" indent="0" marL="0">
-              <a:buNone/>
-            </a:pPr>
-            <a:r>
-              <a:rPr lang="en-US" sz="1050" b="1" dirty="0">
-                <a:solidFill>
-                  <a:srgbClr val="E0483E"/>
-                </a:solidFill>
-                <a:latin typeface="Calibri" pitchFamily="34" charset="0"/>
-                <a:ea typeface="Calibri" pitchFamily="34" charset="-122"/>
-                <a:cs typeface="Calibri" pitchFamily="34" charset="-120"/>
-              </a:rPr>
-              <a:t>Tiempo fijo</a:t>
-            </a:r>
-            <a:endParaRPr lang="en-US" sz="1050" dirty="0"/>
-          </a:p>
-        </p:txBody>
-      </p:sp>
-      <p:sp>
-        <p:nvSpPr>
-          <p:cNvPr id="30" name="Shape 26"/>
-          <p:cNvSpPr/>
-          <p:nvPr/>
-        </p:nvSpPr>
-        <p:spPr>
-          <a:xfrm>
-            <a:off x="4619549" y="4114800"/>
-            <a:ext cx="446227" cy="274320"/>
-          </a:xfrm>
-          <a:prstGeom prst="roundRect">
-            <a:avLst>
-              <a:gd name="adj" fmla="val 50000"/>
-            </a:avLst>
-          </a:prstGeom>
-          <a:solidFill>
-            <a:srgbClr val="FDE8E6"/>
-          </a:solidFill>
-          <a:ln w="12700">
-            <a:solidFill>
-              <a:srgbClr val="FDE8E6"/>
-            </a:solidFill>
-            <a:prstDash val="solid"/>
-          </a:ln>
-        </p:spPr>
-      </p:sp>
-      <p:sp>
-        <p:nvSpPr>
-          <p:cNvPr id="31" name="Text 27"/>
-          <p:cNvSpPr txBox="1"/>
-          <p:nvPr/>
-        </p:nvSpPr>
-        <p:spPr>
-          <a:xfrm>
-            <a:off x="4619549" y="4114800"/>
-            <a:ext cx="446227" cy="274320"/>
-          </a:xfrm>
-          <a:prstGeom prst="rect">
-            <a:avLst/>
-          </a:prstGeom>
-          <a:noFill/>
-          <a:ln/>
-        </p:spPr>
-        <p:txBody>
-          <a:bodyPr wrap="square" lIns="0" tIns="0" rIns="0" bIns="0" rtlCol="0" anchor="ctr"/>
-          <a:lstStyle/>
-          <a:p>
-            <a:pPr algn="ctr" indent="0" marL="0">
-              <a:buNone/>
-            </a:pPr>
-            <a:r>
-              <a:rPr lang="en-US" sz="1050" b="1" dirty="0">
-                <a:solidFill>
-                  <a:srgbClr val="E0483E"/>
-                </a:solidFill>
-                <a:latin typeface="Calibri" pitchFamily="34" charset="0"/>
-                <a:ea typeface="Calibri" pitchFamily="34" charset="-122"/>
-                <a:cs typeface="Calibri" pitchFamily="34" charset="-120"/>
-              </a:rPr>
-              <a:t>Foco</a:t>
-            </a:r>
-            <a:endParaRPr lang="en-US" sz="1050" dirty="0"/>
-          </a:p>
-        </p:txBody>
-      </p:sp>
-      <p:sp>
-        <p:nvSpPr>
-          <p:cNvPr id="32" name="Shape 28"/>
-          <p:cNvSpPr/>
-          <p:nvPr/>
-        </p:nvSpPr>
-        <p:spPr>
-          <a:xfrm>
-            <a:off x="5138928" y="4114800"/>
-            <a:ext cx="512064" cy="274320"/>
-          </a:xfrm>
-          <a:prstGeom prst="roundRect">
-            <a:avLst>
-              <a:gd name="adj" fmla="val 50000"/>
-            </a:avLst>
-          </a:prstGeom>
-          <a:solidFill>
-            <a:srgbClr val="FDE8E6"/>
-          </a:solidFill>
-          <a:ln w="12700">
-            <a:solidFill>
-              <a:srgbClr val="FDE8E6"/>
-            </a:solidFill>
-            <a:prstDash val="solid"/>
-          </a:ln>
-        </p:spPr>
-      </p:sp>
-      <p:sp>
-        <p:nvSpPr>
-          <p:cNvPr id="33" name="Text 29"/>
-          <p:cNvSpPr txBox="1"/>
-          <p:nvPr/>
-        </p:nvSpPr>
-        <p:spPr>
-          <a:xfrm>
-            <a:off x="5138928" y="4114800"/>
-            <a:ext cx="512064" cy="274320"/>
-          </a:xfrm>
-          <a:prstGeom prst="rect">
-            <a:avLst/>
-          </a:prstGeom>
-          <a:noFill/>
-          <a:ln/>
-        </p:spPr>
-        <p:txBody>
-          <a:bodyPr wrap="square" lIns="0" tIns="0" rIns="0" bIns="0" rtlCol="0" anchor="ctr"/>
-          <a:lstStyle/>
-          <a:p>
-            <a:pPr algn="ctr" indent="0" marL="0">
-              <a:buNone/>
-            </a:pPr>
-            <a:r>
-              <a:rPr lang="en-US" sz="1050" b="1" dirty="0">
-                <a:solidFill>
-                  <a:srgbClr val="E0483E"/>
-                </a:solidFill>
-                <a:latin typeface="Calibri" pitchFamily="34" charset="0"/>
-                <a:ea typeface="Calibri" pitchFamily="34" charset="-122"/>
-                <a:cs typeface="Calibri" pitchFamily="34" charset="-120"/>
-              </a:rPr>
-              <a:t>Ritmo</a:t>
-            </a:r>
-            <a:endParaRPr lang="en-US" sz="1050" dirty="0"/>
-          </a:p>
-        </p:txBody>
-      </p:sp>
-      <p:sp>
-        <p:nvSpPr>
-          <p:cNvPr id="34" name="Shape 30"/>
-          <p:cNvSpPr/>
-          <p:nvPr/>
-        </p:nvSpPr>
-        <p:spPr>
-          <a:xfrm>
-            <a:off x="7086600" y="3063240"/>
-            <a:ext cx="4526280" cy="1463040"/>
-          </a:xfrm>
-          <a:prstGeom prst="roundRect">
-            <a:avLst>
-              <a:gd name="adj" fmla="val 7500"/>
-            </a:avLst>
-          </a:prstGeom>
-          <a:solidFill>
-            <a:srgbClr val="FDE8E6"/>
-          </a:solidFill>
-          <a:ln w="12700">
-            <a:solidFill>
-              <a:srgbClr val="FDE8E6"/>
-            </a:solidFill>
-            <a:prstDash val="solid"/>
-          </a:ln>
-        </p:spPr>
-      </p:sp>
-      <p:sp>
-        <p:nvSpPr>
-          <p:cNvPr id="35" name="Text 31"/>
-          <p:cNvSpPr txBox="1"/>
-          <p:nvPr/>
-        </p:nvSpPr>
-        <p:spPr>
-          <a:xfrm>
-            <a:off x="7269480" y="3172968"/>
-            <a:ext cx="4206240" cy="1243584"/>
-          </a:xfrm>
-          <a:prstGeom prst="rect">
-            <a:avLst/>
-          </a:prstGeom>
-          <a:noFill/>
-          <a:ln/>
-        </p:spPr>
-        <p:txBody>
-          <a:bodyPr wrap="square" lIns="0" tIns="0" rIns="0" bIns="0" rtlCol="0" anchor="ctr"/>
-          <a:lstStyle/>
-          <a:p>
-            <a:pPr indent="0" marL="0">
-              <a:buNone/>
-            </a:pPr>
-            <a:r>
-              <a:rPr lang="en-US" sz="1250" dirty="0">
-                <a:solidFill>
-                  <a:srgbClr val="0F1B2D"/>
-                </a:solidFill>
-                <a:latin typeface="Calibri" pitchFamily="34" charset="0"/>
-                <a:ea typeface="Calibri" pitchFamily="34" charset="-122"/>
-                <a:cs typeface="Calibri" pitchFamily="34" charset="-120"/>
-              </a:rPr>
-              <a:t>4 sprints de 2 semanas (19/10 – 11/12). Daily de 15 minutos. La planificación de cada sprint dura como máximo 4 horas (2 h por semana de sprint), y la revisión y la retrospectiva se hacen al cierre de cada sprint.</a:t>
-            </a:r>
-            <a:endParaRPr lang="en-US" sz="1250" dirty="0"/>
-          </a:p>
-        </p:txBody>
-      </p:sp>
-      <p:sp>
-        <p:nvSpPr>
-          <p:cNvPr id="36" name="Shape 32"/>
-          <p:cNvSpPr/>
-          <p:nvPr/>
-        </p:nvSpPr>
-        <p:spPr>
-          <a:xfrm>
-            <a:off x="548640" y="4663440"/>
-            <a:ext cx="2743200" cy="1463040"/>
-          </a:xfrm>
-          <a:prstGeom prst="roundRect">
-            <a:avLst>
-              <a:gd name="adj" fmla="val 7500"/>
-            </a:avLst>
-          </a:prstGeom>
-          <a:solidFill>
-            <a:srgbClr val="12233F"/>
-          </a:solidFill>
-          <a:ln w="12700">
-            <a:solidFill>
-              <a:srgbClr val="12233F"/>
-            </a:solidFill>
-            <a:prstDash val="solid"/>
-          </a:ln>
-        </p:spPr>
-      </p:sp>
-      <p:sp>
-        <p:nvSpPr>
-          <p:cNvPr id="37" name="Shape 33"/>
-          <p:cNvSpPr/>
-          <p:nvPr/>
-        </p:nvSpPr>
-        <p:spPr>
-          <a:xfrm>
-            <a:off x="731520" y="4864608"/>
-            <a:ext cx="685800" cy="685800"/>
-          </a:xfrm>
-          <a:prstGeom prst="ellipse">
-            <a:avLst/>
-          </a:prstGeom>
-          <a:solidFill>
-            <a:srgbClr val="FFFFFF"/>
-          </a:solidFill>
-          <a:ln w="12700">
-            <a:solidFill>
-              <a:srgbClr val="FFFFFF"/>
-            </a:solidFill>
-            <a:prstDash val="solid"/>
-          </a:ln>
-        </p:spPr>
-      </p:sp>
-      <p:pic>
-        <p:nvPicPr>
-          <p:cNvPr id="38" name="Image 2" descr="preencoded.png">    </p:cNvPr>
+          <p:cNvPr id="8" name="Image 0" descr="preencoded.png"/>
           <p:cNvPicPr>
             <a:picLocks noChangeAspect="1"/>
           </p:cNvPicPr>
@@ -4889,7 +3912,7 @@
         </p:blipFill>
         <p:spPr>
           <a:xfrm>
-            <a:off x="886968" y="5020056"/>
+            <a:off x="886968" y="1819656"/>
             <a:ext cx="374904" cy="374904"/>
           </a:xfrm>
           <a:prstGeom prst="rect">
@@ -4899,13 +3922,13 @@
       </p:pic>
       <p:sp>
         <p:nvSpPr>
-          <p:cNvPr id="39" name="Text 34"/>
+          <p:cNvPr id="9" name="Text 6"/>
           <p:cNvSpPr txBox="1"/>
           <p:nvPr/>
         </p:nvSpPr>
         <p:spPr>
           <a:xfrm>
-            <a:off x="2788920" y="4773168"/>
+            <a:off x="2788920" y="1572768"/>
             <a:ext cx="365760" cy="320040"/>
           </a:xfrm>
           <a:prstGeom prst="rect">
@@ -4918,7 +3941,7 @@
           <a:bodyPr wrap="square" lIns="0" tIns="0" rIns="0" bIns="0" rtlCol="0" anchor="ctr"/>
           <a:lstStyle/>
           <a:p>
-            <a:pPr algn="r" indent="0" marL="0">
+            <a:pPr marL="0" indent="0" algn="r">
               <a:buNone/>
             </a:pPr>
             <a:r>
@@ -4930,7 +3953,7 @@
                 <a:ea typeface="Calibri" pitchFamily="34" charset="-122"/>
                 <a:cs typeface="Calibri" pitchFamily="34" charset="-120"/>
               </a:rPr>
-              <a:t>6</a:t>
+              <a:t>4</a:t>
             </a:r>
             <a:endParaRPr lang="en-US" sz="1400" dirty="0"/>
           </a:p>
@@ -4938,13 +3961,13 @@
       </p:sp>
       <p:sp>
         <p:nvSpPr>
-          <p:cNvPr id="40" name="Text 35"/>
+          <p:cNvPr id="10" name="Text 7"/>
           <p:cNvSpPr txBox="1"/>
           <p:nvPr/>
         </p:nvSpPr>
         <p:spPr>
           <a:xfrm>
-            <a:off x="731520" y="5577840"/>
+            <a:off x="731520" y="2377440"/>
             <a:ext cx="2468880" cy="502920"/>
           </a:xfrm>
           <a:prstGeom prst="rect">
@@ -4957,7 +3980,7 @@
           <a:bodyPr wrap="square" lIns="0" tIns="0" rIns="0" bIns="0" rtlCol="0" anchor="t"/>
           <a:lstStyle/>
           <a:p>
-            <a:pPr indent="0" marL="0">
+            <a:pPr marL="0" indent="0">
               <a:buNone/>
             </a:pPr>
             <a:r>
@@ -4969,7 +3992,7 @@
                 <a:ea typeface="Calibri" pitchFamily="34" charset="-122"/>
                 <a:cs typeface="Calibri" pitchFamily="34" charset="-120"/>
               </a:rPr>
-              <a:t>Desarrollo iterativo</a:t>
+              <a:t>Priorización basada en el valor</a:t>
             </a:r>
             <a:endParaRPr lang="en-US" sz="1500" dirty="0"/>
           </a:p>
@@ -4977,13 +4000,13 @@
       </p:sp>
       <p:sp>
         <p:nvSpPr>
-          <p:cNvPr id="41" name="Shape 36"/>
+          <p:cNvPr id="11" name="Shape 8"/>
           <p:cNvSpPr/>
           <p:nvPr/>
         </p:nvSpPr>
         <p:spPr>
           <a:xfrm>
-            <a:off x="3474720" y="4663440"/>
+            <a:off x="3474720" y="1463040"/>
             <a:ext cx="3429000" cy="1463040"/>
           </a:xfrm>
           <a:prstGeom prst="roundRect">
@@ -5001,6 +4024,1079 @@
             <a:prstDash val="solid"/>
           </a:ln>
         </p:spPr>
+        <p:txBody>
+          <a:bodyPr/>
+          <a:lstStyle/>
+          <a:p>
+            <a:endParaRPr lang="es-ES"/>
+          </a:p>
+        </p:txBody>
+      </p:sp>
+      <p:sp>
+        <p:nvSpPr>
+          <p:cNvPr id="12" name="Text 9"/>
+          <p:cNvSpPr txBox="1"/>
+          <p:nvPr/>
+        </p:nvSpPr>
+        <p:spPr>
+          <a:xfrm>
+            <a:off x="3639312" y="1572768"/>
+            <a:ext cx="3127248" cy="868680"/>
+          </a:xfrm>
+          <a:prstGeom prst="rect">
+            <a:avLst/>
+          </a:prstGeom>
+          <a:noFill/>
+          <a:ln/>
+        </p:spPr>
+        <p:txBody>
+          <a:bodyPr wrap="square" lIns="0" tIns="0" rIns="0" bIns="0" rtlCol="0" anchor="t"/>
+          <a:lstStyle/>
+          <a:p>
+            <a:pPr marL="0" indent="0">
+              <a:buNone/>
+            </a:pPr>
+            <a:r>
+              <a:rPr lang="en-US" sz="1300" dirty="0">
+                <a:solidFill>
+                  <a:srgbClr val="0F1B2D"/>
+                </a:solidFill>
+                <a:latin typeface="Calibri" pitchFamily="34" charset="0"/>
+                <a:ea typeface="Calibri" pitchFamily="34" charset="-122"/>
+                <a:cs typeface="Calibri" pitchFamily="34" charset="-120"/>
+              </a:rPr>
+              <a:t>Hacer primero lo que más valor aporta, considerando también el riesgo y las dependencias.</a:t>
+            </a:r>
+            <a:endParaRPr lang="en-US" sz="1300" dirty="0"/>
+          </a:p>
+        </p:txBody>
+      </p:sp>
+      <p:sp>
+        <p:nvSpPr>
+          <p:cNvPr id="13" name="Shape 10"/>
+          <p:cNvSpPr/>
+          <p:nvPr/>
+        </p:nvSpPr>
+        <p:spPr>
+          <a:xfrm>
+            <a:off x="3639312" y="2514600"/>
+            <a:ext cx="512064" cy="274320"/>
+          </a:xfrm>
+          <a:prstGeom prst="roundRect">
+            <a:avLst>
+              <a:gd name="adj" fmla="val 50000"/>
+            </a:avLst>
+          </a:prstGeom>
+          <a:solidFill>
+            <a:srgbClr val="FFF4DC"/>
+          </a:solidFill>
+          <a:ln w="12700">
+            <a:solidFill>
+              <a:srgbClr val="FFF4DC"/>
+            </a:solidFill>
+            <a:prstDash val="solid"/>
+          </a:ln>
+        </p:spPr>
+        <p:txBody>
+          <a:bodyPr/>
+          <a:lstStyle/>
+          <a:p>
+            <a:endParaRPr lang="es-ES"/>
+          </a:p>
+        </p:txBody>
+      </p:sp>
+      <p:sp>
+        <p:nvSpPr>
+          <p:cNvPr id="14" name="Text 11"/>
+          <p:cNvSpPr txBox="1"/>
+          <p:nvPr/>
+        </p:nvSpPr>
+        <p:spPr>
+          <a:xfrm>
+            <a:off x="3639312" y="2514600"/>
+            <a:ext cx="512064" cy="274320"/>
+          </a:xfrm>
+          <a:prstGeom prst="rect">
+            <a:avLst/>
+          </a:prstGeom>
+          <a:noFill/>
+          <a:ln/>
+        </p:spPr>
+        <p:txBody>
+          <a:bodyPr wrap="square" lIns="0" tIns="0" rIns="0" bIns="0" rtlCol="0" anchor="ctr"/>
+          <a:lstStyle/>
+          <a:p>
+            <a:pPr marL="0" indent="0" algn="ctr">
+              <a:buNone/>
+            </a:pPr>
+            <a:r>
+              <a:rPr lang="en-US" sz="1050" b="1" dirty="0">
+                <a:solidFill>
+                  <a:srgbClr val="8A5A00"/>
+                </a:solidFill>
+                <a:latin typeface="Calibri" pitchFamily="34" charset="0"/>
+                <a:ea typeface="Calibri" pitchFamily="34" charset="-122"/>
+                <a:cs typeface="Calibri" pitchFamily="34" charset="-120"/>
+              </a:rPr>
+              <a:t>Valor</a:t>
+            </a:r>
+            <a:endParaRPr lang="en-US" sz="1050" dirty="0"/>
+          </a:p>
+        </p:txBody>
+      </p:sp>
+      <p:sp>
+        <p:nvSpPr>
+          <p:cNvPr id="15" name="Shape 12"/>
+          <p:cNvSpPr/>
+          <p:nvPr/>
+        </p:nvSpPr>
+        <p:spPr>
+          <a:xfrm>
+            <a:off x="4224528" y="2514600"/>
+            <a:ext cx="577901" cy="274320"/>
+          </a:xfrm>
+          <a:prstGeom prst="roundRect">
+            <a:avLst>
+              <a:gd name="adj" fmla="val 50000"/>
+            </a:avLst>
+          </a:prstGeom>
+          <a:solidFill>
+            <a:srgbClr val="FFF4DC"/>
+          </a:solidFill>
+          <a:ln w="12700">
+            <a:solidFill>
+              <a:srgbClr val="FFF4DC"/>
+            </a:solidFill>
+            <a:prstDash val="solid"/>
+          </a:ln>
+        </p:spPr>
+        <p:txBody>
+          <a:bodyPr/>
+          <a:lstStyle/>
+          <a:p>
+            <a:endParaRPr lang="es-ES"/>
+          </a:p>
+        </p:txBody>
+      </p:sp>
+      <p:sp>
+        <p:nvSpPr>
+          <p:cNvPr id="16" name="Text 13"/>
+          <p:cNvSpPr txBox="1"/>
+          <p:nvPr/>
+        </p:nvSpPr>
+        <p:spPr>
+          <a:xfrm>
+            <a:off x="4224528" y="2514600"/>
+            <a:ext cx="577901" cy="274320"/>
+          </a:xfrm>
+          <a:prstGeom prst="rect">
+            <a:avLst/>
+          </a:prstGeom>
+          <a:noFill/>
+          <a:ln/>
+        </p:spPr>
+        <p:txBody>
+          <a:bodyPr wrap="square" lIns="0" tIns="0" rIns="0" bIns="0" rtlCol="0" anchor="ctr"/>
+          <a:lstStyle/>
+          <a:p>
+            <a:pPr marL="0" indent="0" algn="ctr">
+              <a:buNone/>
+            </a:pPr>
+            <a:r>
+              <a:rPr lang="en-US" sz="1050" b="1" dirty="0">
+                <a:solidFill>
+                  <a:srgbClr val="8A5A00"/>
+                </a:solidFill>
+                <a:latin typeface="Calibri" pitchFamily="34" charset="0"/>
+                <a:ea typeface="Calibri" pitchFamily="34" charset="-122"/>
+                <a:cs typeface="Calibri" pitchFamily="34" charset="-120"/>
+              </a:rPr>
+              <a:t>Riesgo</a:t>
+            </a:r>
+            <a:endParaRPr lang="en-US" sz="1050" dirty="0"/>
+          </a:p>
+        </p:txBody>
+      </p:sp>
+      <p:sp>
+        <p:nvSpPr>
+          <p:cNvPr id="17" name="Shape 14"/>
+          <p:cNvSpPr/>
+          <p:nvPr/>
+        </p:nvSpPr>
+        <p:spPr>
+          <a:xfrm>
+            <a:off x="4875581" y="2514600"/>
+            <a:ext cx="972922" cy="274320"/>
+          </a:xfrm>
+          <a:prstGeom prst="roundRect">
+            <a:avLst>
+              <a:gd name="adj" fmla="val 50000"/>
+            </a:avLst>
+          </a:prstGeom>
+          <a:solidFill>
+            <a:srgbClr val="FFF4DC"/>
+          </a:solidFill>
+          <a:ln w="12700">
+            <a:solidFill>
+              <a:srgbClr val="FFF4DC"/>
+            </a:solidFill>
+            <a:prstDash val="solid"/>
+          </a:ln>
+        </p:spPr>
+        <p:txBody>
+          <a:bodyPr/>
+          <a:lstStyle/>
+          <a:p>
+            <a:endParaRPr lang="es-ES"/>
+          </a:p>
+        </p:txBody>
+      </p:sp>
+      <p:sp>
+        <p:nvSpPr>
+          <p:cNvPr id="18" name="Text 15"/>
+          <p:cNvSpPr txBox="1"/>
+          <p:nvPr/>
+        </p:nvSpPr>
+        <p:spPr>
+          <a:xfrm>
+            <a:off x="4875581" y="2514600"/>
+            <a:ext cx="972922" cy="274320"/>
+          </a:xfrm>
+          <a:prstGeom prst="rect">
+            <a:avLst/>
+          </a:prstGeom>
+          <a:noFill/>
+          <a:ln/>
+        </p:spPr>
+        <p:txBody>
+          <a:bodyPr wrap="square" lIns="0" tIns="0" rIns="0" bIns="0" rtlCol="0" anchor="ctr"/>
+          <a:lstStyle/>
+          <a:p>
+            <a:pPr marL="0" indent="0" algn="ctr">
+              <a:buNone/>
+            </a:pPr>
+            <a:r>
+              <a:rPr lang="en-US" sz="1050" b="1" dirty="0">
+                <a:solidFill>
+                  <a:srgbClr val="8A5A00"/>
+                </a:solidFill>
+                <a:latin typeface="Calibri" pitchFamily="34" charset="0"/>
+                <a:ea typeface="Calibri" pitchFamily="34" charset="-122"/>
+                <a:cs typeface="Calibri" pitchFamily="34" charset="-120"/>
+              </a:rPr>
+              <a:t>Dependencias</a:t>
+            </a:r>
+            <a:endParaRPr lang="en-US" sz="1050" dirty="0"/>
+          </a:p>
+        </p:txBody>
+      </p:sp>
+      <p:sp>
+        <p:nvSpPr>
+          <p:cNvPr id="19" name="Shape 16"/>
+          <p:cNvSpPr/>
+          <p:nvPr/>
+        </p:nvSpPr>
+        <p:spPr>
+          <a:xfrm>
+            <a:off x="7086600" y="1463040"/>
+            <a:ext cx="4526280" cy="1463040"/>
+          </a:xfrm>
+          <a:prstGeom prst="roundRect">
+            <a:avLst>
+              <a:gd name="adj" fmla="val 7500"/>
+            </a:avLst>
+          </a:prstGeom>
+          <a:solidFill>
+            <a:srgbClr val="FFF4DC"/>
+          </a:solidFill>
+          <a:ln w="12700">
+            <a:solidFill>
+              <a:srgbClr val="FFF4DC"/>
+            </a:solidFill>
+            <a:prstDash val="solid"/>
+          </a:ln>
+        </p:spPr>
+        <p:txBody>
+          <a:bodyPr/>
+          <a:lstStyle/>
+          <a:p>
+            <a:endParaRPr lang="es-ES"/>
+          </a:p>
+        </p:txBody>
+      </p:sp>
+      <p:sp>
+        <p:nvSpPr>
+          <p:cNvPr id="20" name="Text 17"/>
+          <p:cNvSpPr txBox="1"/>
+          <p:nvPr/>
+        </p:nvSpPr>
+        <p:spPr>
+          <a:xfrm>
+            <a:off x="7269480" y="1572768"/>
+            <a:ext cx="4206240" cy="1243584"/>
+          </a:xfrm>
+          <a:prstGeom prst="rect">
+            <a:avLst/>
+          </a:prstGeom>
+          <a:noFill/>
+          <a:ln/>
+        </p:spPr>
+        <p:txBody>
+          <a:bodyPr wrap="square" lIns="0" tIns="0" rIns="0" bIns="0" rtlCol="0" anchor="ctr"/>
+          <a:lstStyle/>
+          <a:p>
+            <a:pPr marL="0" indent="0">
+              <a:buNone/>
+            </a:pPr>
+            <a:r>
+              <a:rPr lang="es-ES" sz="1250">
+                <a:solidFill>
+                  <a:srgbClr val="0F1B2D"/>
+                </a:solidFill>
+                <a:latin typeface="Calibri" pitchFamily="34" charset="0"/>
+                <a:ea typeface="Calibri" pitchFamily="34" charset="-122"/>
+                <a:cs typeface="Calibri" pitchFamily="34" charset="-120"/>
+              </a:rPr>
+              <a:t>EP01 (cargar el video) va primero porque todo depende de ella. EP04 (ConvLSTM) tiene mucho valor y riesgo: se aborda en el Sprint 3 con el pipeline listo. Por necesidad técnica de calibración, HU11 (configurar umbrales) se adelanta al Sprint 2 junto con HU04-HU06.</a:t>
+            </a:r>
+            <a:endParaRPr lang="en-US" sz="1250" dirty="0"/>
+          </a:p>
+        </p:txBody>
+      </p:sp>
+      <p:sp>
+        <p:nvSpPr>
+          <p:cNvPr id="21" name="Shape 18"/>
+          <p:cNvSpPr/>
+          <p:nvPr/>
+        </p:nvSpPr>
+        <p:spPr>
+          <a:xfrm>
+            <a:off x="548640" y="3063240"/>
+            <a:ext cx="2743200" cy="1463040"/>
+          </a:xfrm>
+          <a:prstGeom prst="roundRect">
+            <a:avLst>
+              <a:gd name="adj" fmla="val 7500"/>
+            </a:avLst>
+          </a:prstGeom>
+          <a:solidFill>
+            <a:srgbClr val="E0483E"/>
+          </a:solidFill>
+          <a:ln w="12700">
+            <a:solidFill>
+              <a:srgbClr val="E0483E"/>
+            </a:solidFill>
+            <a:prstDash val="solid"/>
+          </a:ln>
+        </p:spPr>
+        <p:txBody>
+          <a:bodyPr/>
+          <a:lstStyle/>
+          <a:p>
+            <a:endParaRPr lang="es-ES"/>
+          </a:p>
+        </p:txBody>
+      </p:sp>
+      <p:sp>
+        <p:nvSpPr>
+          <p:cNvPr id="22" name="Shape 19"/>
+          <p:cNvSpPr/>
+          <p:nvPr/>
+        </p:nvSpPr>
+        <p:spPr>
+          <a:xfrm>
+            <a:off x="731520" y="3264408"/>
+            <a:ext cx="685800" cy="685800"/>
+          </a:xfrm>
+          <a:prstGeom prst="ellipse">
+            <a:avLst/>
+          </a:prstGeom>
+          <a:solidFill>
+            <a:srgbClr val="FFFFFF"/>
+          </a:solidFill>
+          <a:ln w="12700">
+            <a:solidFill>
+              <a:srgbClr val="FFFFFF"/>
+            </a:solidFill>
+            <a:prstDash val="solid"/>
+          </a:ln>
+        </p:spPr>
+        <p:txBody>
+          <a:bodyPr/>
+          <a:lstStyle/>
+          <a:p>
+            <a:endParaRPr lang="es-ES"/>
+          </a:p>
+        </p:txBody>
+      </p:sp>
+      <p:pic>
+        <p:nvPicPr>
+          <p:cNvPr id="23" name="Image 1" descr="preencoded.png"/>
+          <p:cNvPicPr>
+            <a:picLocks noChangeAspect="1"/>
+          </p:cNvPicPr>
+          <p:nvPr/>
+        </p:nvPicPr>
+        <p:blipFill>
+          <a:blip r:embed="rId4"/>
+          <a:stretch>
+            <a:fillRect/>
+          </a:stretch>
+        </p:blipFill>
+        <p:spPr>
+          <a:xfrm>
+            <a:off x="886968" y="3419856"/>
+            <a:ext cx="374904" cy="374904"/>
+          </a:xfrm>
+          <a:prstGeom prst="rect">
+            <a:avLst/>
+          </a:prstGeom>
+        </p:spPr>
+      </p:pic>
+      <p:sp>
+        <p:nvSpPr>
+          <p:cNvPr id="24" name="Text 20"/>
+          <p:cNvSpPr txBox="1"/>
+          <p:nvPr/>
+        </p:nvSpPr>
+        <p:spPr>
+          <a:xfrm>
+            <a:off x="2788920" y="3172968"/>
+            <a:ext cx="365760" cy="320040"/>
+          </a:xfrm>
+          <a:prstGeom prst="rect">
+            <a:avLst/>
+          </a:prstGeom>
+          <a:noFill/>
+          <a:ln/>
+        </p:spPr>
+        <p:txBody>
+          <a:bodyPr wrap="square" lIns="0" tIns="0" rIns="0" bIns="0" rtlCol="0" anchor="ctr"/>
+          <a:lstStyle/>
+          <a:p>
+            <a:pPr marL="0" indent="0" algn="r">
+              <a:buNone/>
+            </a:pPr>
+            <a:r>
+              <a:rPr lang="en-US" sz="1400" b="1" dirty="0">
+                <a:solidFill>
+                  <a:srgbClr val="FFFFFF"/>
+                </a:solidFill>
+                <a:latin typeface="Calibri" pitchFamily="34" charset="0"/>
+                <a:ea typeface="Calibri" pitchFamily="34" charset="-122"/>
+                <a:cs typeface="Calibri" pitchFamily="34" charset="-120"/>
+              </a:rPr>
+              <a:t>5</a:t>
+            </a:r>
+            <a:endParaRPr lang="en-US" sz="1400" dirty="0"/>
+          </a:p>
+        </p:txBody>
+      </p:sp>
+      <p:sp>
+        <p:nvSpPr>
+          <p:cNvPr id="25" name="Text 21"/>
+          <p:cNvSpPr txBox="1"/>
+          <p:nvPr/>
+        </p:nvSpPr>
+        <p:spPr>
+          <a:xfrm>
+            <a:off x="731520" y="3977640"/>
+            <a:ext cx="2468880" cy="502920"/>
+          </a:xfrm>
+          <a:prstGeom prst="rect">
+            <a:avLst/>
+          </a:prstGeom>
+          <a:noFill/>
+          <a:ln/>
+        </p:spPr>
+        <p:txBody>
+          <a:bodyPr wrap="square" lIns="0" tIns="0" rIns="0" bIns="0" rtlCol="0" anchor="t"/>
+          <a:lstStyle/>
+          <a:p>
+            <a:pPr marL="0" indent="0">
+              <a:buNone/>
+            </a:pPr>
+            <a:r>
+              <a:rPr lang="en-US" sz="1500" b="1" dirty="0">
+                <a:solidFill>
+                  <a:srgbClr val="FFFFFF"/>
+                </a:solidFill>
+                <a:latin typeface="Calibri" pitchFamily="34" charset="0"/>
+                <a:ea typeface="Calibri" pitchFamily="34" charset="-122"/>
+                <a:cs typeface="Calibri" pitchFamily="34" charset="-120"/>
+              </a:rPr>
+              <a:t>Time-boxing</a:t>
+            </a:r>
+            <a:endParaRPr lang="en-US" sz="1500" dirty="0"/>
+          </a:p>
+        </p:txBody>
+      </p:sp>
+      <p:sp>
+        <p:nvSpPr>
+          <p:cNvPr id="26" name="Shape 22"/>
+          <p:cNvSpPr/>
+          <p:nvPr/>
+        </p:nvSpPr>
+        <p:spPr>
+          <a:xfrm>
+            <a:off x="3474720" y="3063240"/>
+            <a:ext cx="3429000" cy="1463040"/>
+          </a:xfrm>
+          <a:prstGeom prst="roundRect">
+            <a:avLst>
+              <a:gd name="adj" fmla="val 7500"/>
+            </a:avLst>
+          </a:prstGeom>
+          <a:solidFill>
+            <a:srgbClr val="FFFFFF"/>
+          </a:solidFill>
+          <a:ln w="9525">
+            <a:solidFill>
+              <a:srgbClr val="D7DEE9"/>
+            </a:solidFill>
+            <a:prstDash val="solid"/>
+          </a:ln>
+        </p:spPr>
+        <p:txBody>
+          <a:bodyPr/>
+          <a:lstStyle/>
+          <a:p>
+            <a:endParaRPr lang="es-ES"/>
+          </a:p>
+        </p:txBody>
+      </p:sp>
+      <p:sp>
+        <p:nvSpPr>
+          <p:cNvPr id="27" name="Text 23"/>
+          <p:cNvSpPr txBox="1"/>
+          <p:nvPr/>
+        </p:nvSpPr>
+        <p:spPr>
+          <a:xfrm>
+            <a:off x="3639312" y="3172968"/>
+            <a:ext cx="3127248" cy="868680"/>
+          </a:xfrm>
+          <a:prstGeom prst="rect">
+            <a:avLst/>
+          </a:prstGeom>
+          <a:noFill/>
+          <a:ln/>
+        </p:spPr>
+        <p:txBody>
+          <a:bodyPr wrap="square" lIns="0" tIns="0" rIns="0" bIns="0" rtlCol="0" anchor="t"/>
+          <a:lstStyle/>
+          <a:p>
+            <a:pPr marL="0" indent="0">
+              <a:buNone/>
+            </a:pPr>
+            <a:r>
+              <a:rPr lang="en-US" sz="1300" dirty="0">
+                <a:solidFill>
+                  <a:srgbClr val="0F1B2D"/>
+                </a:solidFill>
+                <a:latin typeface="Calibri" pitchFamily="34" charset="0"/>
+                <a:ea typeface="Calibri" pitchFamily="34" charset="-122"/>
+                <a:cs typeface="Calibri" pitchFamily="34" charset="-120"/>
+              </a:rPr>
+              <a:t>Cada actividad tiene un tiempo fijo que no se excede. Da foco y evita perfeccionar sin fin.</a:t>
+            </a:r>
+            <a:endParaRPr lang="en-US" sz="1300" dirty="0"/>
+          </a:p>
+        </p:txBody>
+      </p:sp>
+      <p:sp>
+        <p:nvSpPr>
+          <p:cNvPr id="28" name="Shape 24"/>
+          <p:cNvSpPr/>
+          <p:nvPr/>
+        </p:nvSpPr>
+        <p:spPr>
+          <a:xfrm>
+            <a:off x="3639312" y="4114800"/>
+            <a:ext cx="907085" cy="274320"/>
+          </a:xfrm>
+          <a:prstGeom prst="roundRect">
+            <a:avLst>
+              <a:gd name="adj" fmla="val 50000"/>
+            </a:avLst>
+          </a:prstGeom>
+          <a:solidFill>
+            <a:srgbClr val="FDE8E6"/>
+          </a:solidFill>
+          <a:ln w="12700">
+            <a:solidFill>
+              <a:srgbClr val="FDE8E6"/>
+            </a:solidFill>
+            <a:prstDash val="solid"/>
+          </a:ln>
+        </p:spPr>
+        <p:txBody>
+          <a:bodyPr/>
+          <a:lstStyle/>
+          <a:p>
+            <a:endParaRPr lang="es-ES"/>
+          </a:p>
+        </p:txBody>
+      </p:sp>
+      <p:sp>
+        <p:nvSpPr>
+          <p:cNvPr id="29" name="Text 25"/>
+          <p:cNvSpPr txBox="1"/>
+          <p:nvPr/>
+        </p:nvSpPr>
+        <p:spPr>
+          <a:xfrm>
+            <a:off x="3639312" y="4114800"/>
+            <a:ext cx="907085" cy="274320"/>
+          </a:xfrm>
+          <a:prstGeom prst="rect">
+            <a:avLst/>
+          </a:prstGeom>
+          <a:noFill/>
+          <a:ln/>
+        </p:spPr>
+        <p:txBody>
+          <a:bodyPr wrap="square" lIns="0" tIns="0" rIns="0" bIns="0" rtlCol="0" anchor="ctr"/>
+          <a:lstStyle/>
+          <a:p>
+            <a:pPr marL="0" indent="0" algn="ctr">
+              <a:buNone/>
+            </a:pPr>
+            <a:r>
+              <a:rPr lang="en-US" sz="1050" b="1" dirty="0">
+                <a:solidFill>
+                  <a:srgbClr val="E0483E"/>
+                </a:solidFill>
+                <a:latin typeface="Calibri" pitchFamily="34" charset="0"/>
+                <a:ea typeface="Calibri" pitchFamily="34" charset="-122"/>
+                <a:cs typeface="Calibri" pitchFamily="34" charset="-120"/>
+              </a:rPr>
+              <a:t>Tiempo fijo</a:t>
+            </a:r>
+            <a:endParaRPr lang="en-US" sz="1050" dirty="0"/>
+          </a:p>
+        </p:txBody>
+      </p:sp>
+      <p:sp>
+        <p:nvSpPr>
+          <p:cNvPr id="30" name="Shape 26"/>
+          <p:cNvSpPr/>
+          <p:nvPr/>
+        </p:nvSpPr>
+        <p:spPr>
+          <a:xfrm>
+            <a:off x="4619549" y="4114800"/>
+            <a:ext cx="446227" cy="274320"/>
+          </a:xfrm>
+          <a:prstGeom prst="roundRect">
+            <a:avLst>
+              <a:gd name="adj" fmla="val 50000"/>
+            </a:avLst>
+          </a:prstGeom>
+          <a:solidFill>
+            <a:srgbClr val="FDE8E6"/>
+          </a:solidFill>
+          <a:ln w="12700">
+            <a:solidFill>
+              <a:srgbClr val="FDE8E6"/>
+            </a:solidFill>
+            <a:prstDash val="solid"/>
+          </a:ln>
+        </p:spPr>
+        <p:txBody>
+          <a:bodyPr/>
+          <a:lstStyle/>
+          <a:p>
+            <a:endParaRPr lang="es-ES"/>
+          </a:p>
+        </p:txBody>
+      </p:sp>
+      <p:sp>
+        <p:nvSpPr>
+          <p:cNvPr id="31" name="Text 27"/>
+          <p:cNvSpPr txBox="1"/>
+          <p:nvPr/>
+        </p:nvSpPr>
+        <p:spPr>
+          <a:xfrm>
+            <a:off x="4619549" y="4114800"/>
+            <a:ext cx="446227" cy="274320"/>
+          </a:xfrm>
+          <a:prstGeom prst="rect">
+            <a:avLst/>
+          </a:prstGeom>
+          <a:noFill/>
+          <a:ln/>
+        </p:spPr>
+        <p:txBody>
+          <a:bodyPr wrap="square" lIns="0" tIns="0" rIns="0" bIns="0" rtlCol="0" anchor="ctr"/>
+          <a:lstStyle/>
+          <a:p>
+            <a:pPr marL="0" indent="0" algn="ctr">
+              <a:buNone/>
+            </a:pPr>
+            <a:r>
+              <a:rPr lang="en-US" sz="1050" b="1" dirty="0">
+                <a:solidFill>
+                  <a:srgbClr val="E0483E"/>
+                </a:solidFill>
+                <a:latin typeface="Calibri" pitchFamily="34" charset="0"/>
+                <a:ea typeface="Calibri" pitchFamily="34" charset="-122"/>
+                <a:cs typeface="Calibri" pitchFamily="34" charset="-120"/>
+              </a:rPr>
+              <a:t>Foco</a:t>
+            </a:r>
+            <a:endParaRPr lang="en-US" sz="1050" dirty="0"/>
+          </a:p>
+        </p:txBody>
+      </p:sp>
+      <p:sp>
+        <p:nvSpPr>
+          <p:cNvPr id="32" name="Shape 28"/>
+          <p:cNvSpPr/>
+          <p:nvPr/>
+        </p:nvSpPr>
+        <p:spPr>
+          <a:xfrm>
+            <a:off x="5138928" y="4114800"/>
+            <a:ext cx="512064" cy="274320"/>
+          </a:xfrm>
+          <a:prstGeom prst="roundRect">
+            <a:avLst>
+              <a:gd name="adj" fmla="val 50000"/>
+            </a:avLst>
+          </a:prstGeom>
+          <a:solidFill>
+            <a:srgbClr val="FDE8E6"/>
+          </a:solidFill>
+          <a:ln w="12700">
+            <a:solidFill>
+              <a:srgbClr val="FDE8E6"/>
+            </a:solidFill>
+            <a:prstDash val="solid"/>
+          </a:ln>
+        </p:spPr>
+        <p:txBody>
+          <a:bodyPr/>
+          <a:lstStyle/>
+          <a:p>
+            <a:endParaRPr lang="es-ES"/>
+          </a:p>
+        </p:txBody>
+      </p:sp>
+      <p:sp>
+        <p:nvSpPr>
+          <p:cNvPr id="33" name="Text 29"/>
+          <p:cNvSpPr txBox="1"/>
+          <p:nvPr/>
+        </p:nvSpPr>
+        <p:spPr>
+          <a:xfrm>
+            <a:off x="5138928" y="4114800"/>
+            <a:ext cx="512064" cy="274320"/>
+          </a:xfrm>
+          <a:prstGeom prst="rect">
+            <a:avLst/>
+          </a:prstGeom>
+          <a:noFill/>
+          <a:ln/>
+        </p:spPr>
+        <p:txBody>
+          <a:bodyPr wrap="square" lIns="0" tIns="0" rIns="0" bIns="0" rtlCol="0" anchor="ctr"/>
+          <a:lstStyle/>
+          <a:p>
+            <a:pPr marL="0" indent="0" algn="ctr">
+              <a:buNone/>
+            </a:pPr>
+            <a:r>
+              <a:rPr lang="en-US" sz="1050" b="1" dirty="0">
+                <a:solidFill>
+                  <a:srgbClr val="E0483E"/>
+                </a:solidFill>
+                <a:latin typeface="Calibri" pitchFamily="34" charset="0"/>
+                <a:ea typeface="Calibri" pitchFamily="34" charset="-122"/>
+                <a:cs typeface="Calibri" pitchFamily="34" charset="-120"/>
+              </a:rPr>
+              <a:t>Ritmo</a:t>
+            </a:r>
+            <a:endParaRPr lang="en-US" sz="1050" dirty="0"/>
+          </a:p>
+        </p:txBody>
+      </p:sp>
+      <p:sp>
+        <p:nvSpPr>
+          <p:cNvPr id="34" name="Shape 30"/>
+          <p:cNvSpPr/>
+          <p:nvPr/>
+        </p:nvSpPr>
+        <p:spPr>
+          <a:xfrm>
+            <a:off x="7086600" y="3063240"/>
+            <a:ext cx="4526280" cy="1463040"/>
+          </a:xfrm>
+          <a:prstGeom prst="roundRect">
+            <a:avLst>
+              <a:gd name="adj" fmla="val 7500"/>
+            </a:avLst>
+          </a:prstGeom>
+          <a:solidFill>
+            <a:srgbClr val="FDE8E6"/>
+          </a:solidFill>
+          <a:ln w="12700">
+            <a:solidFill>
+              <a:srgbClr val="FDE8E6"/>
+            </a:solidFill>
+            <a:prstDash val="solid"/>
+          </a:ln>
+        </p:spPr>
+        <p:txBody>
+          <a:bodyPr/>
+          <a:lstStyle/>
+          <a:p>
+            <a:endParaRPr lang="es-ES"/>
+          </a:p>
+        </p:txBody>
+      </p:sp>
+      <p:sp>
+        <p:nvSpPr>
+          <p:cNvPr id="35" name="Text 31"/>
+          <p:cNvSpPr txBox="1"/>
+          <p:nvPr/>
+        </p:nvSpPr>
+        <p:spPr>
+          <a:xfrm>
+            <a:off x="7269480" y="3172968"/>
+            <a:ext cx="4206240" cy="1243584"/>
+          </a:xfrm>
+          <a:prstGeom prst="rect">
+            <a:avLst/>
+          </a:prstGeom>
+          <a:noFill/>
+          <a:ln/>
+        </p:spPr>
+        <p:txBody>
+          <a:bodyPr wrap="square" lIns="0" tIns="0" rIns="0" bIns="0" rtlCol="0" anchor="ctr"/>
+          <a:lstStyle/>
+          <a:p>
+            <a:pPr marL="0" indent="0">
+              <a:buNone/>
+            </a:pPr>
+            <a:r>
+              <a:rPr lang="en-US" sz="1250" dirty="0">
+                <a:solidFill>
+                  <a:srgbClr val="0F1B2D"/>
+                </a:solidFill>
+                <a:latin typeface="Calibri" pitchFamily="34" charset="0"/>
+                <a:ea typeface="Calibri" pitchFamily="34" charset="-122"/>
+                <a:cs typeface="Calibri" pitchFamily="34" charset="-120"/>
+              </a:rPr>
+              <a:t>4 sprints de 2 semanas (19/10 – 11/12). Daily de 15 minutos. La planificación de cada sprint dura como máximo 4 horas (2 h por semana de sprint), y la revisión y la retrospectiva se hacen al cierre de cada sprint.</a:t>
+            </a:r>
+            <a:endParaRPr lang="en-US" sz="1250" dirty="0"/>
+          </a:p>
+        </p:txBody>
+      </p:sp>
+      <p:sp>
+        <p:nvSpPr>
+          <p:cNvPr id="36" name="Shape 32"/>
+          <p:cNvSpPr/>
+          <p:nvPr/>
+        </p:nvSpPr>
+        <p:spPr>
+          <a:xfrm>
+            <a:off x="548640" y="4663440"/>
+            <a:ext cx="2743200" cy="1463040"/>
+          </a:xfrm>
+          <a:prstGeom prst="roundRect">
+            <a:avLst>
+              <a:gd name="adj" fmla="val 7500"/>
+            </a:avLst>
+          </a:prstGeom>
+          <a:solidFill>
+            <a:srgbClr val="12233F"/>
+          </a:solidFill>
+          <a:ln w="12700">
+            <a:solidFill>
+              <a:srgbClr val="12233F"/>
+            </a:solidFill>
+            <a:prstDash val="solid"/>
+          </a:ln>
+        </p:spPr>
+        <p:txBody>
+          <a:bodyPr/>
+          <a:lstStyle/>
+          <a:p>
+            <a:endParaRPr lang="es-ES"/>
+          </a:p>
+        </p:txBody>
+      </p:sp>
+      <p:sp>
+        <p:nvSpPr>
+          <p:cNvPr id="37" name="Shape 33"/>
+          <p:cNvSpPr/>
+          <p:nvPr/>
+        </p:nvSpPr>
+        <p:spPr>
+          <a:xfrm>
+            <a:off x="731520" y="4864608"/>
+            <a:ext cx="685800" cy="685800"/>
+          </a:xfrm>
+          <a:prstGeom prst="ellipse">
+            <a:avLst/>
+          </a:prstGeom>
+          <a:solidFill>
+            <a:srgbClr val="FFFFFF"/>
+          </a:solidFill>
+          <a:ln w="12700">
+            <a:solidFill>
+              <a:srgbClr val="FFFFFF"/>
+            </a:solidFill>
+            <a:prstDash val="solid"/>
+          </a:ln>
+        </p:spPr>
+        <p:txBody>
+          <a:bodyPr/>
+          <a:lstStyle/>
+          <a:p>
+            <a:endParaRPr lang="es-ES"/>
+          </a:p>
+        </p:txBody>
+      </p:sp>
+      <p:pic>
+        <p:nvPicPr>
+          <p:cNvPr id="38" name="Image 2" descr="preencoded.png"/>
+          <p:cNvPicPr>
+            <a:picLocks noChangeAspect="1"/>
+          </p:cNvPicPr>
+          <p:nvPr/>
+        </p:nvPicPr>
+        <p:blipFill>
+          <a:blip r:embed="rId5"/>
+          <a:stretch>
+            <a:fillRect/>
+          </a:stretch>
+        </p:blipFill>
+        <p:spPr>
+          <a:xfrm>
+            <a:off x="886968" y="5020056"/>
+            <a:ext cx="374904" cy="374904"/>
+          </a:xfrm>
+          <a:prstGeom prst="rect">
+            <a:avLst/>
+          </a:prstGeom>
+        </p:spPr>
+      </p:pic>
+      <p:sp>
+        <p:nvSpPr>
+          <p:cNvPr id="39" name="Text 34"/>
+          <p:cNvSpPr txBox="1"/>
+          <p:nvPr/>
+        </p:nvSpPr>
+        <p:spPr>
+          <a:xfrm>
+            <a:off x="2788920" y="4773168"/>
+            <a:ext cx="365760" cy="320040"/>
+          </a:xfrm>
+          <a:prstGeom prst="rect">
+            <a:avLst/>
+          </a:prstGeom>
+          <a:noFill/>
+          <a:ln/>
+        </p:spPr>
+        <p:txBody>
+          <a:bodyPr wrap="square" lIns="0" tIns="0" rIns="0" bIns="0" rtlCol="0" anchor="ctr"/>
+          <a:lstStyle/>
+          <a:p>
+            <a:pPr marL="0" indent="0" algn="r">
+              <a:buNone/>
+            </a:pPr>
+            <a:r>
+              <a:rPr lang="en-US" sz="1400" b="1" dirty="0">
+                <a:solidFill>
+                  <a:srgbClr val="FFFFFF"/>
+                </a:solidFill>
+                <a:latin typeface="Calibri" pitchFamily="34" charset="0"/>
+                <a:ea typeface="Calibri" pitchFamily="34" charset="-122"/>
+                <a:cs typeface="Calibri" pitchFamily="34" charset="-120"/>
+              </a:rPr>
+              <a:t>6</a:t>
+            </a:r>
+            <a:endParaRPr lang="en-US" sz="1400" dirty="0"/>
+          </a:p>
+        </p:txBody>
+      </p:sp>
+      <p:sp>
+        <p:nvSpPr>
+          <p:cNvPr id="40" name="Text 35"/>
+          <p:cNvSpPr txBox="1"/>
+          <p:nvPr/>
+        </p:nvSpPr>
+        <p:spPr>
+          <a:xfrm>
+            <a:off x="731520" y="5577840"/>
+            <a:ext cx="2468880" cy="502920"/>
+          </a:xfrm>
+          <a:prstGeom prst="rect">
+            <a:avLst/>
+          </a:prstGeom>
+          <a:noFill/>
+          <a:ln/>
+        </p:spPr>
+        <p:txBody>
+          <a:bodyPr wrap="square" lIns="0" tIns="0" rIns="0" bIns="0" rtlCol="0" anchor="t"/>
+          <a:lstStyle/>
+          <a:p>
+            <a:pPr marL="0" indent="0">
+              <a:buNone/>
+            </a:pPr>
+            <a:r>
+              <a:rPr lang="en-US" sz="1500" b="1" dirty="0">
+                <a:solidFill>
+                  <a:srgbClr val="FFFFFF"/>
+                </a:solidFill>
+                <a:latin typeface="Calibri" pitchFamily="34" charset="0"/>
+                <a:ea typeface="Calibri" pitchFamily="34" charset="-122"/>
+                <a:cs typeface="Calibri" pitchFamily="34" charset="-120"/>
+              </a:rPr>
+              <a:t>Desarrollo iterativo</a:t>
+            </a:r>
+            <a:endParaRPr lang="en-US" sz="1500" dirty="0"/>
+          </a:p>
+        </p:txBody>
+      </p:sp>
+      <p:sp>
+        <p:nvSpPr>
+          <p:cNvPr id="41" name="Shape 36"/>
+          <p:cNvSpPr/>
+          <p:nvPr/>
+        </p:nvSpPr>
+        <p:spPr>
+          <a:xfrm>
+            <a:off x="3474720" y="4663440"/>
+            <a:ext cx="3429000" cy="1463040"/>
+          </a:xfrm>
+          <a:prstGeom prst="roundRect">
+            <a:avLst>
+              <a:gd name="adj" fmla="val 7500"/>
+            </a:avLst>
+          </a:prstGeom>
+          <a:solidFill>
+            <a:srgbClr val="FFFFFF"/>
+          </a:solidFill>
+          <a:ln w="9525">
+            <a:solidFill>
+              <a:srgbClr val="D7DEE9"/>
+            </a:solidFill>
+            <a:prstDash val="solid"/>
+          </a:ln>
+        </p:spPr>
+        <p:txBody>
+          <a:bodyPr/>
+          <a:lstStyle/>
+          <a:p>
+            <a:endParaRPr lang="es-ES"/>
+          </a:p>
+        </p:txBody>
       </p:sp>
       <p:sp>
         <p:nvSpPr>
@@ -5023,7 +5119,7 @@
           <a:bodyPr wrap="square" lIns="0" tIns="0" rIns="0" bIns="0" rtlCol="0" anchor="t"/>
           <a:lstStyle/>
           <a:p>
-            <a:pPr indent="0" marL="0">
+            <a:pPr marL="0" indent="0">
               <a:buNone/>
             </a:pPr>
             <a:r>
@@ -5067,6 +5163,13 @@
             <a:prstDash val="solid"/>
           </a:ln>
         </p:spPr>
+        <p:txBody>
+          <a:bodyPr/>
+          <a:lstStyle/>
+          <a:p>
+            <a:endParaRPr lang="es-ES"/>
+          </a:p>
+        </p:txBody>
       </p:sp>
       <p:sp>
         <p:nvSpPr>
@@ -5089,7 +5192,7 @@
           <a:bodyPr wrap="square" lIns="0" tIns="0" rIns="0" bIns="0" rtlCol="0" anchor="ctr"/>
           <a:lstStyle/>
           <a:p>
-            <a:pPr algn="ctr" indent="0" marL="0">
+            <a:pPr marL="0" indent="0" algn="ctr">
               <a:buNone/>
             </a:pPr>
             <a:r>
@@ -5133,6 +5236,13 @@
             <a:prstDash val="solid"/>
           </a:ln>
         </p:spPr>
+        <p:txBody>
+          <a:bodyPr/>
+          <a:lstStyle/>
+          <a:p>
+            <a:endParaRPr lang="es-ES"/>
+          </a:p>
+        </p:txBody>
       </p:sp>
       <p:sp>
         <p:nvSpPr>
@@ -5155,7 +5265,7 @@
           <a:bodyPr wrap="square" lIns="0" tIns="0" rIns="0" bIns="0" rtlCol="0" anchor="ctr"/>
           <a:lstStyle/>
           <a:p>
-            <a:pPr algn="ctr" indent="0" marL="0">
+            <a:pPr marL="0" indent="0" algn="ctr">
               <a:buNone/>
             </a:pPr>
             <a:r>
@@ -5199,6 +5309,13 @@
             <a:prstDash val="solid"/>
           </a:ln>
         </p:spPr>
+        <p:txBody>
+          <a:bodyPr/>
+          <a:lstStyle/>
+          <a:p>
+            <a:endParaRPr lang="es-ES"/>
+          </a:p>
+        </p:txBody>
       </p:sp>
       <p:sp>
         <p:nvSpPr>
@@ -5221,7 +5338,7 @@
           <a:bodyPr wrap="square" lIns="0" tIns="0" rIns="0" bIns="0" rtlCol="0" anchor="ctr"/>
           <a:lstStyle/>
           <a:p>
-            <a:pPr algn="ctr" indent="0" marL="0">
+            <a:pPr marL="0" indent="0" algn="ctr">
               <a:buNone/>
             </a:pPr>
             <a:r>
@@ -5265,6 +5382,13 @@
             <a:prstDash val="solid"/>
           </a:ln>
         </p:spPr>
+        <p:txBody>
+          <a:bodyPr/>
+          <a:lstStyle/>
+          <a:p>
+            <a:endParaRPr lang="es-ES"/>
+          </a:p>
+        </p:txBody>
       </p:sp>
       <p:sp>
         <p:nvSpPr>
@@ -5287,11 +5411,11 @@
           <a:bodyPr wrap="square" lIns="0" tIns="0" rIns="0" bIns="0" rtlCol="0" anchor="ctr"/>
           <a:lstStyle/>
           <a:p>
-            <a:pPr indent="0" marL="0">
-              <a:buNone/>
-            </a:pPr>
-            <a:r>
-              <a:rPr lang="en-US" sz="1250" dirty="0">
+            <a:pPr marL="0" indent="0">
+              <a:buNone/>
+            </a:pPr>
+            <a:r>
+              <a:rPr lang="en-US" sz="1250">
                 <a:solidFill>
                   <a:srgbClr val="0F1B2D"/>
                 </a:solidFill>
@@ -5299,7 +5423,7 @@
                 <a:ea typeface="Calibri" pitchFamily="34" charset="-122"/>
                 <a:cs typeface="Calibri" pitchFamily="34" charset="-120"/>
               </a:rPr>
-              <a:t>Sprint 1: cargar video y extraer frames. Sprint 2: YOLOv4, filtrado y clips. Sprint 3: ConvLSTM. Sprint 4: interfaz y alertas. Al final de cada sprint, Albert revisa el incremento y ajustamos el backlog.</a:t>
+              <a:t>Sprint 1: cargar video y extraer frames. Sprint 2: YOLOv8, umbrales (HU11), filtrado y clips. Sprint 3: ConvLSTM. Sprint 4: interfaz y alertas. Al final de cada sprint, Albert revisa el incremento y ajustamos el backlog.</a:t>
             </a:r>
             <a:endParaRPr lang="en-US" sz="1250" dirty="0"/>
           </a:p>
@@ -5307,7 +5431,7 @@
       </p:sp>
       <p:sp>
         <p:nvSpPr>
-          <p:cNvPr id="25" name="Slide Number Placeholder 0"/>
+          <p:cNvPr id="51" name="Slide Number Placeholder 0"/>
           <p:cNvSpPr>
             <a:spLocks noGrp="1"/>
           </p:cNvSpPr>
@@ -5325,7 +5449,7 @@
           </a:prstGeom>
           <a:extLst>
             <a:ext uri="{C572A759-6A51-4108-AA02-DFA0A04FC94B}">
-              <ma14:wrappingTextBoxFlag xmlns:ma14="http://schemas.microsoft.com/office/mac/drawingml/2011/main" val="0"/>
+              <ma14:wrappingTextBoxFlag xmlns:ma14="http://schemas.microsoft.com/office/mac/drawingml/2011/main" xmlns="" val="0"/>
             </a:ext>
           </a:extLst>
         </p:spPr>
@@ -5346,7 +5470,7 @@
           <a:p>
             <a:pPr algn="r"/>
             <a:fld id="{F7021451-1387-4CA6-816F-3879F97B5CBC}" type="slidenum">
-              <a:rPr b="0" lang="en-US"/>
+              <a:rPr lang="en-US" b="0"/>
               <a:t>3</a:t>
             </a:fld>
             <a:endParaRPr lang="en-US"/>
@@ -5654,4 +5778,319 @@
     </a:ext>
   </a:extLst>
 </a:theme>
+</file>
+
+<file path=ppt/theme/theme2.xml><?xml version="1.0" encoding="utf-8"?>
+<a:theme xmlns:a="http://schemas.openxmlformats.org/drawingml/2006/main" name="Tema de Office">
+  <a:themeElements>
+    <a:clrScheme name="Office">
+      <a:dk1>
+        <a:sysClr val="windowText" lastClr="000000"/>
+      </a:dk1>
+      <a:lt1>
+        <a:sysClr val="window" lastClr="FFFFFF"/>
+      </a:lt1>
+      <a:dk2>
+        <a:srgbClr val="0E2841"/>
+      </a:dk2>
+      <a:lt2>
+        <a:srgbClr val="E8E8E8"/>
+      </a:lt2>
+      <a:accent1>
+        <a:srgbClr val="156082"/>
+      </a:accent1>
+      <a:accent2>
+        <a:srgbClr val="E97132"/>
+      </a:accent2>
+      <a:accent3>
+        <a:srgbClr val="196B24"/>
+      </a:accent3>
+      <a:accent4>
+        <a:srgbClr val="0F9ED5"/>
+      </a:accent4>
+      <a:accent5>
+        <a:srgbClr val="A02B93"/>
+      </a:accent5>
+      <a:accent6>
+        <a:srgbClr val="4EA72E"/>
+      </a:accent6>
+      <a:hlink>
+        <a:srgbClr val="467886"/>
+      </a:hlink>
+      <a:folHlink>
+        <a:srgbClr val="96607D"/>
+      </a:folHlink>
+    </a:clrScheme>
+    <a:fontScheme name="Office">
+      <a:majorFont>
+        <a:latin typeface="Aptos Display" panose="02110004020202020204"/>
+        <a:ea typeface=""/>
+        <a:cs typeface=""/>
+        <a:font script="Jpan" typeface="游ゴシック Light"/>
+        <a:font script="Hang" typeface="맑은 고딕"/>
+        <a:font script="Hans" typeface="等线 Light"/>
+        <a:font script="Hant" typeface="新細明體"/>
+        <a:font script="Arab" typeface="Times New Roman"/>
+        <a:font script="Hebr" typeface="Times New Roman"/>
+        <a:font script="Thai" typeface="Angsana New"/>
+        <a:font script="Ethi" typeface="Nyala"/>
+        <a:font script="Beng" typeface="Vrinda"/>
+        <a:font script="Gujr" typeface="Shruti"/>
+        <a:font script="Khmr" typeface="MoolBoran"/>
+        <a:font script="Knda" typeface="Tunga"/>
+        <a:font script="Guru" typeface="Raavi"/>
+        <a:font script="Cans" typeface="Euphemia"/>
+        <a:font script="Cher" typeface="Plantagenet Cherokee"/>
+        <a:font script="Yiii" typeface="Microsoft Yi Baiti"/>
+        <a:font script="Tibt" typeface="Microsoft Himalaya"/>
+        <a:font script="Thaa" typeface="MV Boli"/>
+        <a:font script="Deva" typeface="Mangal"/>
+        <a:font script="Telu" typeface="Gautami"/>
+        <a:font script="Taml" typeface="Latha"/>
+        <a:font script="Syrc" typeface="Estrangelo Edessa"/>
+        <a:font script="Orya" typeface="Kalinga"/>
+        <a:font script="Mlym" typeface="Kartika"/>
+        <a:font script="Laoo" typeface="DokChampa"/>
+        <a:font script="Sinh" typeface="Iskoola Pota"/>
+        <a:font script="Mong" typeface="Mongolian Baiti"/>
+        <a:font script="Viet" typeface="Times New Roman"/>
+        <a:font script="Uigh" typeface="Microsoft Uighur"/>
+        <a:font script="Geor" typeface="Sylfaen"/>
+        <a:font script="Armn" typeface="Arial"/>
+        <a:font script="Bugi" typeface="Leelawadee UI"/>
+        <a:font script="Bopo" typeface="Microsoft JhengHei"/>
+        <a:font script="Java" typeface="Javanese Text"/>
+        <a:font script="Lisu" typeface="Segoe UI"/>
+        <a:font script="Mymr" typeface="Myanmar Text"/>
+        <a:font script="Nkoo" typeface="Ebrima"/>
+        <a:font script="Olck" typeface="Nirmala UI"/>
+        <a:font script="Osma" typeface="Ebrima"/>
+        <a:font script="Phag" typeface="Phagspa"/>
+        <a:font script="Syrn" typeface="Estrangelo Edessa"/>
+        <a:font script="Syrj" typeface="Estrangelo Edessa"/>
+        <a:font script="Syre" typeface="Estrangelo Edessa"/>
+        <a:font script="Sora" typeface="Nirmala UI"/>
+        <a:font script="Tale" typeface="Microsoft Tai Le"/>
+        <a:font script="Talu" typeface="Microsoft New Tai Lue"/>
+        <a:font script="Tfng" typeface="Ebrima"/>
+      </a:majorFont>
+      <a:minorFont>
+        <a:latin typeface="Aptos" panose="02110004020202020204"/>
+        <a:ea typeface=""/>
+        <a:cs typeface=""/>
+        <a:font script="Jpan" typeface="游ゴシック"/>
+        <a:font script="Hang" typeface="맑은 고딕"/>
+        <a:font script="Hans" typeface="等线"/>
+        <a:font script="Hant" typeface="新細明體"/>
+        <a:font script="Arab" typeface="Arial"/>
+        <a:font script="Hebr" typeface="Arial"/>
+        <a:font script="Thai" typeface="Cordia New"/>
+        <a:font script="Ethi" typeface="Nyala"/>
+        <a:font script="Beng" typeface="Vrinda"/>
+        <a:font script="Gujr" typeface="Shruti"/>
+        <a:font script="Khmr" typeface="DaunPenh"/>
+        <a:font script="Knda" typeface="Tunga"/>
+        <a:font script="Guru" typeface="Raavi"/>
+        <a:font script="Cans" typeface="Euphemia"/>
+        <a:font script="Cher" typeface="Plantagenet Cherokee"/>
+        <a:font script="Yiii" typeface="Microsoft Yi Baiti"/>
+        <a:font script="Tibt" typeface="Microsoft Himalaya"/>
+        <a:font script="Thaa" typeface="MV Boli"/>
+        <a:font script="Deva" typeface="Mangal"/>
+        <a:font script="Telu" typeface="Gautami"/>
+        <a:font script="Taml" typeface="Latha"/>
+        <a:font script="Syrc" typeface="Estrangelo Edessa"/>
+        <a:font script="Orya" typeface="Kalinga"/>
+        <a:font script="Mlym" typeface="Kartika"/>
+        <a:font script="Laoo" typeface="DokChampa"/>
+        <a:font script="Sinh" typeface="Iskoola Pota"/>
+        <a:font script="Mong" typeface="Mongolian Baiti"/>
+        <a:font script="Viet" typeface="Arial"/>
+        <a:font script="Uigh" typeface="Microsoft Uighur"/>
+        <a:font script="Geor" typeface="Sylfaen"/>
+        <a:font script="Armn" typeface="Arial"/>
+        <a:font script="Bugi" typeface="Leelawadee UI"/>
+        <a:font script="Bopo" typeface="Microsoft JhengHei"/>
+        <a:font script="Java" typeface="Javanese Text"/>
+        <a:font script="Lisu" typeface="Segoe UI"/>
+        <a:font script="Mymr" typeface="Myanmar Text"/>
+        <a:font script="Nkoo" typeface="Ebrima"/>
+        <a:font script="Olck" typeface="Nirmala UI"/>
+        <a:font script="Osma" typeface="Ebrima"/>
+        <a:font script="Phag" typeface="Phagspa"/>
+        <a:font script="Syrn" typeface="Estrangelo Edessa"/>
+        <a:font script="Syrj" typeface="Estrangelo Edessa"/>
+        <a:font script="Syre" typeface="Estrangelo Edessa"/>
+        <a:font script="Sora" typeface="Nirmala UI"/>
+        <a:font script="Tale" typeface="Microsoft Tai Le"/>
+        <a:font script="Talu" typeface="Microsoft New Tai Lue"/>
+        <a:font script="Tfng" typeface="Ebrima"/>
+      </a:minorFont>
+    </a:fontScheme>
+    <a:fmtScheme name="Office">
+      <a:fillStyleLst>
+        <a:solidFill>
+          <a:schemeClr val="phClr"/>
+        </a:solidFill>
+        <a:gradFill rotWithShape="1">
+          <a:gsLst>
+            <a:gs pos="0">
+              <a:schemeClr val="phClr">
+                <a:lumMod val="110000"/>
+                <a:satMod val="105000"/>
+                <a:tint val="67000"/>
+              </a:schemeClr>
+            </a:gs>
+            <a:gs pos="50000">
+              <a:schemeClr val="phClr">
+                <a:lumMod val="105000"/>
+                <a:satMod val="103000"/>
+                <a:tint val="73000"/>
+              </a:schemeClr>
+            </a:gs>
+            <a:gs pos="100000">
+              <a:schemeClr val="phClr">
+                <a:lumMod val="105000"/>
+                <a:satMod val="109000"/>
+                <a:tint val="81000"/>
+              </a:schemeClr>
+            </a:gs>
+          </a:gsLst>
+          <a:lin ang="5400000" scaled="0"/>
+        </a:gradFill>
+        <a:gradFill rotWithShape="1">
+          <a:gsLst>
+            <a:gs pos="0">
+              <a:schemeClr val="phClr">
+                <a:satMod val="103000"/>
+                <a:lumMod val="102000"/>
+                <a:tint val="94000"/>
+              </a:schemeClr>
+            </a:gs>
+            <a:gs pos="50000">
+              <a:schemeClr val="phClr">
+                <a:satMod val="110000"/>
+                <a:lumMod val="100000"/>
+                <a:shade val="100000"/>
+              </a:schemeClr>
+            </a:gs>
+            <a:gs pos="100000">
+              <a:schemeClr val="phClr">
+                <a:lumMod val="99000"/>
+                <a:satMod val="120000"/>
+                <a:shade val="78000"/>
+              </a:schemeClr>
+            </a:gs>
+          </a:gsLst>
+          <a:lin ang="5400000" scaled="0"/>
+        </a:gradFill>
+      </a:fillStyleLst>
+      <a:lnStyleLst>
+        <a:ln w="12700" cap="flat" cmpd="sng" algn="ctr">
+          <a:solidFill>
+            <a:schemeClr val="phClr"/>
+          </a:solidFill>
+          <a:prstDash val="solid"/>
+          <a:miter lim="800000"/>
+        </a:ln>
+        <a:ln w="19050" cap="flat" cmpd="sng" algn="ctr">
+          <a:solidFill>
+            <a:schemeClr val="phClr"/>
+          </a:solidFill>
+          <a:prstDash val="solid"/>
+          <a:miter lim="800000"/>
+        </a:ln>
+        <a:ln w="25400" cap="flat" cmpd="sng" algn="ctr">
+          <a:solidFill>
+            <a:schemeClr val="phClr"/>
+          </a:solidFill>
+          <a:prstDash val="solid"/>
+          <a:miter lim="800000"/>
+        </a:ln>
+      </a:lnStyleLst>
+      <a:effectStyleLst>
+        <a:effectStyle>
+          <a:effectLst/>
+        </a:effectStyle>
+        <a:effectStyle>
+          <a:effectLst/>
+        </a:effectStyle>
+        <a:effectStyle>
+          <a:effectLst>
+            <a:outerShdw blurRad="57150" dist="19050" dir="5400000" algn="ctr" rotWithShape="0">
+              <a:srgbClr val="000000">
+                <a:alpha val="63000"/>
+              </a:srgbClr>
+            </a:outerShdw>
+          </a:effectLst>
+        </a:effectStyle>
+      </a:effectStyleLst>
+      <a:bgFillStyleLst>
+        <a:solidFill>
+          <a:schemeClr val="phClr"/>
+        </a:solidFill>
+        <a:solidFill>
+          <a:schemeClr val="phClr">
+            <a:tint val="95000"/>
+            <a:satMod val="170000"/>
+          </a:schemeClr>
+        </a:solidFill>
+        <a:gradFill rotWithShape="1">
+          <a:gsLst>
+            <a:gs pos="0">
+              <a:schemeClr val="phClr">
+                <a:tint val="93000"/>
+                <a:satMod val="150000"/>
+                <a:shade val="98000"/>
+                <a:lumMod val="102000"/>
+              </a:schemeClr>
+            </a:gs>
+            <a:gs pos="50000">
+              <a:schemeClr val="phClr">
+                <a:tint val="98000"/>
+                <a:satMod val="130000"/>
+                <a:shade val="90000"/>
+                <a:lumMod val="103000"/>
+              </a:schemeClr>
+            </a:gs>
+            <a:gs pos="100000">
+              <a:schemeClr val="phClr">
+                <a:shade val="63000"/>
+                <a:satMod val="120000"/>
+              </a:schemeClr>
+            </a:gs>
+          </a:gsLst>
+          <a:lin ang="5400000" scaled="0"/>
+        </a:gradFill>
+      </a:bgFillStyleLst>
+    </a:fmtScheme>
+  </a:themeElements>
+  <a:objectDefaults>
+    <a:lnDef>
+      <a:spPr/>
+      <a:bodyPr/>
+      <a:lstStyle/>
+      <a:style>
+        <a:lnRef idx="2">
+          <a:schemeClr val="accent1"/>
+        </a:lnRef>
+        <a:fillRef idx="0">
+          <a:schemeClr val="accent1"/>
+        </a:fillRef>
+        <a:effectRef idx="1">
+          <a:schemeClr val="accent1"/>
+        </a:effectRef>
+        <a:fontRef idx="minor">
+          <a:schemeClr val="tx1"/>
+        </a:fontRef>
+      </a:style>
+    </a:lnDef>
+  </a:objectDefaults>
+  <a:extraClrSchemeLst/>
+  <a:extLst>
+    <a:ext uri="{05A4C25C-085E-4340-85A3-A5531E510DB2}">
+      <thm15:themeFamily xmlns:thm15="http://schemas.microsoft.com/office/thememl/2012/main" name="Office Theme" id="{2E142A2C-CD16-42D6-873A-C26D2A0506FA}" vid="{1BDDFF52-6CD6-40A5-AB3C-68EB2F1E4D0A}"/>
+    </a:ext>
+  </a:extLst>
+</a:theme>
 </file>